--- a/odata/ODATA_QR03_Single_Source_of_Truth.pptx
+++ b/odata/ODATA_QR03_Single_Source_of_Truth.pptx
@@ -16,6 +16,8 @@
     <p:sldId id="264" r:id="rId15"/>
     <p:sldId id="265" r:id="rId16"/>
     <p:sldId id="266" r:id="rId17"/>
+    <p:sldId id="267" r:id="rId18"/>
+    <p:sldId id="268" r:id="rId19"/>
   </p:sldIdLst>
   <p:sldSz cx="12191695" cy="6858000" type="screen4x3"/>
   <p:notesSz cx="6858000" cy="9144000"/>
@@ -3284,7 +3286,7 @@
                 </a:solidFill>
                 <a:latin typeface="Consolas"/>
               </a:rPr>
-              <a:t>INVESTMENT</a:t>
+              <a:t>BUILT ON MICROSOFT</a:t>
             </a:r>
           </a:p>
         </p:txBody>
@@ -3323,7 +3325,7 @@
                 </a:solidFill>
                 <a:latin typeface="Calibri Light"/>
               </a:rPr>
-              <a:t>Lean to start, scales with the project</a:t>
+              <a:t>100% Power Platform, in the client tenant</a:t>
             </a:r>
           </a:p>
         </p:txBody>
@@ -3356,13 +3358,13 @@
               </a:spcAft>
             </a:pPr>
             <a:r>
-              <a:rPr sz="1500" b="0">
+              <a:rPr sz="1600" b="0">
                 <a:solidFill>
                   <a:srgbClr val="9FB2C0"/>
                 </a:solidFill>
                 <a:latin typeface="Calibri"/>
               </a:rPr>
-              <a:t>List prices, Microsoft 2026. To validate against the client's existing licensing.</a:t>
+              <a:t>One reversible solution. No new tools to learn outside the ecosystem they already use.</a:t>
             </a:r>
           </a:p>
         </p:txBody>
@@ -3375,8 +3377,8 @@
         </p:nvSpPr>
         <p:spPr>
           <a:xfrm>
-            <a:off x="822960" y="2697480"/>
-            <a:ext cx="10515600" cy="502920"/>
+            <a:off x="822960" y="2834640"/>
+            <a:ext cx="2121408" cy="1737360"/>
           </a:xfrm>
           <a:prstGeom prst="roundRect">
             <a:avLst/>
@@ -3421,8 +3423,8 @@
         </p:nvSpPr>
         <p:spPr>
           <a:xfrm>
-            <a:off x="1051560" y="2788920"/>
-            <a:ext cx="5486400" cy="365760"/>
+            <a:off x="960120" y="3063240"/>
+            <a:ext cx="1847088" cy="1371600"/>
           </a:xfrm>
           <a:prstGeom prst="rect">
             <a:avLst/>
@@ -3437,109 +3439,47 @@
           <a:p>
             <a:pPr algn="l">
               <a:spcAft>
+                <a:spcPts val="400"/>
+              </a:spcAft>
+            </a:pPr>
+            <a:r>
+              <a:rPr sz="1500" b="1">
+                <a:solidFill>
+                  <a:srgbClr val="35C2C9"/>
+                </a:solidFill>
+                <a:latin typeface="Calibri"/>
+              </a:rPr>
+              <a:t>Dataverse</a:t>
+            </a:r>
+          </a:p>
+          <a:p>
+            <a:pPr algn="l">
+              <a:spcAft>
                 <a:spcPts val="600"/>
               </a:spcAft>
             </a:pPr>
             <a:r>
-              <a:rPr sz="1400" b="0">
-                <a:solidFill>
-                  <a:srgbClr val="E6EDF3"/>
+              <a:rPr sz="1200" b="0">
+                <a:solidFill>
+                  <a:srgbClr val="9FB2C0"/>
                 </a:solidFill>
                 <a:latin typeface="Calibri"/>
               </a:rPr>
-              <a:t>Power Apps Premium</a:t>
-            </a:r>
-          </a:p>
-        </p:txBody>
-      </p:sp>
-      <p:sp>
-        <p:nvSpPr>
-          <p:cNvPr id="7" name="TextBox 6"/>
-          <p:cNvSpPr txBox="1"/>
-          <p:nvPr/>
-        </p:nvSpPr>
-        <p:spPr>
-          <a:xfrm>
-            <a:off x="6400800" y="2788920"/>
-            <a:ext cx="2926080" cy="365760"/>
-          </a:xfrm>
-          <a:prstGeom prst="rect">
-            <a:avLst/>
-          </a:prstGeom>
-          <a:noFill/>
-        </p:spPr>
-        <p:txBody>
-          <a:bodyPr wrap="square">
-            <a:spAutoFit/>
-          </a:bodyPr>
-          <a:lstStyle/>
-          <a:p>
-            <a:pPr algn="l">
-              <a:spcAft>
-                <a:spcPts val="600"/>
-              </a:spcAft>
-            </a:pPr>
-            <a:r>
-              <a:rPr sz="1250" b="0">
-                <a:solidFill>
-                  <a:srgbClr val="6B8090"/>
-                </a:solidFill>
-                <a:latin typeface="Calibri"/>
-              </a:rPr>
-              <a:t>$20 / user x ~40</a:t>
-            </a:r>
-          </a:p>
-        </p:txBody>
-      </p:sp>
-      <p:sp>
-        <p:nvSpPr>
-          <p:cNvPr id="8" name="TextBox 7"/>
-          <p:cNvSpPr txBox="1"/>
-          <p:nvPr/>
-        </p:nvSpPr>
-        <p:spPr>
-          <a:xfrm>
-            <a:off x="9418320" y="2788920"/>
-            <a:ext cx="1737360" cy="365760"/>
-          </a:xfrm>
-          <a:prstGeom prst="rect">
-            <a:avLst/>
-          </a:prstGeom>
-          <a:noFill/>
-        </p:spPr>
-        <p:txBody>
-          <a:bodyPr wrap="square">
-            <a:spAutoFit/>
-          </a:bodyPr>
-          <a:lstStyle/>
-          <a:p>
-            <a:pPr algn="r">
-              <a:spcAft>
-                <a:spcPts val="600"/>
-              </a:spcAft>
-            </a:pPr>
-            <a:r>
-              <a:rPr sz="1400" b="0">
-                <a:solidFill>
-                  <a:srgbClr val="9FB2C0"/>
-                </a:solidFill>
-                <a:latin typeface="Consolas"/>
-              </a:rPr>
-              <a:t>~$800 / mo</a:t>
-            </a:r>
-          </a:p>
-        </p:txBody>
-      </p:sp>
-      <p:sp>
-        <p:nvSpPr>
-          <p:cNvPr id="9" name="Rounded Rectangle 8"/>
+              <a:t>Single source of truth</a:t>
+            </a:r>
+          </a:p>
+        </p:txBody>
+      </p:sp>
+      <p:sp>
+        <p:nvSpPr>
+          <p:cNvPr id="7" name="Rounded Rectangle 6"/>
           <p:cNvSpPr/>
           <p:nvPr/>
         </p:nvSpPr>
         <p:spPr>
           <a:xfrm>
-            <a:off x="822960" y="3273552"/>
-            <a:ext cx="10515600" cy="502920"/>
+            <a:off x="3108960" y="2834640"/>
+            <a:ext cx="2121408" cy="1737360"/>
           </a:xfrm>
           <a:prstGeom prst="roundRect">
             <a:avLst/>
@@ -3578,14 +3518,14 @@
       </p:sp>
       <p:sp>
         <p:nvSpPr>
-          <p:cNvPr id="10" name="TextBox 9"/>
+          <p:cNvPr id="8" name="TextBox 7"/>
           <p:cNvSpPr txBox="1"/>
           <p:nvPr/>
         </p:nvSpPr>
         <p:spPr>
           <a:xfrm>
-            <a:off x="1051560" y="3364992"/>
-            <a:ext cx="5486400" cy="365760"/>
+            <a:off x="3246120" y="3063240"/>
+            <a:ext cx="1847088" cy="1371600"/>
           </a:xfrm>
           <a:prstGeom prst="rect">
             <a:avLst/>
@@ -3600,109 +3540,47 @@
           <a:p>
             <a:pPr algn="l">
               <a:spcAft>
+                <a:spcPts val="400"/>
+              </a:spcAft>
+            </a:pPr>
+            <a:r>
+              <a:rPr sz="1500" b="1">
+                <a:solidFill>
+                  <a:srgbClr val="35C2C9"/>
+                </a:solidFill>
+                <a:latin typeface="Calibri"/>
+              </a:rPr>
+              <a:t>Power Apps</a:t>
+            </a:r>
+          </a:p>
+          <a:p>
+            <a:pPr algn="l">
+              <a:spcAft>
                 <a:spcPts val="600"/>
               </a:spcAft>
             </a:pPr>
             <a:r>
-              <a:rPr sz="1400" b="0">
-                <a:solidFill>
-                  <a:srgbClr val="E6EDF3"/>
+              <a:rPr sz="1200" b="0">
+                <a:solidFill>
+                  <a:srgbClr val="9FB2C0"/>
                 </a:solidFill>
                 <a:latin typeface="Calibri"/>
               </a:rPr>
-              <a:t>Power Automate Pro (incl. Process Mining)</a:t>
-            </a:r>
-          </a:p>
-        </p:txBody>
-      </p:sp>
-      <p:sp>
-        <p:nvSpPr>
-          <p:cNvPr id="11" name="TextBox 10"/>
-          <p:cNvSpPr txBox="1"/>
-          <p:nvPr/>
-        </p:nvSpPr>
-        <p:spPr>
-          <a:xfrm>
-            <a:off x="6400800" y="3364992"/>
-            <a:ext cx="2926080" cy="365760"/>
-          </a:xfrm>
-          <a:prstGeom prst="rect">
-            <a:avLst/>
-          </a:prstGeom>
-          <a:noFill/>
-        </p:spPr>
-        <p:txBody>
-          <a:bodyPr wrap="square">
-            <a:spAutoFit/>
-          </a:bodyPr>
-          <a:lstStyle/>
-          <a:p>
-            <a:pPr algn="l">
-              <a:spcAft>
-                <a:spcPts val="600"/>
-              </a:spcAft>
-            </a:pPr>
-            <a:r>
-              <a:rPr sz="1250" b="0">
-                <a:solidFill>
-                  <a:srgbClr val="6B8090"/>
-                </a:solidFill>
-                <a:latin typeface="Calibri"/>
-              </a:rPr>
-              <a:t>$220 / year</a:t>
-            </a:r>
-          </a:p>
-        </p:txBody>
-      </p:sp>
-      <p:sp>
-        <p:nvSpPr>
-          <p:cNvPr id="12" name="TextBox 11"/>
-          <p:cNvSpPr txBox="1"/>
-          <p:nvPr/>
-        </p:nvSpPr>
-        <p:spPr>
-          <a:xfrm>
-            <a:off x="9418320" y="3364992"/>
-            <a:ext cx="1737360" cy="365760"/>
-          </a:xfrm>
-          <a:prstGeom prst="rect">
-            <a:avLst/>
-          </a:prstGeom>
-          <a:noFill/>
-        </p:spPr>
-        <p:txBody>
-          <a:bodyPr wrap="square">
-            <a:spAutoFit/>
-          </a:bodyPr>
-          <a:lstStyle/>
-          <a:p>
-            <a:pPr algn="r">
-              <a:spcAft>
-                <a:spcPts val="600"/>
-              </a:spcAft>
-            </a:pPr>
-            <a:r>
-              <a:rPr sz="1400" b="0">
-                <a:solidFill>
-                  <a:srgbClr val="9FB2C0"/>
-                </a:solidFill>
-                <a:latin typeface="Consolas"/>
-              </a:rPr>
-              <a:t>~$18 / mo</a:t>
-            </a:r>
-          </a:p>
-        </p:txBody>
-      </p:sp>
-      <p:sp>
-        <p:nvSpPr>
-          <p:cNvPr id="13" name="Rounded Rectangle 12"/>
+              <a:t>Standard mobile capture</a:t>
+            </a:r>
+          </a:p>
+        </p:txBody>
+      </p:sp>
+      <p:sp>
+        <p:nvSpPr>
+          <p:cNvPr id="9" name="Rounded Rectangle 8"/>
           <p:cNvSpPr/>
           <p:nvPr/>
         </p:nvSpPr>
         <p:spPr>
           <a:xfrm>
-            <a:off x="822960" y="3849624"/>
-            <a:ext cx="10515600" cy="502920"/>
+            <a:off x="5394960" y="2834640"/>
+            <a:ext cx="2121408" cy="1737360"/>
           </a:xfrm>
           <a:prstGeom prst="roundRect">
             <a:avLst/>
@@ -3741,14 +3619,14 @@
       </p:sp>
       <p:sp>
         <p:nvSpPr>
-          <p:cNvPr id="14" name="TextBox 13"/>
+          <p:cNvPr id="10" name="TextBox 9"/>
           <p:cNvSpPr txBox="1"/>
           <p:nvPr/>
         </p:nvSpPr>
         <p:spPr>
           <a:xfrm>
-            <a:off x="1051560" y="3941063"/>
-            <a:ext cx="5486400" cy="365760"/>
+            <a:off x="5532120" y="3063240"/>
+            <a:ext cx="1847088" cy="1371600"/>
           </a:xfrm>
           <a:prstGeom prst="rect">
             <a:avLst/>
@@ -3763,109 +3641,47 @@
           <a:p>
             <a:pPr algn="l">
               <a:spcAft>
+                <a:spcPts val="400"/>
+              </a:spcAft>
+            </a:pPr>
+            <a:r>
+              <a:rPr sz="1500" b="1">
+                <a:solidFill>
+                  <a:srgbClr val="35C2C9"/>
+                </a:solidFill>
+                <a:latin typeface="Calibri"/>
+              </a:rPr>
+              <a:t>Power Automate</a:t>
+            </a:r>
+          </a:p>
+          <a:p>
+            <a:pPr algn="l">
+              <a:spcAft>
                 <a:spcPts val="600"/>
               </a:spcAft>
             </a:pPr>
             <a:r>
-              <a:rPr sz="1400" b="0">
-                <a:solidFill>
-                  <a:srgbClr val="E6EDF3"/>
+              <a:rPr sz="1200" b="0">
+                <a:solidFill>
+                  <a:srgbClr val="9FB2C0"/>
                 </a:solidFill>
                 <a:latin typeface="Calibri"/>
               </a:rPr>
-              <a:t>Power Pages (GC portal)</a:t>
-            </a:r>
-          </a:p>
-        </p:txBody>
-      </p:sp>
-      <p:sp>
-        <p:nvSpPr>
-          <p:cNvPr id="15" name="TextBox 14"/>
-          <p:cNvSpPr txBox="1"/>
-          <p:nvPr/>
-        </p:nvSpPr>
-        <p:spPr>
-          <a:xfrm>
-            <a:off x="6400800" y="3941063"/>
-            <a:ext cx="2926080" cy="365760"/>
-          </a:xfrm>
-          <a:prstGeom prst="rect">
-            <a:avLst/>
-          </a:prstGeom>
-          <a:noFill/>
-        </p:spPr>
-        <p:txBody>
-          <a:bodyPr wrap="square">
-            <a:spAutoFit/>
-          </a:bodyPr>
-          <a:lstStyle/>
-          <a:p>
-            <a:pPr algn="l">
-              <a:spcAft>
-                <a:spcPts val="600"/>
-              </a:spcAft>
-            </a:pPr>
-            <a:r>
-              <a:rPr sz="1250" b="0">
-                <a:solidFill>
-                  <a:srgbClr val="6B8090"/>
-                </a:solidFill>
-                <a:latin typeface="Calibri"/>
-              </a:rPr>
-              <a:t>site + auth users</a:t>
-            </a:r>
-          </a:p>
-        </p:txBody>
-      </p:sp>
-      <p:sp>
-        <p:nvSpPr>
-          <p:cNvPr id="16" name="TextBox 15"/>
-          <p:cNvSpPr txBox="1"/>
-          <p:nvPr/>
-        </p:nvSpPr>
-        <p:spPr>
-          <a:xfrm>
-            <a:off x="9418320" y="3941063"/>
-            <a:ext cx="1737360" cy="365760"/>
-          </a:xfrm>
-          <a:prstGeom prst="rect">
-            <a:avLst/>
-          </a:prstGeom>
-          <a:noFill/>
-        </p:spPr>
-        <p:txBody>
-          <a:bodyPr wrap="square">
-            <a:spAutoFit/>
-          </a:bodyPr>
-          <a:lstStyle/>
-          <a:p>
-            <a:pPr algn="r">
-              <a:spcAft>
-                <a:spcPts val="600"/>
-              </a:spcAft>
-            </a:pPr>
-            <a:r>
-              <a:rPr sz="1400" b="0">
-                <a:solidFill>
-                  <a:srgbClr val="9FB2C0"/>
-                </a:solidFill>
-                <a:latin typeface="Consolas"/>
-              </a:rPr>
-              <a:t>~$250 / mo</a:t>
-            </a:r>
-          </a:p>
-        </p:txBody>
-      </p:sp>
-      <p:sp>
-        <p:nvSpPr>
-          <p:cNvPr id="17" name="Rounded Rectangle 16"/>
+              <a:t>Ingest, approvals, Process Mining</a:t>
+            </a:r>
+          </a:p>
+        </p:txBody>
+      </p:sp>
+      <p:sp>
+        <p:nvSpPr>
+          <p:cNvPr id="11" name="Rounded Rectangle 10"/>
           <p:cNvSpPr/>
           <p:nvPr/>
         </p:nvSpPr>
         <p:spPr>
           <a:xfrm>
-            <a:off x="822960" y="4425696"/>
-            <a:ext cx="10515600" cy="502920"/>
+            <a:off x="7680960" y="2834640"/>
+            <a:ext cx="2121408" cy="1737360"/>
           </a:xfrm>
           <a:prstGeom prst="roundRect">
             <a:avLst/>
@@ -3904,14 +3720,14 @@
       </p:sp>
       <p:sp>
         <p:nvSpPr>
-          <p:cNvPr id="18" name="TextBox 17"/>
+          <p:cNvPr id="12" name="TextBox 11"/>
           <p:cNvSpPr txBox="1"/>
           <p:nvPr/>
         </p:nvSpPr>
         <p:spPr>
           <a:xfrm>
-            <a:off x="1051560" y="4517136"/>
-            <a:ext cx="5486400" cy="365760"/>
+            <a:off x="7818120" y="3063240"/>
+            <a:ext cx="1847088" cy="1371600"/>
           </a:xfrm>
           <a:prstGeom prst="rect">
             <a:avLst/>
@@ -3926,109 +3742,47 @@
           <a:p>
             <a:pPr algn="l">
               <a:spcAft>
+                <a:spcPts val="400"/>
+              </a:spcAft>
+            </a:pPr>
+            <a:r>
+              <a:rPr sz="1500" b="1">
+                <a:solidFill>
+                  <a:srgbClr val="35C2C9"/>
+                </a:solidFill>
+                <a:latin typeface="Calibri"/>
+              </a:rPr>
+              <a:t>Power BI</a:t>
+            </a:r>
+          </a:p>
+          <a:p>
+            <a:pPr algn="l">
+              <a:spcAft>
                 <a:spcPts val="600"/>
               </a:spcAft>
             </a:pPr>
             <a:r>
-              <a:rPr sz="1400" b="0">
-                <a:solidFill>
-                  <a:srgbClr val="E6EDF3"/>
+              <a:rPr sz="1200" b="0">
+                <a:solidFill>
+                  <a:srgbClr val="9FB2C0"/>
                 </a:solidFill>
                 <a:latin typeface="Calibri"/>
               </a:rPr>
-              <a:t>Power BI Pro</a:t>
-            </a:r>
-          </a:p>
-        </p:txBody>
-      </p:sp>
-      <p:sp>
-        <p:nvSpPr>
-          <p:cNvPr id="19" name="TextBox 18"/>
-          <p:cNvSpPr txBox="1"/>
-          <p:nvPr/>
-        </p:nvSpPr>
-        <p:spPr>
-          <a:xfrm>
-            <a:off x="6400800" y="4517136"/>
-            <a:ext cx="2926080" cy="365760"/>
-          </a:xfrm>
-          <a:prstGeom prst="rect">
-            <a:avLst/>
-          </a:prstGeom>
-          <a:noFill/>
-        </p:spPr>
-        <p:txBody>
-          <a:bodyPr wrap="square">
-            <a:spAutoFit/>
-          </a:bodyPr>
-          <a:lstStyle/>
-          <a:p>
-            <a:pPr algn="l">
-              <a:spcAft>
-                <a:spcPts val="600"/>
-              </a:spcAft>
-            </a:pPr>
-            <a:r>
-              <a:rPr sz="1250" b="0">
-                <a:solidFill>
-                  <a:srgbClr val="6B8090"/>
-                </a:solidFill>
-                <a:latin typeface="Calibri"/>
-              </a:rPr>
-              <a:t>$14 / user x ~15</a:t>
-            </a:r>
-          </a:p>
-        </p:txBody>
-      </p:sp>
-      <p:sp>
-        <p:nvSpPr>
-          <p:cNvPr id="20" name="TextBox 19"/>
-          <p:cNvSpPr txBox="1"/>
-          <p:nvPr/>
-        </p:nvSpPr>
-        <p:spPr>
-          <a:xfrm>
-            <a:off x="9418320" y="4517136"/>
-            <a:ext cx="1737360" cy="365760"/>
-          </a:xfrm>
-          <a:prstGeom prst="rect">
-            <a:avLst/>
-          </a:prstGeom>
-          <a:noFill/>
-        </p:spPr>
-        <p:txBody>
-          <a:bodyPr wrap="square">
-            <a:spAutoFit/>
-          </a:bodyPr>
-          <a:lstStyle/>
-          <a:p>
-            <a:pPr algn="r">
-              <a:spcAft>
-                <a:spcPts val="600"/>
-              </a:spcAft>
-            </a:pPr>
-            <a:r>
-              <a:rPr sz="1400" b="0">
-                <a:solidFill>
-                  <a:srgbClr val="9FB2C0"/>
-                </a:solidFill>
-                <a:latin typeface="Consolas"/>
-              </a:rPr>
-              <a:t>~$210 / mo</a:t>
-            </a:r>
-          </a:p>
-        </p:txBody>
-      </p:sp>
-      <p:sp>
-        <p:nvSpPr>
-          <p:cNvPr id="21" name="Rounded Rectangle 20"/>
+              <a:t>Live dashboards &amp; client reports</a:t>
+            </a:r>
+          </a:p>
+        </p:txBody>
+      </p:sp>
+      <p:sp>
+        <p:nvSpPr>
+          <p:cNvPr id="13" name="Rounded Rectangle 12"/>
           <p:cNvSpPr/>
           <p:nvPr/>
         </p:nvSpPr>
         <p:spPr>
           <a:xfrm>
-            <a:off x="822960" y="5001768"/>
-            <a:ext cx="10515600" cy="502920"/>
+            <a:off x="9966960" y="2834640"/>
+            <a:ext cx="2121408" cy="1737360"/>
           </a:xfrm>
           <a:prstGeom prst="roundRect">
             <a:avLst/>
@@ -4067,14 +3821,14 @@
       </p:sp>
       <p:sp>
         <p:nvSpPr>
-          <p:cNvPr id="22" name="TextBox 21"/>
+          <p:cNvPr id="14" name="TextBox 13"/>
           <p:cNvSpPr txBox="1"/>
           <p:nvPr/>
         </p:nvSpPr>
         <p:spPr>
           <a:xfrm>
-            <a:off x="1051560" y="5093207"/>
-            <a:ext cx="5486400" cy="365760"/>
+            <a:off x="10104120" y="3063240"/>
+            <a:ext cx="1847088" cy="1371600"/>
           </a:xfrm>
           <a:prstGeom prst="rect">
             <a:avLst/>
@@ -4089,109 +3843,47 @@
           <a:p>
             <a:pPr algn="l">
               <a:spcAft>
+                <a:spcPts val="400"/>
+              </a:spcAft>
+            </a:pPr>
+            <a:r>
+              <a:rPr sz="1500" b="1">
+                <a:solidFill>
+                  <a:srgbClr val="35C2C9"/>
+                </a:solidFill>
+                <a:latin typeface="Calibri"/>
+              </a:rPr>
+              <a:t>Power Pages</a:t>
+            </a:r>
+          </a:p>
+          <a:p>
+            <a:pPr algn="l">
+              <a:spcAft>
                 <a:spcPts val="600"/>
               </a:spcAft>
             </a:pPr>
             <a:r>
-              <a:rPr sz="1400" b="0">
-                <a:solidFill>
-                  <a:srgbClr val="E6EDF3"/>
+              <a:rPr sz="1200" b="0">
+                <a:solidFill>
+                  <a:srgbClr val="9FB2C0"/>
                 </a:solidFill>
                 <a:latin typeface="Calibri"/>
               </a:rPr>
-              <a:t>Dataverse (DB + files)</a:t>
-            </a:r>
-          </a:p>
-        </p:txBody>
-      </p:sp>
-      <p:sp>
-        <p:nvSpPr>
-          <p:cNvPr id="23" name="TextBox 22"/>
-          <p:cNvSpPr txBox="1"/>
-          <p:nvPr/>
-        </p:nvSpPr>
-        <p:spPr>
-          <a:xfrm>
-            <a:off x="6400800" y="5093207"/>
-            <a:ext cx="2926080" cy="365760"/>
-          </a:xfrm>
-          <a:prstGeom prst="rect">
-            <a:avLst/>
-          </a:prstGeom>
-          <a:noFill/>
-        </p:spPr>
-        <p:txBody>
-          <a:bodyPr wrap="square">
-            <a:spAutoFit/>
-          </a:bodyPr>
-          <a:lstStyle/>
-          <a:p>
-            <a:pPr algn="l">
-              <a:spcAft>
-                <a:spcPts val="600"/>
-              </a:spcAft>
-            </a:pPr>
-            <a:r>
-              <a:rPr sz="1250" b="0">
-                <a:solidFill>
-                  <a:srgbClr val="6B8090"/>
-                </a:solidFill>
-                <a:latin typeface="Calibri"/>
-              </a:rPr>
-              <a:t>mostly included by licenses</a:t>
-            </a:r>
-          </a:p>
-        </p:txBody>
-      </p:sp>
-      <p:sp>
-        <p:nvSpPr>
-          <p:cNvPr id="24" name="TextBox 23"/>
-          <p:cNvSpPr txBox="1"/>
-          <p:nvPr/>
-        </p:nvSpPr>
-        <p:spPr>
-          <a:xfrm>
-            <a:off x="9418320" y="5093207"/>
-            <a:ext cx="1737360" cy="365760"/>
-          </a:xfrm>
-          <a:prstGeom prst="rect">
-            <a:avLst/>
-          </a:prstGeom>
-          <a:noFill/>
-        </p:spPr>
-        <p:txBody>
-          <a:bodyPr wrap="square">
-            <a:spAutoFit/>
-          </a:bodyPr>
-          <a:lstStyle/>
-          <a:p>
-            <a:pPr algn="r">
-              <a:spcAft>
-                <a:spcPts val="600"/>
-              </a:spcAft>
-            </a:pPr>
-            <a:r>
-              <a:rPr sz="1400" b="0">
-                <a:solidFill>
-                  <a:srgbClr val="9FB2C0"/>
-                </a:solidFill>
-                <a:latin typeface="Consolas"/>
-              </a:rPr>
-              <a:t>~$0-150 / mo</a:t>
-            </a:r>
-          </a:p>
-        </p:txBody>
-      </p:sp>
-      <p:sp>
-        <p:nvSpPr>
-          <p:cNvPr id="25" name="Rounded Rectangle 24"/>
+              <a:t>External GC portal</a:t>
+            </a:r>
+          </a:p>
+        </p:txBody>
+      </p:sp>
+      <p:sp>
+        <p:nvSpPr>
+          <p:cNvPr id="15" name="Rounded Rectangle 14"/>
           <p:cNvSpPr/>
           <p:nvPr/>
         </p:nvSpPr>
         <p:spPr>
           <a:xfrm>
-            <a:off x="822960" y="5577840"/>
-            <a:ext cx="10515600" cy="502920"/>
+            <a:off x="822960" y="4892040"/>
+            <a:ext cx="10515600" cy="1234440"/>
           </a:xfrm>
           <a:prstGeom prst="roundRect">
             <a:avLst/>
@@ -4230,14 +3922,14 @@
       </p:sp>
       <p:sp>
         <p:nvSpPr>
-          <p:cNvPr id="26" name="TextBox 25"/>
+          <p:cNvPr id="16" name="TextBox 15"/>
           <p:cNvSpPr txBox="1"/>
           <p:nvPr/>
         </p:nvSpPr>
         <p:spPr>
           <a:xfrm>
-            <a:off x="1051560" y="5669279"/>
-            <a:ext cx="5486400" cy="365760"/>
+            <a:off x="1097280" y="5074920"/>
+            <a:ext cx="10058400" cy="914400"/>
           </a:xfrm>
           <a:prstGeom prst="rect">
             <a:avLst/>
@@ -4252,134 +3944,33 @@
           <a:p>
             <a:pPr algn="l">
               <a:spcAft>
+                <a:spcPts val="200"/>
+              </a:spcAft>
+            </a:pPr>
+            <a:r>
+              <a:rPr sz="1500" b="1">
+                <a:solidFill>
+                  <a:srgbClr val="35C2C9"/>
+                </a:solidFill>
+                <a:latin typeface="Calibri"/>
+              </a:rPr>
+              <a:t>The differentiator</a:t>
+            </a:r>
+          </a:p>
+          <a:p>
+            <a:pPr algn="l">
+              <a:spcAft>
                 <a:spcPts val="600"/>
               </a:spcAft>
             </a:pPr>
             <a:r>
-              <a:rPr sz="1400" b="1">
-                <a:solidFill>
-                  <a:srgbClr val="35C2C9"/>
+              <a:rPr sz="1350" b="0">
+                <a:solidFill>
+                  <a:srgbClr val="9FB2C0"/>
                 </a:solidFill>
                 <a:latin typeface="Calibri"/>
               </a:rPr>
-              <a:t>Operating total (to start)</a:t>
-            </a:r>
-          </a:p>
-        </p:txBody>
-      </p:sp>
-      <p:sp>
-        <p:nvSpPr>
-          <p:cNvPr id="27" name="TextBox 26"/>
-          <p:cNvSpPr txBox="1"/>
-          <p:nvPr/>
-        </p:nvSpPr>
-        <p:spPr>
-          <a:xfrm>
-            <a:off x="6400800" y="5669279"/>
-            <a:ext cx="2926080" cy="365760"/>
-          </a:xfrm>
-          <a:prstGeom prst="rect">
-            <a:avLst/>
-          </a:prstGeom>
-          <a:noFill/>
-        </p:spPr>
-        <p:txBody>
-          <a:bodyPr wrap="square">
-            <a:spAutoFit/>
-          </a:bodyPr>
-          <a:lstStyle/>
-          <a:p>
-            <a:pPr algn="l">
-              <a:spcAft>
-                <a:spcPts val="600"/>
-              </a:spcAft>
-            </a:pPr>
-            <a:r>
-              <a:rPr sz="1250" b="0">
-                <a:solidFill>
-                  <a:srgbClr val="6B8090"/>
-                </a:solidFill>
-                <a:latin typeface="Calibri"/>
-              </a:rPr>
-              <a:t/>
-            </a:r>
-          </a:p>
-        </p:txBody>
-      </p:sp>
-      <p:sp>
-        <p:nvSpPr>
-          <p:cNvPr id="28" name="TextBox 27"/>
-          <p:cNvSpPr txBox="1"/>
-          <p:nvPr/>
-        </p:nvSpPr>
-        <p:spPr>
-          <a:xfrm>
-            <a:off x="9418320" y="5669279"/>
-            <a:ext cx="1737360" cy="365760"/>
-          </a:xfrm>
-          <a:prstGeom prst="rect">
-            <a:avLst/>
-          </a:prstGeom>
-          <a:noFill/>
-        </p:spPr>
-        <p:txBody>
-          <a:bodyPr wrap="square">
-            <a:spAutoFit/>
-          </a:bodyPr>
-          <a:lstStyle/>
-          <a:p>
-            <a:pPr algn="r">
-              <a:spcAft>
-                <a:spcPts val="600"/>
-              </a:spcAft>
-            </a:pPr>
-            <a:r>
-              <a:rPr sz="1400" b="1">
-                <a:solidFill>
-                  <a:srgbClr val="35C2C9"/>
-                </a:solidFill>
-                <a:latin typeface="Consolas"/>
-              </a:rPr>
-              <a:t>~$1,278 / mo</a:t>
-            </a:r>
-          </a:p>
-        </p:txBody>
-      </p:sp>
-      <p:sp>
-        <p:nvSpPr>
-          <p:cNvPr id="29" name="TextBox 28"/>
-          <p:cNvSpPr txBox="1"/>
-          <p:nvPr/>
-        </p:nvSpPr>
-        <p:spPr>
-          <a:xfrm>
-            <a:off x="822960" y="6126480"/>
-            <a:ext cx="10515600" cy="457200"/>
-          </a:xfrm>
-          <a:prstGeom prst="rect">
-            <a:avLst/>
-          </a:prstGeom>
-          <a:noFill/>
-        </p:spPr>
-        <p:txBody>
-          <a:bodyPr wrap="square">
-            <a:spAutoFit/>
-          </a:bodyPr>
-          <a:lstStyle/>
-          <a:p>
-            <a:pPr algn="l">
-              <a:spcAft>
-                <a:spcPts val="600"/>
-              </a:spcAft>
-            </a:pPr>
-            <a:r>
-              <a:rPr sz="1300" b="0">
-                <a:solidFill>
-                  <a:srgbClr val="6B8090"/>
-                </a:solidFill>
-                <a:latin typeface="Calibri"/>
-              </a:rPr>
-              <a:t>Development absorbed if built in-house. Process Mining is no longer the $5,000/mo add-on.</a:t>
+              <a:t>With the right granularity, any report format the client asks for is generated as a query over the data — not a document someone rebuilds by hand. We own the granular truth; reports are derivations.</a:t>
             </a:r>
           </a:p>
         </p:txBody>
@@ -4418,6 +4009,2329 @@
         </p:nvSpPr>
         <p:spPr>
           <a:xfrm>
+            <a:off x="822960" y="502920"/>
+            <a:ext cx="10058400" cy="365760"/>
+          </a:xfrm>
+          <a:prstGeom prst="rect">
+            <a:avLst/>
+          </a:prstGeom>
+          <a:noFill/>
+        </p:spPr>
+        <p:txBody>
+          <a:bodyPr wrap="square">
+            <a:spAutoFit/>
+          </a:bodyPr>
+          <a:lstStyle/>
+          <a:p>
+            <a:pPr algn="l">
+              <a:spcAft>
+                <a:spcPts val="600"/>
+              </a:spcAft>
+            </a:pPr>
+            <a:r>
+              <a:rPr sz="1200" b="1">
+                <a:solidFill>
+                  <a:srgbClr val="35C2C9"/>
+                </a:solidFill>
+                <a:latin typeface="Consolas"/>
+              </a:rPr>
+              <a:t>ROLLOUT · UNDER 2 MONTHS</a:t>
+            </a:r>
+          </a:p>
+        </p:txBody>
+      </p:sp>
+      <p:sp>
+        <p:nvSpPr>
+          <p:cNvPr id="3" name="TextBox 2"/>
+          <p:cNvSpPr txBox="1"/>
+          <p:nvPr/>
+        </p:nvSpPr>
+        <p:spPr>
+          <a:xfrm>
+            <a:off x="822960" y="960120"/>
+            <a:ext cx="10515600" cy="914400"/>
+          </a:xfrm>
+          <a:prstGeom prst="rect">
+            <a:avLst/>
+          </a:prstGeom>
+          <a:noFill/>
+        </p:spPr>
+        <p:txBody>
+          <a:bodyPr wrap="square">
+            <a:spAutoFit/>
+          </a:bodyPr>
+          <a:lstStyle/>
+          <a:p>
+            <a:pPr algn="l">
+              <a:spcAft>
+                <a:spcPts val="600"/>
+              </a:spcAft>
+            </a:pPr>
+            <a:r>
+              <a:rPr sz="3400" b="1">
+                <a:solidFill>
+                  <a:srgbClr val="E6EDF3"/>
+                </a:solidFill>
+                <a:latin typeface="Calibri Light"/>
+              </a:rPr>
+              <a:t>Live for the new construction phase</a:t>
+            </a:r>
+          </a:p>
+        </p:txBody>
+      </p:sp>
+      <p:sp>
+        <p:nvSpPr>
+          <p:cNvPr id="4" name="Rounded Rectangle 3"/>
+          <p:cNvSpPr/>
+          <p:nvPr/>
+        </p:nvSpPr>
+        <p:spPr>
+          <a:xfrm>
+            <a:off x="822960" y="2286000"/>
+            <a:ext cx="2103120" cy="566928"/>
+          </a:xfrm>
+          <a:prstGeom prst="roundRect">
+            <a:avLst/>
+          </a:prstGeom>
+          <a:solidFill>
+            <a:srgbClr val="111A22"/>
+          </a:solidFill>
+          <a:ln w="9525">
+            <a:solidFill>
+              <a:srgbClr val="35C2C9"/>
+            </a:solidFill>
+          </a:ln>
+          <a:effectLst/>
+        </p:spPr>
+        <p:style>
+          <a:lnRef idx="1">
+            <a:schemeClr val="accent1"/>
+          </a:lnRef>
+          <a:fillRef idx="3">
+            <a:schemeClr val="accent1"/>
+          </a:fillRef>
+          <a:effectRef idx="2">
+            <a:schemeClr val="accent1"/>
+          </a:effectRef>
+          <a:fontRef idx="minor">
+            <a:schemeClr val="lt1"/>
+          </a:fontRef>
+        </p:style>
+        <p:txBody>
+          <a:bodyPr rtlCol="0" anchor="ctr"/>
+          <a:lstStyle/>
+          <a:p>
+            <a:pPr algn="ctr"/>
+          </a:p>
+        </p:txBody>
+      </p:sp>
+      <p:sp>
+        <p:nvSpPr>
+          <p:cNvPr id="5" name="TextBox 4"/>
+          <p:cNvSpPr txBox="1"/>
+          <p:nvPr/>
+        </p:nvSpPr>
+        <p:spPr>
+          <a:xfrm>
+            <a:off x="960120" y="2414016"/>
+            <a:ext cx="1920240" cy="365760"/>
+          </a:xfrm>
+          <a:prstGeom prst="rect">
+            <a:avLst/>
+          </a:prstGeom>
+          <a:noFill/>
+        </p:spPr>
+        <p:txBody>
+          <a:bodyPr wrap="square">
+            <a:spAutoFit/>
+          </a:bodyPr>
+          <a:lstStyle/>
+          <a:p>
+            <a:pPr algn="l">
+              <a:spcAft>
+                <a:spcPts val="600"/>
+              </a:spcAft>
+            </a:pPr>
+            <a:r>
+              <a:rPr sz="1300" b="1">
+                <a:solidFill>
+                  <a:srgbClr val="35C2C9"/>
+                </a:solidFill>
+                <a:latin typeface="Consolas"/>
+              </a:rPr>
+              <a:t>Weeks 1-2</a:t>
+            </a:r>
+          </a:p>
+        </p:txBody>
+      </p:sp>
+      <p:sp>
+        <p:nvSpPr>
+          <p:cNvPr id="6" name="Rounded Rectangle 5"/>
+          <p:cNvSpPr/>
+          <p:nvPr/>
+        </p:nvSpPr>
+        <p:spPr>
+          <a:xfrm>
+            <a:off x="3108960" y="2286000"/>
+            <a:ext cx="8229600" cy="566928"/>
+          </a:xfrm>
+          <a:prstGeom prst="roundRect">
+            <a:avLst/>
+          </a:prstGeom>
+          <a:solidFill>
+            <a:srgbClr val="111A22"/>
+          </a:solidFill>
+          <a:ln w="9525">
+            <a:solidFill>
+              <a:srgbClr val="1F2C37"/>
+            </a:solidFill>
+          </a:ln>
+          <a:effectLst/>
+        </p:spPr>
+        <p:style>
+          <a:lnRef idx="1">
+            <a:schemeClr val="accent1"/>
+          </a:lnRef>
+          <a:fillRef idx="3">
+            <a:schemeClr val="accent1"/>
+          </a:fillRef>
+          <a:effectRef idx="2">
+            <a:schemeClr val="accent1"/>
+          </a:effectRef>
+          <a:fontRef idx="minor">
+            <a:schemeClr val="lt1"/>
+          </a:fontRef>
+        </p:style>
+        <p:txBody>
+          <a:bodyPr rtlCol="0" anchor="ctr"/>
+          <a:lstStyle/>
+          <a:p>
+            <a:pPr algn="ctr"/>
+          </a:p>
+        </p:txBody>
+      </p:sp>
+      <p:sp>
+        <p:nvSpPr>
+          <p:cNvPr id="7" name="TextBox 6"/>
+          <p:cNvSpPr txBox="1"/>
+          <p:nvPr/>
+        </p:nvSpPr>
+        <p:spPr>
+          <a:xfrm>
+            <a:off x="3291840" y="2404872"/>
+            <a:ext cx="7955279" cy="411480"/>
+          </a:xfrm>
+          <a:prstGeom prst="rect">
+            <a:avLst/>
+          </a:prstGeom>
+          <a:noFill/>
+        </p:spPr>
+        <p:txBody>
+          <a:bodyPr wrap="square">
+            <a:spAutoFit/>
+          </a:bodyPr>
+          <a:lstStyle/>
+          <a:p>
+            <a:pPr algn="l">
+              <a:spcAft>
+                <a:spcPts val="600"/>
+              </a:spcAft>
+            </a:pPr>
+            <a:r>
+              <a:rPr sz="1350" b="0">
+                <a:solidFill>
+                  <a:srgbClr val="9FB2C0"/>
+                </a:solidFill>
+                <a:latin typeface="Calibri"/>
+              </a:rPr>
+              <a:t>Foundation &amp; pilot — data model, capture app, 2 pilot departments</a:t>
+            </a:r>
+          </a:p>
+        </p:txBody>
+      </p:sp>
+      <p:sp>
+        <p:nvSpPr>
+          <p:cNvPr id="8" name="Rounded Rectangle 7"/>
+          <p:cNvSpPr/>
+          <p:nvPr/>
+        </p:nvSpPr>
+        <p:spPr>
+          <a:xfrm>
+            <a:off x="822960" y="2944368"/>
+            <a:ext cx="2103120" cy="566928"/>
+          </a:xfrm>
+          <a:prstGeom prst="roundRect">
+            <a:avLst/>
+          </a:prstGeom>
+          <a:solidFill>
+            <a:srgbClr val="111A22"/>
+          </a:solidFill>
+          <a:ln w="9525">
+            <a:solidFill>
+              <a:srgbClr val="35C2C9"/>
+            </a:solidFill>
+          </a:ln>
+          <a:effectLst/>
+        </p:spPr>
+        <p:style>
+          <a:lnRef idx="1">
+            <a:schemeClr val="accent1"/>
+          </a:lnRef>
+          <a:fillRef idx="3">
+            <a:schemeClr val="accent1"/>
+          </a:fillRef>
+          <a:effectRef idx="2">
+            <a:schemeClr val="accent1"/>
+          </a:effectRef>
+          <a:fontRef idx="minor">
+            <a:schemeClr val="lt1"/>
+          </a:fontRef>
+        </p:style>
+        <p:txBody>
+          <a:bodyPr rtlCol="0" anchor="ctr"/>
+          <a:lstStyle/>
+          <a:p>
+            <a:pPr algn="ctr"/>
+          </a:p>
+        </p:txBody>
+      </p:sp>
+      <p:sp>
+        <p:nvSpPr>
+          <p:cNvPr id="9" name="TextBox 8"/>
+          <p:cNvSpPr txBox="1"/>
+          <p:nvPr/>
+        </p:nvSpPr>
+        <p:spPr>
+          <a:xfrm>
+            <a:off x="960120" y="3072384"/>
+            <a:ext cx="1920240" cy="365760"/>
+          </a:xfrm>
+          <a:prstGeom prst="rect">
+            <a:avLst/>
+          </a:prstGeom>
+          <a:noFill/>
+        </p:spPr>
+        <p:txBody>
+          <a:bodyPr wrap="square">
+            <a:spAutoFit/>
+          </a:bodyPr>
+          <a:lstStyle/>
+          <a:p>
+            <a:pPr algn="l">
+              <a:spcAft>
+                <a:spcPts val="600"/>
+              </a:spcAft>
+            </a:pPr>
+            <a:r>
+              <a:rPr sz="1300" b="1">
+                <a:solidFill>
+                  <a:srgbClr val="35C2C9"/>
+                </a:solidFill>
+                <a:latin typeface="Consolas"/>
+              </a:rPr>
+              <a:t>Weeks 3-4</a:t>
+            </a:r>
+          </a:p>
+        </p:txBody>
+      </p:sp>
+      <p:sp>
+        <p:nvSpPr>
+          <p:cNvPr id="10" name="Rounded Rectangle 9"/>
+          <p:cNvSpPr/>
+          <p:nvPr/>
+        </p:nvSpPr>
+        <p:spPr>
+          <a:xfrm>
+            <a:off x="3108960" y="2944368"/>
+            <a:ext cx="8229600" cy="566928"/>
+          </a:xfrm>
+          <a:prstGeom prst="roundRect">
+            <a:avLst/>
+          </a:prstGeom>
+          <a:solidFill>
+            <a:srgbClr val="111A22"/>
+          </a:solidFill>
+          <a:ln w="9525">
+            <a:solidFill>
+              <a:srgbClr val="1F2C37"/>
+            </a:solidFill>
+          </a:ln>
+          <a:effectLst/>
+        </p:spPr>
+        <p:style>
+          <a:lnRef idx="1">
+            <a:schemeClr val="accent1"/>
+          </a:lnRef>
+          <a:fillRef idx="3">
+            <a:schemeClr val="accent1"/>
+          </a:fillRef>
+          <a:effectRef idx="2">
+            <a:schemeClr val="accent1"/>
+          </a:effectRef>
+          <a:fontRef idx="minor">
+            <a:schemeClr val="lt1"/>
+          </a:fontRef>
+        </p:style>
+        <p:txBody>
+          <a:bodyPr rtlCol="0" anchor="ctr"/>
+          <a:lstStyle/>
+          <a:p>
+            <a:pPr algn="ctr"/>
+          </a:p>
+        </p:txBody>
+      </p:sp>
+      <p:sp>
+        <p:nvSpPr>
+          <p:cNvPr id="11" name="TextBox 10"/>
+          <p:cNvSpPr txBox="1"/>
+          <p:nvPr/>
+        </p:nvSpPr>
+        <p:spPr>
+          <a:xfrm>
+            <a:off x="3291840" y="3063239"/>
+            <a:ext cx="7955279" cy="411480"/>
+          </a:xfrm>
+          <a:prstGeom prst="rect">
+            <a:avLst/>
+          </a:prstGeom>
+          <a:noFill/>
+        </p:spPr>
+        <p:txBody>
+          <a:bodyPr wrap="square">
+            <a:spAutoFit/>
+          </a:bodyPr>
+          <a:lstStyle/>
+          <a:p>
+            <a:pPr algn="l">
+              <a:spcAft>
+                <a:spcPts val="600"/>
+              </a:spcAft>
+            </a:pPr>
+            <a:r>
+              <a:rPr sz="1350" b="0">
+                <a:solidFill>
+                  <a:srgbClr val="9FB2C0"/>
+                </a:solidFill>
+                <a:latin typeface="Calibri"/>
+              </a:rPr>
+              <a:t>Department rollout — PMO, Planning, Quality, MEP, CSA, Doc Control</a:t>
+            </a:r>
+          </a:p>
+        </p:txBody>
+      </p:sp>
+      <p:sp>
+        <p:nvSpPr>
+          <p:cNvPr id="12" name="Rounded Rectangle 11"/>
+          <p:cNvSpPr/>
+          <p:nvPr/>
+        </p:nvSpPr>
+        <p:spPr>
+          <a:xfrm>
+            <a:off x="822960" y="3602735"/>
+            <a:ext cx="2103120" cy="566928"/>
+          </a:xfrm>
+          <a:prstGeom prst="roundRect">
+            <a:avLst/>
+          </a:prstGeom>
+          <a:solidFill>
+            <a:srgbClr val="111A22"/>
+          </a:solidFill>
+          <a:ln w="9525">
+            <a:solidFill>
+              <a:srgbClr val="35C2C9"/>
+            </a:solidFill>
+          </a:ln>
+          <a:effectLst/>
+        </p:spPr>
+        <p:style>
+          <a:lnRef idx="1">
+            <a:schemeClr val="accent1"/>
+          </a:lnRef>
+          <a:fillRef idx="3">
+            <a:schemeClr val="accent1"/>
+          </a:fillRef>
+          <a:effectRef idx="2">
+            <a:schemeClr val="accent1"/>
+          </a:effectRef>
+          <a:fontRef idx="minor">
+            <a:schemeClr val="lt1"/>
+          </a:fontRef>
+        </p:style>
+        <p:txBody>
+          <a:bodyPr rtlCol="0" anchor="ctr"/>
+          <a:lstStyle/>
+          <a:p>
+            <a:pPr algn="ctr"/>
+          </a:p>
+        </p:txBody>
+      </p:sp>
+      <p:sp>
+        <p:nvSpPr>
+          <p:cNvPr id="13" name="TextBox 12"/>
+          <p:cNvSpPr txBox="1"/>
+          <p:nvPr/>
+        </p:nvSpPr>
+        <p:spPr>
+          <a:xfrm>
+            <a:off x="960120" y="3730751"/>
+            <a:ext cx="1920240" cy="365760"/>
+          </a:xfrm>
+          <a:prstGeom prst="rect">
+            <a:avLst/>
+          </a:prstGeom>
+          <a:noFill/>
+        </p:spPr>
+        <p:txBody>
+          <a:bodyPr wrap="square">
+            <a:spAutoFit/>
+          </a:bodyPr>
+          <a:lstStyle/>
+          <a:p>
+            <a:pPr algn="l">
+              <a:spcAft>
+                <a:spcPts val="600"/>
+              </a:spcAft>
+            </a:pPr>
+            <a:r>
+              <a:rPr sz="1300" b="1">
+                <a:solidFill>
+                  <a:srgbClr val="35C2C9"/>
+                </a:solidFill>
+                <a:latin typeface="Consolas"/>
+              </a:rPr>
+              <a:t>Week 5</a:t>
+            </a:r>
+          </a:p>
+        </p:txBody>
+      </p:sp>
+      <p:sp>
+        <p:nvSpPr>
+          <p:cNvPr id="14" name="Rounded Rectangle 13"/>
+          <p:cNvSpPr/>
+          <p:nvPr/>
+        </p:nvSpPr>
+        <p:spPr>
+          <a:xfrm>
+            <a:off x="3108960" y="3602735"/>
+            <a:ext cx="8229600" cy="566928"/>
+          </a:xfrm>
+          <a:prstGeom prst="roundRect">
+            <a:avLst/>
+          </a:prstGeom>
+          <a:solidFill>
+            <a:srgbClr val="111A22"/>
+          </a:solidFill>
+          <a:ln w="9525">
+            <a:solidFill>
+              <a:srgbClr val="1F2C37"/>
+            </a:solidFill>
+          </a:ln>
+          <a:effectLst/>
+        </p:spPr>
+        <p:style>
+          <a:lnRef idx="1">
+            <a:schemeClr val="accent1"/>
+          </a:lnRef>
+          <a:fillRef idx="3">
+            <a:schemeClr val="accent1"/>
+          </a:fillRef>
+          <a:effectRef idx="2">
+            <a:schemeClr val="accent1"/>
+          </a:effectRef>
+          <a:fontRef idx="minor">
+            <a:schemeClr val="lt1"/>
+          </a:fontRef>
+        </p:style>
+        <p:txBody>
+          <a:bodyPr rtlCol="0" anchor="ctr"/>
+          <a:lstStyle/>
+          <a:p>
+            <a:pPr algn="ctr"/>
+          </a:p>
+        </p:txBody>
+      </p:sp>
+      <p:sp>
+        <p:nvSpPr>
+          <p:cNvPr id="15" name="TextBox 14"/>
+          <p:cNvSpPr txBox="1"/>
+          <p:nvPr/>
+        </p:nvSpPr>
+        <p:spPr>
+          <a:xfrm>
+            <a:off x="3291840" y="3721607"/>
+            <a:ext cx="7955279" cy="411480"/>
+          </a:xfrm>
+          <a:prstGeom prst="rect">
+            <a:avLst/>
+          </a:prstGeom>
+          <a:noFill/>
+        </p:spPr>
+        <p:txBody>
+          <a:bodyPr wrap="square">
+            <a:spAutoFit/>
+          </a:bodyPr>
+          <a:lstStyle/>
+          <a:p>
+            <a:pPr algn="l">
+              <a:spcAft>
+                <a:spcPts val="600"/>
+              </a:spcAft>
+            </a:pPr>
+            <a:r>
+              <a:rPr sz="1350" b="0">
+                <a:solidFill>
+                  <a:srgbClr val="9FB2C0"/>
+                </a:solidFill>
+                <a:latin typeface="Calibri"/>
+              </a:rPr>
+              <a:t>GC portal — estimates + CFDI invoice upload</a:t>
+            </a:r>
+          </a:p>
+        </p:txBody>
+      </p:sp>
+      <p:sp>
+        <p:nvSpPr>
+          <p:cNvPr id="16" name="Rounded Rectangle 15"/>
+          <p:cNvSpPr/>
+          <p:nvPr/>
+        </p:nvSpPr>
+        <p:spPr>
+          <a:xfrm>
+            <a:off x="822960" y="4261103"/>
+            <a:ext cx="2103120" cy="566928"/>
+          </a:xfrm>
+          <a:prstGeom prst="roundRect">
+            <a:avLst/>
+          </a:prstGeom>
+          <a:solidFill>
+            <a:srgbClr val="111A22"/>
+          </a:solidFill>
+          <a:ln w="9525">
+            <a:solidFill>
+              <a:srgbClr val="35C2C9"/>
+            </a:solidFill>
+          </a:ln>
+          <a:effectLst/>
+        </p:spPr>
+        <p:style>
+          <a:lnRef idx="1">
+            <a:schemeClr val="accent1"/>
+          </a:lnRef>
+          <a:fillRef idx="3">
+            <a:schemeClr val="accent1"/>
+          </a:fillRef>
+          <a:effectRef idx="2">
+            <a:schemeClr val="accent1"/>
+          </a:effectRef>
+          <a:fontRef idx="minor">
+            <a:schemeClr val="lt1"/>
+          </a:fontRef>
+        </p:style>
+        <p:txBody>
+          <a:bodyPr rtlCol="0" anchor="ctr"/>
+          <a:lstStyle/>
+          <a:p>
+            <a:pPr algn="ctr"/>
+          </a:p>
+        </p:txBody>
+      </p:sp>
+      <p:sp>
+        <p:nvSpPr>
+          <p:cNvPr id="17" name="TextBox 16"/>
+          <p:cNvSpPr txBox="1"/>
+          <p:nvPr/>
+        </p:nvSpPr>
+        <p:spPr>
+          <a:xfrm>
+            <a:off x="960120" y="4389119"/>
+            <a:ext cx="1920240" cy="365760"/>
+          </a:xfrm>
+          <a:prstGeom prst="rect">
+            <a:avLst/>
+          </a:prstGeom>
+          <a:noFill/>
+        </p:spPr>
+        <p:txBody>
+          <a:bodyPr wrap="square">
+            <a:spAutoFit/>
+          </a:bodyPr>
+          <a:lstStyle/>
+          <a:p>
+            <a:pPr algn="l">
+              <a:spcAft>
+                <a:spcPts val="600"/>
+              </a:spcAft>
+            </a:pPr>
+            <a:r>
+              <a:rPr sz="1300" b="1">
+                <a:solidFill>
+                  <a:srgbClr val="35C2C9"/>
+                </a:solidFill>
+                <a:latin typeface="Consolas"/>
+              </a:rPr>
+              <a:t>Week 6</a:t>
+            </a:r>
+          </a:p>
+        </p:txBody>
+      </p:sp>
+      <p:sp>
+        <p:nvSpPr>
+          <p:cNvPr id="18" name="Rounded Rectangle 17"/>
+          <p:cNvSpPr/>
+          <p:nvPr/>
+        </p:nvSpPr>
+        <p:spPr>
+          <a:xfrm>
+            <a:off x="3108960" y="4261103"/>
+            <a:ext cx="8229600" cy="566928"/>
+          </a:xfrm>
+          <a:prstGeom prst="roundRect">
+            <a:avLst/>
+          </a:prstGeom>
+          <a:solidFill>
+            <a:srgbClr val="111A22"/>
+          </a:solidFill>
+          <a:ln w="9525">
+            <a:solidFill>
+              <a:srgbClr val="1F2C37"/>
+            </a:solidFill>
+          </a:ln>
+          <a:effectLst/>
+        </p:spPr>
+        <p:style>
+          <a:lnRef idx="1">
+            <a:schemeClr val="accent1"/>
+          </a:lnRef>
+          <a:fillRef idx="3">
+            <a:schemeClr val="accent1"/>
+          </a:fillRef>
+          <a:effectRef idx="2">
+            <a:schemeClr val="accent1"/>
+          </a:effectRef>
+          <a:fontRef idx="minor">
+            <a:schemeClr val="lt1"/>
+          </a:fontRef>
+        </p:style>
+        <p:txBody>
+          <a:bodyPr rtlCol="0" anchor="ctr"/>
+          <a:lstStyle/>
+          <a:p>
+            <a:pPr algn="ctr"/>
+          </a:p>
+        </p:txBody>
+      </p:sp>
+      <p:sp>
+        <p:nvSpPr>
+          <p:cNvPr id="19" name="TextBox 18"/>
+          <p:cNvSpPr txBox="1"/>
+          <p:nvPr/>
+        </p:nvSpPr>
+        <p:spPr>
+          <a:xfrm>
+            <a:off x="3291840" y="4379975"/>
+            <a:ext cx="7955279" cy="411480"/>
+          </a:xfrm>
+          <a:prstGeom prst="rect">
+            <a:avLst/>
+          </a:prstGeom>
+          <a:noFill/>
+        </p:spPr>
+        <p:txBody>
+          <a:bodyPr wrap="square">
+            <a:spAutoFit/>
+          </a:bodyPr>
+          <a:lstStyle/>
+          <a:p>
+            <a:pPr algn="l">
+              <a:spcAft>
+                <a:spcPts val="600"/>
+              </a:spcAft>
+            </a:pPr>
+            <a:r>
+              <a:rPr sz="1350" b="0">
+                <a:solidFill>
+                  <a:srgbClr val="9FB2C0"/>
+                </a:solidFill>
+                <a:latin typeface="Calibri"/>
+              </a:rPr>
+              <a:t>Reporting — Power BI dashboards, DAX by dimension</a:t>
+            </a:r>
+          </a:p>
+        </p:txBody>
+      </p:sp>
+      <p:sp>
+        <p:nvSpPr>
+          <p:cNvPr id="20" name="Rounded Rectangle 19"/>
+          <p:cNvSpPr/>
+          <p:nvPr/>
+        </p:nvSpPr>
+        <p:spPr>
+          <a:xfrm>
+            <a:off x="822960" y="4919471"/>
+            <a:ext cx="2103120" cy="566928"/>
+          </a:xfrm>
+          <a:prstGeom prst="roundRect">
+            <a:avLst/>
+          </a:prstGeom>
+          <a:solidFill>
+            <a:srgbClr val="111A22"/>
+          </a:solidFill>
+          <a:ln w="9525">
+            <a:solidFill>
+              <a:srgbClr val="35C2C9"/>
+            </a:solidFill>
+          </a:ln>
+          <a:effectLst/>
+        </p:spPr>
+        <p:style>
+          <a:lnRef idx="1">
+            <a:schemeClr val="accent1"/>
+          </a:lnRef>
+          <a:fillRef idx="3">
+            <a:schemeClr val="accent1"/>
+          </a:fillRef>
+          <a:effectRef idx="2">
+            <a:schemeClr val="accent1"/>
+          </a:effectRef>
+          <a:fontRef idx="minor">
+            <a:schemeClr val="lt1"/>
+          </a:fontRef>
+        </p:style>
+        <p:txBody>
+          <a:bodyPr rtlCol="0" anchor="ctr"/>
+          <a:lstStyle/>
+          <a:p>
+            <a:pPr algn="ctr"/>
+          </a:p>
+        </p:txBody>
+      </p:sp>
+      <p:sp>
+        <p:nvSpPr>
+          <p:cNvPr id="21" name="TextBox 20"/>
+          <p:cNvSpPr txBox="1"/>
+          <p:nvPr/>
+        </p:nvSpPr>
+        <p:spPr>
+          <a:xfrm>
+            <a:off x="960120" y="5047487"/>
+            <a:ext cx="1920240" cy="365760"/>
+          </a:xfrm>
+          <a:prstGeom prst="rect">
+            <a:avLst/>
+          </a:prstGeom>
+          <a:noFill/>
+        </p:spPr>
+        <p:txBody>
+          <a:bodyPr wrap="square">
+            <a:spAutoFit/>
+          </a:bodyPr>
+          <a:lstStyle/>
+          <a:p>
+            <a:pPr algn="l">
+              <a:spcAft>
+                <a:spcPts val="600"/>
+              </a:spcAft>
+            </a:pPr>
+            <a:r>
+              <a:rPr sz="1300" b="1">
+                <a:solidFill>
+                  <a:srgbClr val="35C2C9"/>
+                </a:solidFill>
+                <a:latin typeface="Consolas"/>
+              </a:rPr>
+              <a:t>Week 7</a:t>
+            </a:r>
+          </a:p>
+        </p:txBody>
+      </p:sp>
+      <p:sp>
+        <p:nvSpPr>
+          <p:cNvPr id="22" name="Rounded Rectangle 21"/>
+          <p:cNvSpPr/>
+          <p:nvPr/>
+        </p:nvSpPr>
+        <p:spPr>
+          <a:xfrm>
+            <a:off x="3108960" y="4919471"/>
+            <a:ext cx="8229600" cy="566928"/>
+          </a:xfrm>
+          <a:prstGeom prst="roundRect">
+            <a:avLst/>
+          </a:prstGeom>
+          <a:solidFill>
+            <a:srgbClr val="111A22"/>
+          </a:solidFill>
+          <a:ln w="9525">
+            <a:solidFill>
+              <a:srgbClr val="1F2C37"/>
+            </a:solidFill>
+          </a:ln>
+          <a:effectLst/>
+        </p:spPr>
+        <p:style>
+          <a:lnRef idx="1">
+            <a:schemeClr val="accent1"/>
+          </a:lnRef>
+          <a:fillRef idx="3">
+            <a:schemeClr val="accent1"/>
+          </a:fillRef>
+          <a:effectRef idx="2">
+            <a:schemeClr val="accent1"/>
+          </a:effectRef>
+          <a:fontRef idx="minor">
+            <a:schemeClr val="lt1"/>
+          </a:fontRef>
+        </p:style>
+        <p:txBody>
+          <a:bodyPr rtlCol="0" anchor="ctr"/>
+          <a:lstStyle/>
+          <a:p>
+            <a:pPr algn="ctr"/>
+          </a:p>
+        </p:txBody>
+      </p:sp>
+      <p:sp>
+        <p:nvSpPr>
+          <p:cNvPr id="23" name="TextBox 22"/>
+          <p:cNvSpPr txBox="1"/>
+          <p:nvPr/>
+        </p:nvSpPr>
+        <p:spPr>
+          <a:xfrm>
+            <a:off x="3291840" y="5038343"/>
+            <a:ext cx="7955279" cy="411480"/>
+          </a:xfrm>
+          <a:prstGeom prst="rect">
+            <a:avLst/>
+          </a:prstGeom>
+          <a:noFill/>
+        </p:spPr>
+        <p:txBody>
+          <a:bodyPr wrap="square">
+            <a:spAutoFit/>
+          </a:bodyPr>
+          <a:lstStyle/>
+          <a:p>
+            <a:pPr algn="l">
+              <a:spcAft>
+                <a:spcPts val="600"/>
+              </a:spcAft>
+            </a:pPr>
+            <a:r>
+              <a:rPr sz="1350" b="0">
+                <a:solidFill>
+                  <a:srgbClr val="9FB2C0"/>
+                </a:solidFill>
+                <a:latin typeface="Calibri"/>
+              </a:rPr>
+              <a:t>Process &amp; hardening — Process Mining, testing</a:t>
+            </a:r>
+          </a:p>
+        </p:txBody>
+      </p:sp>
+      <p:sp>
+        <p:nvSpPr>
+          <p:cNvPr id="24" name="Rounded Rectangle 23"/>
+          <p:cNvSpPr/>
+          <p:nvPr/>
+        </p:nvSpPr>
+        <p:spPr>
+          <a:xfrm>
+            <a:off x="822960" y="5577839"/>
+            <a:ext cx="2103120" cy="566928"/>
+          </a:xfrm>
+          <a:prstGeom prst="roundRect">
+            <a:avLst/>
+          </a:prstGeom>
+          <a:solidFill>
+            <a:srgbClr val="111A22"/>
+          </a:solidFill>
+          <a:ln w="9525">
+            <a:solidFill>
+              <a:srgbClr val="35C2C9"/>
+            </a:solidFill>
+          </a:ln>
+          <a:effectLst/>
+        </p:spPr>
+        <p:style>
+          <a:lnRef idx="1">
+            <a:schemeClr val="accent1"/>
+          </a:lnRef>
+          <a:fillRef idx="3">
+            <a:schemeClr val="accent1"/>
+          </a:fillRef>
+          <a:effectRef idx="2">
+            <a:schemeClr val="accent1"/>
+          </a:effectRef>
+          <a:fontRef idx="minor">
+            <a:schemeClr val="lt1"/>
+          </a:fontRef>
+        </p:style>
+        <p:txBody>
+          <a:bodyPr rtlCol="0" anchor="ctr"/>
+          <a:lstStyle/>
+          <a:p>
+            <a:pPr algn="ctr"/>
+          </a:p>
+        </p:txBody>
+      </p:sp>
+      <p:sp>
+        <p:nvSpPr>
+          <p:cNvPr id="25" name="TextBox 24"/>
+          <p:cNvSpPr txBox="1"/>
+          <p:nvPr/>
+        </p:nvSpPr>
+        <p:spPr>
+          <a:xfrm>
+            <a:off x="960120" y="5705855"/>
+            <a:ext cx="1920240" cy="365760"/>
+          </a:xfrm>
+          <a:prstGeom prst="rect">
+            <a:avLst/>
+          </a:prstGeom>
+          <a:noFill/>
+        </p:spPr>
+        <p:txBody>
+          <a:bodyPr wrap="square">
+            <a:spAutoFit/>
+          </a:bodyPr>
+          <a:lstStyle/>
+          <a:p>
+            <a:pPr algn="l">
+              <a:spcAft>
+                <a:spcPts val="600"/>
+              </a:spcAft>
+            </a:pPr>
+            <a:r>
+              <a:rPr sz="1300" b="1">
+                <a:solidFill>
+                  <a:srgbClr val="35C2C9"/>
+                </a:solidFill>
+                <a:latin typeface="Consolas"/>
+              </a:rPr>
+              <a:t>Week 8</a:t>
+            </a:r>
+          </a:p>
+        </p:txBody>
+      </p:sp>
+      <p:sp>
+        <p:nvSpPr>
+          <p:cNvPr id="26" name="Rounded Rectangle 25"/>
+          <p:cNvSpPr/>
+          <p:nvPr/>
+        </p:nvSpPr>
+        <p:spPr>
+          <a:xfrm>
+            <a:off x="3108960" y="5577839"/>
+            <a:ext cx="8229600" cy="566928"/>
+          </a:xfrm>
+          <a:prstGeom prst="roundRect">
+            <a:avLst/>
+          </a:prstGeom>
+          <a:solidFill>
+            <a:srgbClr val="111A22"/>
+          </a:solidFill>
+          <a:ln w="9525">
+            <a:solidFill>
+              <a:srgbClr val="1F2C37"/>
+            </a:solidFill>
+          </a:ln>
+          <a:effectLst/>
+        </p:spPr>
+        <p:style>
+          <a:lnRef idx="1">
+            <a:schemeClr val="accent1"/>
+          </a:lnRef>
+          <a:fillRef idx="3">
+            <a:schemeClr val="accent1"/>
+          </a:fillRef>
+          <a:effectRef idx="2">
+            <a:schemeClr val="accent1"/>
+          </a:effectRef>
+          <a:fontRef idx="minor">
+            <a:schemeClr val="lt1"/>
+          </a:fontRef>
+        </p:style>
+        <p:txBody>
+          <a:bodyPr rtlCol="0" anchor="ctr"/>
+          <a:lstStyle/>
+          <a:p>
+            <a:pPr algn="ctr"/>
+          </a:p>
+        </p:txBody>
+      </p:sp>
+      <p:sp>
+        <p:nvSpPr>
+          <p:cNvPr id="27" name="TextBox 26"/>
+          <p:cNvSpPr txBox="1"/>
+          <p:nvPr/>
+        </p:nvSpPr>
+        <p:spPr>
+          <a:xfrm>
+            <a:off x="3291840" y="5696711"/>
+            <a:ext cx="7955279" cy="411480"/>
+          </a:xfrm>
+          <a:prstGeom prst="rect">
+            <a:avLst/>
+          </a:prstGeom>
+          <a:noFill/>
+        </p:spPr>
+        <p:txBody>
+          <a:bodyPr wrap="square">
+            <a:spAutoFit/>
+          </a:bodyPr>
+          <a:lstStyle/>
+          <a:p>
+            <a:pPr algn="l">
+              <a:spcAft>
+                <a:spcPts val="600"/>
+              </a:spcAft>
+            </a:pPr>
+            <a:r>
+              <a:rPr sz="1350" b="0">
+                <a:solidFill>
+                  <a:srgbClr val="9FB2C0"/>
+                </a:solidFill>
+                <a:latin typeface="Calibri"/>
+              </a:rPr>
+              <a:t>Training &amp; handover — per-department training, operation manuals</a:t>
+            </a:r>
+          </a:p>
+        </p:txBody>
+      </p:sp>
+      <p:sp>
+        <p:nvSpPr>
+          <p:cNvPr id="28" name="TextBox 27"/>
+          <p:cNvSpPr txBox="1"/>
+          <p:nvPr/>
+        </p:nvSpPr>
+        <p:spPr>
+          <a:xfrm>
+            <a:off x="822960" y="6291072"/>
+            <a:ext cx="10515600" cy="457200"/>
+          </a:xfrm>
+          <a:prstGeom prst="rect">
+            <a:avLst/>
+          </a:prstGeom>
+          <a:noFill/>
+        </p:spPr>
+        <p:txBody>
+          <a:bodyPr wrap="square">
+            <a:spAutoFit/>
+          </a:bodyPr>
+          <a:lstStyle/>
+          <a:p>
+            <a:pPr algn="l">
+              <a:spcAft>
+                <a:spcPts val="600"/>
+              </a:spcAft>
+            </a:pPr>
+            <a:r>
+              <a:rPr sz="1200" b="0">
+                <a:solidFill>
+                  <a:srgbClr val="6B8090"/>
+                </a:solidFill>
+                <a:latin typeface="Calibri"/>
+              </a:rPr>
+              <a:t>These 8 weeks are Phase 1 (the MVP): the core that interconnects and reconciles. The full correct system (constraints, full EVM, L1-L5 commissioning, process mining) rolls out in following phases.</a:t>
+            </a:r>
+          </a:p>
+        </p:txBody>
+      </p:sp>
+    </p:spTree>
+  </p:cSld>
+  <p:clrMapOvr>
+    <a:masterClrMapping/>
+  </p:clrMapOvr>
+</p:sld>
+</file>
+
+<file path=ppt/slides/slide12.xml><?xml version="1.0" encoding="utf-8"?>
+<p:sld xmlns:a="http://schemas.openxmlformats.org/drawingml/2006/main" xmlns:p="http://schemas.openxmlformats.org/presentationml/2006/main" xmlns:r="http://schemas.openxmlformats.org/officeDocument/2006/relationships">
+  <p:cSld>
+    <p:bg>
+      <p:bgPr>
+        <a:solidFill>
+          <a:srgbClr val="0B1015"/>
+        </a:solidFill>
+        <a:effectLst/>
+      </p:bgPr>
+    </p:bg>
+    <p:spTree>
+      <p:nvGrpSpPr>
+        <p:cNvPr id="1" name=""/>
+        <p:cNvGrpSpPr/>
+        <p:nvPr/>
+      </p:nvGrpSpPr>
+      <p:grpSpPr/>
+      <p:sp>
+        <p:nvSpPr>
+          <p:cNvPr id="2" name="TextBox 1"/>
+          <p:cNvSpPr txBox="1"/>
+          <p:nvPr/>
+        </p:nvSpPr>
+        <p:spPr>
+          <a:xfrm>
+            <a:off x="822960" y="502920"/>
+            <a:ext cx="10058400" cy="365760"/>
+          </a:xfrm>
+          <a:prstGeom prst="rect">
+            <a:avLst/>
+          </a:prstGeom>
+          <a:noFill/>
+        </p:spPr>
+        <p:txBody>
+          <a:bodyPr wrap="square">
+            <a:spAutoFit/>
+          </a:bodyPr>
+          <a:lstStyle/>
+          <a:p>
+            <a:pPr algn="l">
+              <a:spcAft>
+                <a:spcPts val="600"/>
+              </a:spcAft>
+            </a:pPr>
+            <a:r>
+              <a:rPr sz="1200" b="1">
+                <a:solidFill>
+                  <a:srgbClr val="35C2C9"/>
+                </a:solidFill>
+                <a:latin typeface="Consolas"/>
+              </a:rPr>
+              <a:t>INVESTMENT</a:t>
+            </a:r>
+          </a:p>
+        </p:txBody>
+      </p:sp>
+      <p:sp>
+        <p:nvSpPr>
+          <p:cNvPr id="3" name="TextBox 2"/>
+          <p:cNvSpPr txBox="1"/>
+          <p:nvPr/>
+        </p:nvSpPr>
+        <p:spPr>
+          <a:xfrm>
+            <a:off x="822960" y="960120"/>
+            <a:ext cx="10515600" cy="914400"/>
+          </a:xfrm>
+          <a:prstGeom prst="rect">
+            <a:avLst/>
+          </a:prstGeom>
+          <a:noFill/>
+        </p:spPr>
+        <p:txBody>
+          <a:bodyPr wrap="square">
+            <a:spAutoFit/>
+          </a:bodyPr>
+          <a:lstStyle/>
+          <a:p>
+            <a:pPr algn="l">
+              <a:spcAft>
+                <a:spcPts val="600"/>
+              </a:spcAft>
+            </a:pPr>
+            <a:r>
+              <a:rPr sz="3400" b="1">
+                <a:solidFill>
+                  <a:srgbClr val="E6EDF3"/>
+                </a:solidFill>
+                <a:latin typeface="Calibri Light"/>
+              </a:rPr>
+              <a:t>Lean to start, scales with the project</a:t>
+            </a:r>
+          </a:p>
+        </p:txBody>
+      </p:sp>
+      <p:sp>
+        <p:nvSpPr>
+          <p:cNvPr id="4" name="TextBox 3"/>
+          <p:cNvSpPr txBox="1"/>
+          <p:nvPr/>
+        </p:nvSpPr>
+        <p:spPr>
+          <a:xfrm>
+            <a:off x="822960" y="1874519"/>
+            <a:ext cx="10515600" cy="640080"/>
+          </a:xfrm>
+          <a:prstGeom prst="rect">
+            <a:avLst/>
+          </a:prstGeom>
+          <a:noFill/>
+        </p:spPr>
+        <p:txBody>
+          <a:bodyPr wrap="square">
+            <a:spAutoFit/>
+          </a:bodyPr>
+          <a:lstStyle/>
+          <a:p>
+            <a:pPr algn="l">
+              <a:spcAft>
+                <a:spcPts val="600"/>
+              </a:spcAft>
+            </a:pPr>
+            <a:r>
+              <a:rPr sz="1500" b="0">
+                <a:solidFill>
+                  <a:srgbClr val="9FB2C0"/>
+                </a:solidFill>
+                <a:latin typeface="Calibri"/>
+              </a:rPr>
+              <a:t>List prices, Microsoft 2026. To validate against the client's existing licensing.</a:t>
+            </a:r>
+          </a:p>
+        </p:txBody>
+      </p:sp>
+      <p:sp>
+        <p:nvSpPr>
+          <p:cNvPr id="5" name="Rounded Rectangle 4"/>
+          <p:cNvSpPr/>
+          <p:nvPr/>
+        </p:nvSpPr>
+        <p:spPr>
+          <a:xfrm>
+            <a:off x="822960" y="2697480"/>
+            <a:ext cx="10515600" cy="502920"/>
+          </a:xfrm>
+          <a:prstGeom prst="roundRect">
+            <a:avLst/>
+          </a:prstGeom>
+          <a:solidFill>
+            <a:srgbClr val="111A22"/>
+          </a:solidFill>
+          <a:ln w="9525">
+            <a:solidFill>
+              <a:srgbClr val="1F2C37"/>
+            </a:solidFill>
+          </a:ln>
+          <a:effectLst/>
+        </p:spPr>
+        <p:style>
+          <a:lnRef idx="1">
+            <a:schemeClr val="accent1"/>
+          </a:lnRef>
+          <a:fillRef idx="3">
+            <a:schemeClr val="accent1"/>
+          </a:fillRef>
+          <a:effectRef idx="2">
+            <a:schemeClr val="accent1"/>
+          </a:effectRef>
+          <a:fontRef idx="minor">
+            <a:schemeClr val="lt1"/>
+          </a:fontRef>
+        </p:style>
+        <p:txBody>
+          <a:bodyPr rtlCol="0" anchor="ctr"/>
+          <a:lstStyle/>
+          <a:p>
+            <a:pPr algn="ctr"/>
+          </a:p>
+        </p:txBody>
+      </p:sp>
+      <p:sp>
+        <p:nvSpPr>
+          <p:cNvPr id="6" name="TextBox 5"/>
+          <p:cNvSpPr txBox="1"/>
+          <p:nvPr/>
+        </p:nvSpPr>
+        <p:spPr>
+          <a:xfrm>
+            <a:off x="1051560" y="2788920"/>
+            <a:ext cx="5486400" cy="365760"/>
+          </a:xfrm>
+          <a:prstGeom prst="rect">
+            <a:avLst/>
+          </a:prstGeom>
+          <a:noFill/>
+        </p:spPr>
+        <p:txBody>
+          <a:bodyPr wrap="square">
+            <a:spAutoFit/>
+          </a:bodyPr>
+          <a:lstStyle/>
+          <a:p>
+            <a:pPr algn="l">
+              <a:spcAft>
+                <a:spcPts val="600"/>
+              </a:spcAft>
+            </a:pPr>
+            <a:r>
+              <a:rPr sz="1400" b="0">
+                <a:solidFill>
+                  <a:srgbClr val="E6EDF3"/>
+                </a:solidFill>
+                <a:latin typeface="Calibri"/>
+              </a:rPr>
+              <a:t>Power Apps Premium</a:t>
+            </a:r>
+          </a:p>
+        </p:txBody>
+      </p:sp>
+      <p:sp>
+        <p:nvSpPr>
+          <p:cNvPr id="7" name="TextBox 6"/>
+          <p:cNvSpPr txBox="1"/>
+          <p:nvPr/>
+        </p:nvSpPr>
+        <p:spPr>
+          <a:xfrm>
+            <a:off x="6400800" y="2788920"/>
+            <a:ext cx="2926080" cy="365760"/>
+          </a:xfrm>
+          <a:prstGeom prst="rect">
+            <a:avLst/>
+          </a:prstGeom>
+          <a:noFill/>
+        </p:spPr>
+        <p:txBody>
+          <a:bodyPr wrap="square">
+            <a:spAutoFit/>
+          </a:bodyPr>
+          <a:lstStyle/>
+          <a:p>
+            <a:pPr algn="l">
+              <a:spcAft>
+                <a:spcPts val="600"/>
+              </a:spcAft>
+            </a:pPr>
+            <a:r>
+              <a:rPr sz="1250" b="0">
+                <a:solidFill>
+                  <a:srgbClr val="6B8090"/>
+                </a:solidFill>
+                <a:latin typeface="Calibri"/>
+              </a:rPr>
+              <a:t>$20 / user x ~40</a:t>
+            </a:r>
+          </a:p>
+        </p:txBody>
+      </p:sp>
+      <p:sp>
+        <p:nvSpPr>
+          <p:cNvPr id="8" name="TextBox 7"/>
+          <p:cNvSpPr txBox="1"/>
+          <p:nvPr/>
+        </p:nvSpPr>
+        <p:spPr>
+          <a:xfrm>
+            <a:off x="9418320" y="2788920"/>
+            <a:ext cx="1737360" cy="365760"/>
+          </a:xfrm>
+          <a:prstGeom prst="rect">
+            <a:avLst/>
+          </a:prstGeom>
+          <a:noFill/>
+        </p:spPr>
+        <p:txBody>
+          <a:bodyPr wrap="square">
+            <a:spAutoFit/>
+          </a:bodyPr>
+          <a:lstStyle/>
+          <a:p>
+            <a:pPr algn="r">
+              <a:spcAft>
+                <a:spcPts val="600"/>
+              </a:spcAft>
+            </a:pPr>
+            <a:r>
+              <a:rPr sz="1400" b="0">
+                <a:solidFill>
+                  <a:srgbClr val="9FB2C0"/>
+                </a:solidFill>
+                <a:latin typeface="Consolas"/>
+              </a:rPr>
+              <a:t>~$800 / mo</a:t>
+            </a:r>
+          </a:p>
+        </p:txBody>
+      </p:sp>
+      <p:sp>
+        <p:nvSpPr>
+          <p:cNvPr id="9" name="Rounded Rectangle 8"/>
+          <p:cNvSpPr/>
+          <p:nvPr/>
+        </p:nvSpPr>
+        <p:spPr>
+          <a:xfrm>
+            <a:off x="822960" y="3273552"/>
+            <a:ext cx="10515600" cy="502920"/>
+          </a:xfrm>
+          <a:prstGeom prst="roundRect">
+            <a:avLst/>
+          </a:prstGeom>
+          <a:solidFill>
+            <a:srgbClr val="111A22"/>
+          </a:solidFill>
+          <a:ln w="9525">
+            <a:solidFill>
+              <a:srgbClr val="1F2C37"/>
+            </a:solidFill>
+          </a:ln>
+          <a:effectLst/>
+        </p:spPr>
+        <p:style>
+          <a:lnRef idx="1">
+            <a:schemeClr val="accent1"/>
+          </a:lnRef>
+          <a:fillRef idx="3">
+            <a:schemeClr val="accent1"/>
+          </a:fillRef>
+          <a:effectRef idx="2">
+            <a:schemeClr val="accent1"/>
+          </a:effectRef>
+          <a:fontRef idx="minor">
+            <a:schemeClr val="lt1"/>
+          </a:fontRef>
+        </p:style>
+        <p:txBody>
+          <a:bodyPr rtlCol="0" anchor="ctr"/>
+          <a:lstStyle/>
+          <a:p>
+            <a:pPr algn="ctr"/>
+          </a:p>
+        </p:txBody>
+      </p:sp>
+      <p:sp>
+        <p:nvSpPr>
+          <p:cNvPr id="10" name="TextBox 9"/>
+          <p:cNvSpPr txBox="1"/>
+          <p:nvPr/>
+        </p:nvSpPr>
+        <p:spPr>
+          <a:xfrm>
+            <a:off x="1051560" y="3364992"/>
+            <a:ext cx="5486400" cy="365760"/>
+          </a:xfrm>
+          <a:prstGeom prst="rect">
+            <a:avLst/>
+          </a:prstGeom>
+          <a:noFill/>
+        </p:spPr>
+        <p:txBody>
+          <a:bodyPr wrap="square">
+            <a:spAutoFit/>
+          </a:bodyPr>
+          <a:lstStyle/>
+          <a:p>
+            <a:pPr algn="l">
+              <a:spcAft>
+                <a:spcPts val="600"/>
+              </a:spcAft>
+            </a:pPr>
+            <a:r>
+              <a:rPr sz="1400" b="0">
+                <a:solidFill>
+                  <a:srgbClr val="E6EDF3"/>
+                </a:solidFill>
+                <a:latin typeface="Calibri"/>
+              </a:rPr>
+              <a:t>Power Automate Pro (incl. Process Mining)</a:t>
+            </a:r>
+          </a:p>
+        </p:txBody>
+      </p:sp>
+      <p:sp>
+        <p:nvSpPr>
+          <p:cNvPr id="11" name="TextBox 10"/>
+          <p:cNvSpPr txBox="1"/>
+          <p:nvPr/>
+        </p:nvSpPr>
+        <p:spPr>
+          <a:xfrm>
+            <a:off x="6400800" y="3364992"/>
+            <a:ext cx="2926080" cy="365760"/>
+          </a:xfrm>
+          <a:prstGeom prst="rect">
+            <a:avLst/>
+          </a:prstGeom>
+          <a:noFill/>
+        </p:spPr>
+        <p:txBody>
+          <a:bodyPr wrap="square">
+            <a:spAutoFit/>
+          </a:bodyPr>
+          <a:lstStyle/>
+          <a:p>
+            <a:pPr algn="l">
+              <a:spcAft>
+                <a:spcPts val="600"/>
+              </a:spcAft>
+            </a:pPr>
+            <a:r>
+              <a:rPr sz="1250" b="0">
+                <a:solidFill>
+                  <a:srgbClr val="6B8090"/>
+                </a:solidFill>
+                <a:latin typeface="Calibri"/>
+              </a:rPr>
+              <a:t>$220 / year</a:t>
+            </a:r>
+          </a:p>
+        </p:txBody>
+      </p:sp>
+      <p:sp>
+        <p:nvSpPr>
+          <p:cNvPr id="12" name="TextBox 11"/>
+          <p:cNvSpPr txBox="1"/>
+          <p:nvPr/>
+        </p:nvSpPr>
+        <p:spPr>
+          <a:xfrm>
+            <a:off x="9418320" y="3364992"/>
+            <a:ext cx="1737360" cy="365760"/>
+          </a:xfrm>
+          <a:prstGeom prst="rect">
+            <a:avLst/>
+          </a:prstGeom>
+          <a:noFill/>
+        </p:spPr>
+        <p:txBody>
+          <a:bodyPr wrap="square">
+            <a:spAutoFit/>
+          </a:bodyPr>
+          <a:lstStyle/>
+          <a:p>
+            <a:pPr algn="r">
+              <a:spcAft>
+                <a:spcPts val="600"/>
+              </a:spcAft>
+            </a:pPr>
+            <a:r>
+              <a:rPr sz="1400" b="0">
+                <a:solidFill>
+                  <a:srgbClr val="9FB2C0"/>
+                </a:solidFill>
+                <a:latin typeface="Consolas"/>
+              </a:rPr>
+              <a:t>~$18 / mo</a:t>
+            </a:r>
+          </a:p>
+        </p:txBody>
+      </p:sp>
+      <p:sp>
+        <p:nvSpPr>
+          <p:cNvPr id="13" name="Rounded Rectangle 12"/>
+          <p:cNvSpPr/>
+          <p:nvPr/>
+        </p:nvSpPr>
+        <p:spPr>
+          <a:xfrm>
+            <a:off x="822960" y="3849624"/>
+            <a:ext cx="10515600" cy="502920"/>
+          </a:xfrm>
+          <a:prstGeom prst="roundRect">
+            <a:avLst/>
+          </a:prstGeom>
+          <a:solidFill>
+            <a:srgbClr val="111A22"/>
+          </a:solidFill>
+          <a:ln w="9525">
+            <a:solidFill>
+              <a:srgbClr val="1F2C37"/>
+            </a:solidFill>
+          </a:ln>
+          <a:effectLst/>
+        </p:spPr>
+        <p:style>
+          <a:lnRef idx="1">
+            <a:schemeClr val="accent1"/>
+          </a:lnRef>
+          <a:fillRef idx="3">
+            <a:schemeClr val="accent1"/>
+          </a:fillRef>
+          <a:effectRef idx="2">
+            <a:schemeClr val="accent1"/>
+          </a:effectRef>
+          <a:fontRef idx="minor">
+            <a:schemeClr val="lt1"/>
+          </a:fontRef>
+        </p:style>
+        <p:txBody>
+          <a:bodyPr rtlCol="0" anchor="ctr"/>
+          <a:lstStyle/>
+          <a:p>
+            <a:pPr algn="ctr"/>
+          </a:p>
+        </p:txBody>
+      </p:sp>
+      <p:sp>
+        <p:nvSpPr>
+          <p:cNvPr id="14" name="TextBox 13"/>
+          <p:cNvSpPr txBox="1"/>
+          <p:nvPr/>
+        </p:nvSpPr>
+        <p:spPr>
+          <a:xfrm>
+            <a:off x="1051560" y="3941063"/>
+            <a:ext cx="5486400" cy="365760"/>
+          </a:xfrm>
+          <a:prstGeom prst="rect">
+            <a:avLst/>
+          </a:prstGeom>
+          <a:noFill/>
+        </p:spPr>
+        <p:txBody>
+          <a:bodyPr wrap="square">
+            <a:spAutoFit/>
+          </a:bodyPr>
+          <a:lstStyle/>
+          <a:p>
+            <a:pPr algn="l">
+              <a:spcAft>
+                <a:spcPts val="600"/>
+              </a:spcAft>
+            </a:pPr>
+            <a:r>
+              <a:rPr sz="1400" b="0">
+                <a:solidFill>
+                  <a:srgbClr val="E6EDF3"/>
+                </a:solidFill>
+                <a:latin typeface="Calibri"/>
+              </a:rPr>
+              <a:t>Power Pages (GC portal)</a:t>
+            </a:r>
+          </a:p>
+        </p:txBody>
+      </p:sp>
+      <p:sp>
+        <p:nvSpPr>
+          <p:cNvPr id="15" name="TextBox 14"/>
+          <p:cNvSpPr txBox="1"/>
+          <p:nvPr/>
+        </p:nvSpPr>
+        <p:spPr>
+          <a:xfrm>
+            <a:off x="6400800" y="3941063"/>
+            <a:ext cx="2926080" cy="365760"/>
+          </a:xfrm>
+          <a:prstGeom prst="rect">
+            <a:avLst/>
+          </a:prstGeom>
+          <a:noFill/>
+        </p:spPr>
+        <p:txBody>
+          <a:bodyPr wrap="square">
+            <a:spAutoFit/>
+          </a:bodyPr>
+          <a:lstStyle/>
+          <a:p>
+            <a:pPr algn="l">
+              <a:spcAft>
+                <a:spcPts val="600"/>
+              </a:spcAft>
+            </a:pPr>
+            <a:r>
+              <a:rPr sz="1250" b="0">
+                <a:solidFill>
+                  <a:srgbClr val="6B8090"/>
+                </a:solidFill>
+                <a:latin typeface="Calibri"/>
+              </a:rPr>
+              <a:t>site + auth users</a:t>
+            </a:r>
+          </a:p>
+        </p:txBody>
+      </p:sp>
+      <p:sp>
+        <p:nvSpPr>
+          <p:cNvPr id="16" name="TextBox 15"/>
+          <p:cNvSpPr txBox="1"/>
+          <p:nvPr/>
+        </p:nvSpPr>
+        <p:spPr>
+          <a:xfrm>
+            <a:off x="9418320" y="3941063"/>
+            <a:ext cx="1737360" cy="365760"/>
+          </a:xfrm>
+          <a:prstGeom prst="rect">
+            <a:avLst/>
+          </a:prstGeom>
+          <a:noFill/>
+        </p:spPr>
+        <p:txBody>
+          <a:bodyPr wrap="square">
+            <a:spAutoFit/>
+          </a:bodyPr>
+          <a:lstStyle/>
+          <a:p>
+            <a:pPr algn="r">
+              <a:spcAft>
+                <a:spcPts val="600"/>
+              </a:spcAft>
+            </a:pPr>
+            <a:r>
+              <a:rPr sz="1400" b="0">
+                <a:solidFill>
+                  <a:srgbClr val="9FB2C0"/>
+                </a:solidFill>
+                <a:latin typeface="Consolas"/>
+              </a:rPr>
+              <a:t>~$250 / mo</a:t>
+            </a:r>
+          </a:p>
+        </p:txBody>
+      </p:sp>
+      <p:sp>
+        <p:nvSpPr>
+          <p:cNvPr id="17" name="Rounded Rectangle 16"/>
+          <p:cNvSpPr/>
+          <p:nvPr/>
+        </p:nvSpPr>
+        <p:spPr>
+          <a:xfrm>
+            <a:off x="822960" y="4425696"/>
+            <a:ext cx="10515600" cy="502920"/>
+          </a:xfrm>
+          <a:prstGeom prst="roundRect">
+            <a:avLst/>
+          </a:prstGeom>
+          <a:solidFill>
+            <a:srgbClr val="111A22"/>
+          </a:solidFill>
+          <a:ln w="9525">
+            <a:solidFill>
+              <a:srgbClr val="1F2C37"/>
+            </a:solidFill>
+          </a:ln>
+          <a:effectLst/>
+        </p:spPr>
+        <p:style>
+          <a:lnRef idx="1">
+            <a:schemeClr val="accent1"/>
+          </a:lnRef>
+          <a:fillRef idx="3">
+            <a:schemeClr val="accent1"/>
+          </a:fillRef>
+          <a:effectRef idx="2">
+            <a:schemeClr val="accent1"/>
+          </a:effectRef>
+          <a:fontRef idx="minor">
+            <a:schemeClr val="lt1"/>
+          </a:fontRef>
+        </p:style>
+        <p:txBody>
+          <a:bodyPr rtlCol="0" anchor="ctr"/>
+          <a:lstStyle/>
+          <a:p>
+            <a:pPr algn="ctr"/>
+          </a:p>
+        </p:txBody>
+      </p:sp>
+      <p:sp>
+        <p:nvSpPr>
+          <p:cNvPr id="18" name="TextBox 17"/>
+          <p:cNvSpPr txBox="1"/>
+          <p:nvPr/>
+        </p:nvSpPr>
+        <p:spPr>
+          <a:xfrm>
+            <a:off x="1051560" y="4517136"/>
+            <a:ext cx="5486400" cy="365760"/>
+          </a:xfrm>
+          <a:prstGeom prst="rect">
+            <a:avLst/>
+          </a:prstGeom>
+          <a:noFill/>
+        </p:spPr>
+        <p:txBody>
+          <a:bodyPr wrap="square">
+            <a:spAutoFit/>
+          </a:bodyPr>
+          <a:lstStyle/>
+          <a:p>
+            <a:pPr algn="l">
+              <a:spcAft>
+                <a:spcPts val="600"/>
+              </a:spcAft>
+            </a:pPr>
+            <a:r>
+              <a:rPr sz="1400" b="0">
+                <a:solidFill>
+                  <a:srgbClr val="E6EDF3"/>
+                </a:solidFill>
+                <a:latin typeface="Calibri"/>
+              </a:rPr>
+              <a:t>Power BI Pro</a:t>
+            </a:r>
+          </a:p>
+        </p:txBody>
+      </p:sp>
+      <p:sp>
+        <p:nvSpPr>
+          <p:cNvPr id="19" name="TextBox 18"/>
+          <p:cNvSpPr txBox="1"/>
+          <p:nvPr/>
+        </p:nvSpPr>
+        <p:spPr>
+          <a:xfrm>
+            <a:off x="6400800" y="4517136"/>
+            <a:ext cx="2926080" cy="365760"/>
+          </a:xfrm>
+          <a:prstGeom prst="rect">
+            <a:avLst/>
+          </a:prstGeom>
+          <a:noFill/>
+        </p:spPr>
+        <p:txBody>
+          <a:bodyPr wrap="square">
+            <a:spAutoFit/>
+          </a:bodyPr>
+          <a:lstStyle/>
+          <a:p>
+            <a:pPr algn="l">
+              <a:spcAft>
+                <a:spcPts val="600"/>
+              </a:spcAft>
+            </a:pPr>
+            <a:r>
+              <a:rPr sz="1250" b="0">
+                <a:solidFill>
+                  <a:srgbClr val="6B8090"/>
+                </a:solidFill>
+                <a:latin typeface="Calibri"/>
+              </a:rPr>
+              <a:t>$14 / user x ~15</a:t>
+            </a:r>
+          </a:p>
+        </p:txBody>
+      </p:sp>
+      <p:sp>
+        <p:nvSpPr>
+          <p:cNvPr id="20" name="TextBox 19"/>
+          <p:cNvSpPr txBox="1"/>
+          <p:nvPr/>
+        </p:nvSpPr>
+        <p:spPr>
+          <a:xfrm>
+            <a:off x="9418320" y="4517136"/>
+            <a:ext cx="1737360" cy="365760"/>
+          </a:xfrm>
+          <a:prstGeom prst="rect">
+            <a:avLst/>
+          </a:prstGeom>
+          <a:noFill/>
+        </p:spPr>
+        <p:txBody>
+          <a:bodyPr wrap="square">
+            <a:spAutoFit/>
+          </a:bodyPr>
+          <a:lstStyle/>
+          <a:p>
+            <a:pPr algn="r">
+              <a:spcAft>
+                <a:spcPts val="600"/>
+              </a:spcAft>
+            </a:pPr>
+            <a:r>
+              <a:rPr sz="1400" b="0">
+                <a:solidFill>
+                  <a:srgbClr val="9FB2C0"/>
+                </a:solidFill>
+                <a:latin typeface="Consolas"/>
+              </a:rPr>
+              <a:t>~$210 / mo</a:t>
+            </a:r>
+          </a:p>
+        </p:txBody>
+      </p:sp>
+      <p:sp>
+        <p:nvSpPr>
+          <p:cNvPr id="21" name="Rounded Rectangle 20"/>
+          <p:cNvSpPr/>
+          <p:nvPr/>
+        </p:nvSpPr>
+        <p:spPr>
+          <a:xfrm>
+            <a:off x="822960" y="5001768"/>
+            <a:ext cx="10515600" cy="502920"/>
+          </a:xfrm>
+          <a:prstGeom prst="roundRect">
+            <a:avLst/>
+          </a:prstGeom>
+          <a:solidFill>
+            <a:srgbClr val="111A22"/>
+          </a:solidFill>
+          <a:ln w="9525">
+            <a:solidFill>
+              <a:srgbClr val="1F2C37"/>
+            </a:solidFill>
+          </a:ln>
+          <a:effectLst/>
+        </p:spPr>
+        <p:style>
+          <a:lnRef idx="1">
+            <a:schemeClr val="accent1"/>
+          </a:lnRef>
+          <a:fillRef idx="3">
+            <a:schemeClr val="accent1"/>
+          </a:fillRef>
+          <a:effectRef idx="2">
+            <a:schemeClr val="accent1"/>
+          </a:effectRef>
+          <a:fontRef idx="minor">
+            <a:schemeClr val="lt1"/>
+          </a:fontRef>
+        </p:style>
+        <p:txBody>
+          <a:bodyPr rtlCol="0" anchor="ctr"/>
+          <a:lstStyle/>
+          <a:p>
+            <a:pPr algn="ctr"/>
+          </a:p>
+        </p:txBody>
+      </p:sp>
+      <p:sp>
+        <p:nvSpPr>
+          <p:cNvPr id="22" name="TextBox 21"/>
+          <p:cNvSpPr txBox="1"/>
+          <p:nvPr/>
+        </p:nvSpPr>
+        <p:spPr>
+          <a:xfrm>
+            <a:off x="1051560" y="5093207"/>
+            <a:ext cx="5486400" cy="365760"/>
+          </a:xfrm>
+          <a:prstGeom prst="rect">
+            <a:avLst/>
+          </a:prstGeom>
+          <a:noFill/>
+        </p:spPr>
+        <p:txBody>
+          <a:bodyPr wrap="square">
+            <a:spAutoFit/>
+          </a:bodyPr>
+          <a:lstStyle/>
+          <a:p>
+            <a:pPr algn="l">
+              <a:spcAft>
+                <a:spcPts val="600"/>
+              </a:spcAft>
+            </a:pPr>
+            <a:r>
+              <a:rPr sz="1400" b="0">
+                <a:solidFill>
+                  <a:srgbClr val="E6EDF3"/>
+                </a:solidFill>
+                <a:latin typeface="Calibri"/>
+              </a:rPr>
+              <a:t>Dataverse (DB + files)</a:t>
+            </a:r>
+          </a:p>
+        </p:txBody>
+      </p:sp>
+      <p:sp>
+        <p:nvSpPr>
+          <p:cNvPr id="23" name="TextBox 22"/>
+          <p:cNvSpPr txBox="1"/>
+          <p:nvPr/>
+        </p:nvSpPr>
+        <p:spPr>
+          <a:xfrm>
+            <a:off x="6400800" y="5093207"/>
+            <a:ext cx="2926080" cy="365760"/>
+          </a:xfrm>
+          <a:prstGeom prst="rect">
+            <a:avLst/>
+          </a:prstGeom>
+          <a:noFill/>
+        </p:spPr>
+        <p:txBody>
+          <a:bodyPr wrap="square">
+            <a:spAutoFit/>
+          </a:bodyPr>
+          <a:lstStyle/>
+          <a:p>
+            <a:pPr algn="l">
+              <a:spcAft>
+                <a:spcPts val="600"/>
+              </a:spcAft>
+            </a:pPr>
+            <a:r>
+              <a:rPr sz="1250" b="0">
+                <a:solidFill>
+                  <a:srgbClr val="6B8090"/>
+                </a:solidFill>
+                <a:latin typeface="Calibri"/>
+              </a:rPr>
+              <a:t>mostly included by licenses</a:t>
+            </a:r>
+          </a:p>
+        </p:txBody>
+      </p:sp>
+      <p:sp>
+        <p:nvSpPr>
+          <p:cNvPr id="24" name="TextBox 23"/>
+          <p:cNvSpPr txBox="1"/>
+          <p:nvPr/>
+        </p:nvSpPr>
+        <p:spPr>
+          <a:xfrm>
+            <a:off x="9418320" y="5093207"/>
+            <a:ext cx="1737360" cy="365760"/>
+          </a:xfrm>
+          <a:prstGeom prst="rect">
+            <a:avLst/>
+          </a:prstGeom>
+          <a:noFill/>
+        </p:spPr>
+        <p:txBody>
+          <a:bodyPr wrap="square">
+            <a:spAutoFit/>
+          </a:bodyPr>
+          <a:lstStyle/>
+          <a:p>
+            <a:pPr algn="r">
+              <a:spcAft>
+                <a:spcPts val="600"/>
+              </a:spcAft>
+            </a:pPr>
+            <a:r>
+              <a:rPr sz="1400" b="0">
+                <a:solidFill>
+                  <a:srgbClr val="9FB2C0"/>
+                </a:solidFill>
+                <a:latin typeface="Consolas"/>
+              </a:rPr>
+              <a:t>~$0-150 / mo</a:t>
+            </a:r>
+          </a:p>
+        </p:txBody>
+      </p:sp>
+      <p:sp>
+        <p:nvSpPr>
+          <p:cNvPr id="25" name="Rounded Rectangle 24"/>
+          <p:cNvSpPr/>
+          <p:nvPr/>
+        </p:nvSpPr>
+        <p:spPr>
+          <a:xfrm>
+            <a:off x="822960" y="5577840"/>
+            <a:ext cx="10515600" cy="502920"/>
+          </a:xfrm>
+          <a:prstGeom prst="roundRect">
+            <a:avLst/>
+          </a:prstGeom>
+          <a:solidFill>
+            <a:srgbClr val="111A22"/>
+          </a:solidFill>
+          <a:ln w="9525">
+            <a:solidFill>
+              <a:srgbClr val="35C2C9"/>
+            </a:solidFill>
+          </a:ln>
+          <a:effectLst/>
+        </p:spPr>
+        <p:style>
+          <a:lnRef idx="1">
+            <a:schemeClr val="accent1"/>
+          </a:lnRef>
+          <a:fillRef idx="3">
+            <a:schemeClr val="accent1"/>
+          </a:fillRef>
+          <a:effectRef idx="2">
+            <a:schemeClr val="accent1"/>
+          </a:effectRef>
+          <a:fontRef idx="minor">
+            <a:schemeClr val="lt1"/>
+          </a:fontRef>
+        </p:style>
+        <p:txBody>
+          <a:bodyPr rtlCol="0" anchor="ctr"/>
+          <a:lstStyle/>
+          <a:p>
+            <a:pPr algn="ctr"/>
+          </a:p>
+        </p:txBody>
+      </p:sp>
+      <p:sp>
+        <p:nvSpPr>
+          <p:cNvPr id="26" name="TextBox 25"/>
+          <p:cNvSpPr txBox="1"/>
+          <p:nvPr/>
+        </p:nvSpPr>
+        <p:spPr>
+          <a:xfrm>
+            <a:off x="1051560" y="5669279"/>
+            <a:ext cx="5486400" cy="365760"/>
+          </a:xfrm>
+          <a:prstGeom prst="rect">
+            <a:avLst/>
+          </a:prstGeom>
+          <a:noFill/>
+        </p:spPr>
+        <p:txBody>
+          <a:bodyPr wrap="square">
+            <a:spAutoFit/>
+          </a:bodyPr>
+          <a:lstStyle/>
+          <a:p>
+            <a:pPr algn="l">
+              <a:spcAft>
+                <a:spcPts val="600"/>
+              </a:spcAft>
+            </a:pPr>
+            <a:r>
+              <a:rPr sz="1400" b="1">
+                <a:solidFill>
+                  <a:srgbClr val="35C2C9"/>
+                </a:solidFill>
+                <a:latin typeface="Calibri"/>
+              </a:rPr>
+              <a:t>Operating total (to start)</a:t>
+            </a:r>
+          </a:p>
+        </p:txBody>
+      </p:sp>
+      <p:sp>
+        <p:nvSpPr>
+          <p:cNvPr id="27" name="TextBox 26"/>
+          <p:cNvSpPr txBox="1"/>
+          <p:nvPr/>
+        </p:nvSpPr>
+        <p:spPr>
+          <a:xfrm>
+            <a:off x="6400800" y="5669279"/>
+            <a:ext cx="2926080" cy="365760"/>
+          </a:xfrm>
+          <a:prstGeom prst="rect">
+            <a:avLst/>
+          </a:prstGeom>
+          <a:noFill/>
+        </p:spPr>
+        <p:txBody>
+          <a:bodyPr wrap="square">
+            <a:spAutoFit/>
+          </a:bodyPr>
+          <a:lstStyle/>
+          <a:p>
+            <a:pPr algn="l">
+              <a:spcAft>
+                <a:spcPts val="600"/>
+              </a:spcAft>
+            </a:pPr>
+            <a:r>
+              <a:rPr sz="1250" b="0">
+                <a:solidFill>
+                  <a:srgbClr val="6B8090"/>
+                </a:solidFill>
+                <a:latin typeface="Calibri"/>
+              </a:rPr>
+              <a:t/>
+            </a:r>
+          </a:p>
+        </p:txBody>
+      </p:sp>
+      <p:sp>
+        <p:nvSpPr>
+          <p:cNvPr id="28" name="TextBox 27"/>
+          <p:cNvSpPr txBox="1"/>
+          <p:nvPr/>
+        </p:nvSpPr>
+        <p:spPr>
+          <a:xfrm>
+            <a:off x="9418320" y="5669279"/>
+            <a:ext cx="1737360" cy="365760"/>
+          </a:xfrm>
+          <a:prstGeom prst="rect">
+            <a:avLst/>
+          </a:prstGeom>
+          <a:noFill/>
+        </p:spPr>
+        <p:txBody>
+          <a:bodyPr wrap="square">
+            <a:spAutoFit/>
+          </a:bodyPr>
+          <a:lstStyle/>
+          <a:p>
+            <a:pPr algn="r">
+              <a:spcAft>
+                <a:spcPts val="600"/>
+              </a:spcAft>
+            </a:pPr>
+            <a:r>
+              <a:rPr sz="1400" b="1">
+                <a:solidFill>
+                  <a:srgbClr val="35C2C9"/>
+                </a:solidFill>
+                <a:latin typeface="Consolas"/>
+              </a:rPr>
+              <a:t>~$1,278 / mo</a:t>
+            </a:r>
+          </a:p>
+        </p:txBody>
+      </p:sp>
+      <p:sp>
+        <p:nvSpPr>
+          <p:cNvPr id="29" name="TextBox 28"/>
+          <p:cNvSpPr txBox="1"/>
+          <p:nvPr/>
+        </p:nvSpPr>
+        <p:spPr>
+          <a:xfrm>
+            <a:off x="822960" y="6126480"/>
+            <a:ext cx="10515600" cy="457200"/>
+          </a:xfrm>
+          <a:prstGeom prst="rect">
+            <a:avLst/>
+          </a:prstGeom>
+          <a:noFill/>
+        </p:spPr>
+        <p:txBody>
+          <a:bodyPr wrap="square">
+            <a:spAutoFit/>
+          </a:bodyPr>
+          <a:lstStyle/>
+          <a:p>
+            <a:pPr algn="l">
+              <a:spcAft>
+                <a:spcPts val="600"/>
+              </a:spcAft>
+            </a:pPr>
+            <a:r>
+              <a:rPr sz="1300" b="0">
+                <a:solidFill>
+                  <a:srgbClr val="6B8090"/>
+                </a:solidFill>
+                <a:latin typeface="Calibri"/>
+              </a:rPr>
+              <a:t>Development absorbed if built in-house. Process Mining is no longer the $5,000/mo add-on.</a:t>
+            </a:r>
+          </a:p>
+        </p:txBody>
+      </p:sp>
+    </p:spTree>
+  </p:cSld>
+  <p:clrMapOvr>
+    <a:masterClrMapping/>
+  </p:clrMapOvr>
+</p:sld>
+</file>
+
+<file path=ppt/slides/slide13.xml><?xml version="1.0" encoding="utf-8"?>
+<p:sld xmlns:a="http://schemas.openxmlformats.org/drawingml/2006/main" xmlns:p="http://schemas.openxmlformats.org/presentationml/2006/main" xmlns:r="http://schemas.openxmlformats.org/officeDocument/2006/relationships">
+  <p:cSld>
+    <p:bg>
+      <p:bgPr>
+        <a:solidFill>
+          <a:srgbClr val="0B1015"/>
+        </a:solidFill>
+        <a:effectLst/>
+      </p:bgPr>
+    </p:bg>
+    <p:spTree>
+      <p:nvGrpSpPr>
+        <p:cNvPr id="1" name=""/>
+        <p:cNvGrpSpPr/>
+        <p:nvPr/>
+      </p:nvGrpSpPr>
+      <p:grpSpPr/>
+      <p:sp>
+        <p:nvSpPr>
+          <p:cNvPr id="2" name="TextBox 1"/>
+          <p:cNvSpPr txBox="1"/>
+          <p:nvPr/>
+        </p:nvSpPr>
+        <p:spPr>
+          <a:xfrm>
             <a:off x="822960" y="2377440"/>
             <a:ext cx="10515600" cy="914400"/>
           </a:xfrm>
@@ -6048,7 +7962,7 @@
                 </a:solidFill>
                 <a:latin typeface="Consolas"/>
               </a:rPr>
-              <a:t>THE DEPARTMENTS</a:t>
+              <a:t>THE BLUEPRINT</a:t>
             </a:r>
           </a:p>
         </p:txBody>
@@ -6087,7 +8001,7 @@
                 </a:solidFill>
                 <a:latin typeface="Calibri Light"/>
               </a:rPr>
-              <a:t>Every department, one model</a:t>
+              <a:t>The system is designed, not just proposed</a:t>
             </a:r>
           </a:p>
         </p:txBody>
@@ -6100,8 +8014,8 @@
         </p:nvSpPr>
         <p:spPr>
           <a:xfrm>
-            <a:off x="822960" y="1874519"/>
-            <a:ext cx="10515600" cy="640080"/>
+            <a:off x="822960" y="1965960"/>
+            <a:ext cx="10515600" cy="822960"/>
           </a:xfrm>
           <a:prstGeom prst="rect">
             <a:avLst/>
@@ -6120,13 +8034,13 @@
               </a:spcAft>
             </a:pPr>
             <a:r>
-              <a:rPr sz="1600" b="0">
+              <a:rPr sz="1700" b="0">
                 <a:solidFill>
                   <a:srgbClr val="9FB2C0"/>
                 </a:solidFill>
                 <a:latin typeface="Calibri"/>
               </a:rPr>
-              <a:t>Each owns a data domain (its System of Record) and consumes the others in real time.</a:t>
+              <a:t>From diagnosis to a complete data model: 48 tables on Dataverse, a navigable ERD, and a granular code that turns every report into a query.</a:t>
             </a:r>
           </a:p>
         </p:txBody>
@@ -6139,8 +8053,8 @@
         </p:nvSpPr>
         <p:spPr>
           <a:xfrm>
-            <a:off x="822960" y="2651760"/>
-            <a:ext cx="5486400" cy="777240"/>
+            <a:off x="822960" y="2880360"/>
+            <a:ext cx="10515600" cy="658368"/>
           </a:xfrm>
           <a:prstGeom prst="roundRect">
             <a:avLst/>
@@ -6185,8 +8099,8 @@
         </p:nvSpPr>
         <p:spPr>
           <a:xfrm>
-            <a:off x="1005840" y="2734056"/>
-            <a:ext cx="5120640" cy="640080"/>
+            <a:off x="1051560" y="2953512"/>
+            <a:ext cx="10058400" cy="548640"/>
           </a:xfrm>
           <a:prstGeom prst="rect">
             <a:avLst/>
@@ -6205,22 +8119,22 @@
               </a:spcAft>
             </a:pPr>
             <a:r>
-              <a:rPr sz="1450" b="1">
+              <a:rPr sz="1500" b="1">
                 <a:solidFill>
                   <a:srgbClr val="E6EDF3"/>
                 </a:solidFill>
                 <a:latin typeface="Calibri"/>
               </a:rPr>
-              <a:t>PMO  </a:t>
-            </a:r>
-            <a:r>
-              <a:rPr sz="1200">
+              <a:t>48 tables, 10 domains.  </a:t>
+            </a:r>
+            <a:r>
+              <a:rPr sz="1350">
                 <a:solidFill>
                   <a:srgbClr val="9FB2C0"/>
                 </a:solidFill>
                 <a:latin typeface="Calibri"/>
               </a:rPr>
-              <a:t>Project management &amp; client reporting</a:t>
+              <a:t>Identity, AWP, planning, cost &amp; EVM, quality (commissioning L1-L5), MX invoicing, process mining - each with one owner.</a:t>
             </a:r>
           </a:p>
         </p:txBody>
@@ -6233,8 +8147,8 @@
         </p:nvSpPr>
         <p:spPr>
           <a:xfrm>
-            <a:off x="6629400" y="2651760"/>
-            <a:ext cx="5486400" cy="777240"/>
+            <a:off x="822960" y="3657600"/>
+            <a:ext cx="10515600" cy="658368"/>
           </a:xfrm>
           <a:prstGeom prst="roundRect">
             <a:avLst/>
@@ -6279,8 +8193,8 @@
         </p:nvSpPr>
         <p:spPr>
           <a:xfrm>
-            <a:off x="6812280" y="2734056"/>
-            <a:ext cx="5120640" cy="640080"/>
+            <a:off x="1051560" y="3730752"/>
+            <a:ext cx="10058400" cy="548640"/>
           </a:xfrm>
           <a:prstGeom prst="rect">
             <a:avLst/>
@@ -6299,22 +8213,22 @@
               </a:spcAft>
             </a:pPr>
             <a:r>
-              <a:rPr sz="1450" b="1">
+              <a:rPr sz="1500" b="1">
                 <a:solidFill>
                   <a:srgbClr val="E6EDF3"/>
                 </a:solidFill>
                 <a:latin typeface="Calibri"/>
               </a:rPr>
-              <a:t>Cost Management  </a:t>
-            </a:r>
-            <a:r>
-              <a:rPr sz="1200">
+              <a:t>Navigable ERD.  </a:t>
+            </a:r>
+            <a:r>
+              <a:rPr sz="1350">
                 <a:solidFill>
                   <a:srgbClr val="9FB2C0"/>
                 </a:solidFill>
                 <a:latin typeface="Calibri"/>
               </a:rPr>
-              <a:t>Cost, earned value, valuations</a:t>
+              <a:t>The full development map: every table with its data types, primary keys and foreign keys. Interactive and zoomable.</a:t>
             </a:r>
           </a:p>
         </p:txBody>
@@ -6327,8 +8241,8 @@
         </p:nvSpPr>
         <p:spPr>
           <a:xfrm>
-            <a:off x="822960" y="3566160"/>
-            <a:ext cx="5486400" cy="777240"/>
+            <a:off x="822960" y="4434840"/>
+            <a:ext cx="10515600" cy="658368"/>
           </a:xfrm>
           <a:prstGeom prst="roundRect">
             <a:avLst/>
@@ -6373,8 +8287,8 @@
         </p:nvSpPr>
         <p:spPr>
           <a:xfrm>
-            <a:off x="1005840" y="3648456"/>
-            <a:ext cx="5120640" cy="640080"/>
+            <a:off x="1051560" y="4507992"/>
+            <a:ext cx="10058400" cy="548640"/>
           </a:xfrm>
           <a:prstGeom prst="rect">
             <a:avLst/>
@@ -6393,492 +8307,22 @@
               </a:spcAft>
             </a:pPr>
             <a:r>
-              <a:rPr sz="1450" b="1">
+              <a:rPr sz="1500" b="1">
                 <a:solidFill>
                   <a:srgbClr val="E6EDF3"/>
                 </a:solidFill>
                 <a:latin typeface="Calibri"/>
               </a:rPr>
-              <a:t>Planning  </a:t>
-            </a:r>
-            <a:r>
-              <a:rPr sz="1200">
+              <a:t>Granular code.  </a:t>
+            </a:r>
+            <a:r>
+              <a:rPr sz="1350">
                 <a:solidFill>
                   <a:srgbClr val="9FB2C0"/>
                 </a:solidFill>
                 <a:latin typeface="Calibri"/>
               </a:rPr>
-              <a:t>Schedule &amp; AWP work packages</a:t>
-            </a:r>
-          </a:p>
-        </p:txBody>
-      </p:sp>
-      <p:sp>
-        <p:nvSpPr>
-          <p:cNvPr id="11" name="Rounded Rectangle 10"/>
-          <p:cNvSpPr/>
-          <p:nvPr/>
-        </p:nvSpPr>
-        <p:spPr>
-          <a:xfrm>
-            <a:off x="6629400" y="3566160"/>
-            <a:ext cx="5486400" cy="777240"/>
-          </a:xfrm>
-          <a:prstGeom prst="roundRect">
-            <a:avLst/>
-          </a:prstGeom>
-          <a:solidFill>
-            <a:srgbClr val="111A22"/>
-          </a:solidFill>
-          <a:ln w="9525">
-            <a:solidFill>
-              <a:srgbClr val="1F2C37"/>
-            </a:solidFill>
-          </a:ln>
-          <a:effectLst/>
-        </p:spPr>
-        <p:style>
-          <a:lnRef idx="1">
-            <a:schemeClr val="accent1"/>
-          </a:lnRef>
-          <a:fillRef idx="3">
-            <a:schemeClr val="accent1"/>
-          </a:fillRef>
-          <a:effectRef idx="2">
-            <a:schemeClr val="accent1"/>
-          </a:effectRef>
-          <a:fontRef idx="minor">
-            <a:schemeClr val="lt1"/>
-          </a:fontRef>
-        </p:style>
-        <p:txBody>
-          <a:bodyPr rtlCol="0" anchor="ctr"/>
-          <a:lstStyle/>
-          <a:p>
-            <a:pPr algn="ctr"/>
-          </a:p>
-        </p:txBody>
-      </p:sp>
-      <p:sp>
-        <p:nvSpPr>
-          <p:cNvPr id="12" name="TextBox 11"/>
-          <p:cNvSpPr txBox="1"/>
-          <p:nvPr/>
-        </p:nvSpPr>
-        <p:spPr>
-          <a:xfrm>
-            <a:off x="6812280" y="3648456"/>
-            <a:ext cx="5120640" cy="640080"/>
-          </a:xfrm>
-          <a:prstGeom prst="rect">
-            <a:avLst/>
-          </a:prstGeom>
-          <a:noFill/>
-        </p:spPr>
-        <p:txBody>
-          <a:bodyPr wrap="square">
-            <a:spAutoFit/>
-          </a:bodyPr>
-          <a:lstStyle/>
-          <a:p>
-            <a:pPr>
-              <a:spcAft>
-                <a:spcPts val="0"/>
-              </a:spcAft>
-            </a:pPr>
-            <a:r>
-              <a:rPr sz="1450" b="1">
-                <a:solidFill>
-                  <a:srgbClr val="E6EDF3"/>
-                </a:solidFill>
-                <a:latin typeface="Calibri"/>
-              </a:rPr>
-              <a:t>Quality  </a:t>
-            </a:r>
-            <a:r>
-              <a:rPr sz="1200">
-                <a:solidFill>
-                  <a:srgbClr val="9FB2C0"/>
-                </a:solidFill>
-                <a:latin typeface="Calibri"/>
-              </a:rPr>
-              <a:t>NCRs, inspections, checklists</a:t>
-            </a:r>
-          </a:p>
-        </p:txBody>
-      </p:sp>
-      <p:sp>
-        <p:nvSpPr>
-          <p:cNvPr id="13" name="Rounded Rectangle 12"/>
-          <p:cNvSpPr/>
-          <p:nvPr/>
-        </p:nvSpPr>
-        <p:spPr>
-          <a:xfrm>
-            <a:off x="822960" y="4480560"/>
-            <a:ext cx="5486400" cy="777240"/>
-          </a:xfrm>
-          <a:prstGeom prst="roundRect">
-            <a:avLst/>
-          </a:prstGeom>
-          <a:solidFill>
-            <a:srgbClr val="111A22"/>
-          </a:solidFill>
-          <a:ln w="9525">
-            <a:solidFill>
-              <a:srgbClr val="1F2C37"/>
-            </a:solidFill>
-          </a:ln>
-          <a:effectLst/>
-        </p:spPr>
-        <p:style>
-          <a:lnRef idx="1">
-            <a:schemeClr val="accent1"/>
-          </a:lnRef>
-          <a:fillRef idx="3">
-            <a:schemeClr val="accent1"/>
-          </a:fillRef>
-          <a:effectRef idx="2">
-            <a:schemeClr val="accent1"/>
-          </a:effectRef>
-          <a:fontRef idx="minor">
-            <a:schemeClr val="lt1"/>
-          </a:fontRef>
-        </p:style>
-        <p:txBody>
-          <a:bodyPr rtlCol="0" anchor="ctr"/>
-          <a:lstStyle/>
-          <a:p>
-            <a:pPr algn="ctr"/>
-          </a:p>
-        </p:txBody>
-      </p:sp>
-      <p:sp>
-        <p:nvSpPr>
-          <p:cNvPr id="14" name="TextBox 13"/>
-          <p:cNvSpPr txBox="1"/>
-          <p:nvPr/>
-        </p:nvSpPr>
-        <p:spPr>
-          <a:xfrm>
-            <a:off x="1005840" y="4562856"/>
-            <a:ext cx="5120640" cy="640080"/>
-          </a:xfrm>
-          <a:prstGeom prst="rect">
-            <a:avLst/>
-          </a:prstGeom>
-          <a:noFill/>
-        </p:spPr>
-        <p:txBody>
-          <a:bodyPr wrap="square">
-            <a:spAutoFit/>
-          </a:bodyPr>
-          <a:lstStyle/>
-          <a:p>
-            <a:pPr>
-              <a:spcAft>
-                <a:spcPts val="0"/>
-              </a:spcAft>
-            </a:pPr>
-            <a:r>
-              <a:rPr sz="1450" b="1">
-                <a:solidFill>
-                  <a:srgbClr val="E6EDF3"/>
-                </a:solidFill>
-                <a:latin typeface="Calibri"/>
-              </a:rPr>
-              <a:t>MEP  </a:t>
-            </a:r>
-            <a:r>
-              <a:rPr sz="1200">
-                <a:solidFill>
-                  <a:srgbClr val="9FB2C0"/>
-                </a:solidFill>
-                <a:latin typeface="Calibri"/>
-              </a:rPr>
-              <a:t>Physical progress of M/E/P systems</a:t>
-            </a:r>
-          </a:p>
-        </p:txBody>
-      </p:sp>
-      <p:sp>
-        <p:nvSpPr>
-          <p:cNvPr id="15" name="Rounded Rectangle 14"/>
-          <p:cNvSpPr/>
-          <p:nvPr/>
-        </p:nvSpPr>
-        <p:spPr>
-          <a:xfrm>
-            <a:off x="6629400" y="4480560"/>
-            <a:ext cx="5486400" cy="777240"/>
-          </a:xfrm>
-          <a:prstGeom prst="roundRect">
-            <a:avLst/>
-          </a:prstGeom>
-          <a:solidFill>
-            <a:srgbClr val="111A22"/>
-          </a:solidFill>
-          <a:ln w="9525">
-            <a:solidFill>
-              <a:srgbClr val="1F2C37"/>
-            </a:solidFill>
-          </a:ln>
-          <a:effectLst/>
-        </p:spPr>
-        <p:style>
-          <a:lnRef idx="1">
-            <a:schemeClr val="accent1"/>
-          </a:lnRef>
-          <a:fillRef idx="3">
-            <a:schemeClr val="accent1"/>
-          </a:fillRef>
-          <a:effectRef idx="2">
-            <a:schemeClr val="accent1"/>
-          </a:effectRef>
-          <a:fontRef idx="minor">
-            <a:schemeClr val="lt1"/>
-          </a:fontRef>
-        </p:style>
-        <p:txBody>
-          <a:bodyPr rtlCol="0" anchor="ctr"/>
-          <a:lstStyle/>
-          <a:p>
-            <a:pPr algn="ctr"/>
-          </a:p>
-        </p:txBody>
-      </p:sp>
-      <p:sp>
-        <p:nvSpPr>
-          <p:cNvPr id="16" name="TextBox 15"/>
-          <p:cNvSpPr txBox="1"/>
-          <p:nvPr/>
-        </p:nvSpPr>
-        <p:spPr>
-          <a:xfrm>
-            <a:off x="6812280" y="4562856"/>
-            <a:ext cx="5120640" cy="640080"/>
-          </a:xfrm>
-          <a:prstGeom prst="rect">
-            <a:avLst/>
-          </a:prstGeom>
-          <a:noFill/>
-        </p:spPr>
-        <p:txBody>
-          <a:bodyPr wrap="square">
-            <a:spAutoFit/>
-          </a:bodyPr>
-          <a:lstStyle/>
-          <a:p>
-            <a:pPr>
-              <a:spcAft>
-                <a:spcPts val="0"/>
-              </a:spcAft>
-            </a:pPr>
-            <a:r>
-              <a:rPr sz="1450" b="1">
-                <a:solidFill>
-                  <a:srgbClr val="E6EDF3"/>
-                </a:solidFill>
-                <a:latin typeface="Calibri"/>
-              </a:rPr>
-              <a:t>CSA  </a:t>
-            </a:r>
-            <a:r>
-              <a:rPr sz="1200">
-                <a:solidFill>
-                  <a:srgbClr val="9FB2C0"/>
-                </a:solidFill>
-                <a:latin typeface="Calibri"/>
-              </a:rPr>
-              <a:t>Civil, structural, architectural progress</a:t>
-            </a:r>
-          </a:p>
-        </p:txBody>
-      </p:sp>
-      <p:sp>
-        <p:nvSpPr>
-          <p:cNvPr id="17" name="Rounded Rectangle 16"/>
-          <p:cNvSpPr/>
-          <p:nvPr/>
-        </p:nvSpPr>
-        <p:spPr>
-          <a:xfrm>
-            <a:off x="822960" y="5394960"/>
-            <a:ext cx="5486400" cy="777240"/>
-          </a:xfrm>
-          <a:prstGeom prst="roundRect">
-            <a:avLst/>
-          </a:prstGeom>
-          <a:solidFill>
-            <a:srgbClr val="111A22"/>
-          </a:solidFill>
-          <a:ln w="9525">
-            <a:solidFill>
-              <a:srgbClr val="1F2C37"/>
-            </a:solidFill>
-          </a:ln>
-          <a:effectLst/>
-        </p:spPr>
-        <p:style>
-          <a:lnRef idx="1">
-            <a:schemeClr val="accent1"/>
-          </a:lnRef>
-          <a:fillRef idx="3">
-            <a:schemeClr val="accent1"/>
-          </a:fillRef>
-          <a:effectRef idx="2">
-            <a:schemeClr val="accent1"/>
-          </a:effectRef>
-          <a:fontRef idx="minor">
-            <a:schemeClr val="lt1"/>
-          </a:fontRef>
-        </p:style>
-        <p:txBody>
-          <a:bodyPr rtlCol="0" anchor="ctr"/>
-          <a:lstStyle/>
-          <a:p>
-            <a:pPr algn="ctr"/>
-          </a:p>
-        </p:txBody>
-      </p:sp>
-      <p:sp>
-        <p:nvSpPr>
-          <p:cNvPr id="18" name="TextBox 17"/>
-          <p:cNvSpPr txBox="1"/>
-          <p:nvPr/>
-        </p:nvSpPr>
-        <p:spPr>
-          <a:xfrm>
-            <a:off x="1005840" y="5477256"/>
-            <a:ext cx="5120640" cy="640080"/>
-          </a:xfrm>
-          <a:prstGeom prst="rect">
-            <a:avLst/>
-          </a:prstGeom>
-          <a:noFill/>
-        </p:spPr>
-        <p:txBody>
-          <a:bodyPr wrap="square">
-            <a:spAutoFit/>
-          </a:bodyPr>
-          <a:lstStyle/>
-          <a:p>
-            <a:pPr>
-              <a:spcAft>
-                <a:spcPts val="0"/>
-              </a:spcAft>
-            </a:pPr>
-            <a:r>
-              <a:rPr sz="1450" b="1">
-                <a:solidFill>
-                  <a:srgbClr val="E6EDF3"/>
-                </a:solidFill>
-                <a:latin typeface="Calibri"/>
-              </a:rPr>
-              <a:t>Document Control  </a:t>
-            </a:r>
-            <a:r>
-              <a:rPr sz="1200">
-                <a:solidFill>
-                  <a:srgbClr val="9FB2C0"/>
-                </a:solidFill>
-                <a:latin typeface="Calibri"/>
-              </a:rPr>
-              <a:t>Documents, versions, RFIs, lineage</a:t>
-            </a:r>
-          </a:p>
-        </p:txBody>
-      </p:sp>
-      <p:sp>
-        <p:nvSpPr>
-          <p:cNvPr id="19" name="Rounded Rectangle 18"/>
-          <p:cNvSpPr/>
-          <p:nvPr/>
-        </p:nvSpPr>
-        <p:spPr>
-          <a:xfrm>
-            <a:off x="6629400" y="5394960"/>
-            <a:ext cx="5486400" cy="777240"/>
-          </a:xfrm>
-          <a:prstGeom prst="roundRect">
-            <a:avLst/>
-          </a:prstGeom>
-          <a:solidFill>
-            <a:srgbClr val="111A22"/>
-          </a:solidFill>
-          <a:ln w="9525">
-            <a:solidFill>
-              <a:srgbClr val="E8A13A"/>
-            </a:solidFill>
-          </a:ln>
-          <a:effectLst/>
-        </p:spPr>
-        <p:style>
-          <a:lnRef idx="1">
-            <a:schemeClr val="accent1"/>
-          </a:lnRef>
-          <a:fillRef idx="3">
-            <a:schemeClr val="accent1"/>
-          </a:fillRef>
-          <a:effectRef idx="2">
-            <a:schemeClr val="accent1"/>
-          </a:effectRef>
-          <a:fontRef idx="minor">
-            <a:schemeClr val="lt1"/>
-          </a:fontRef>
-        </p:style>
-        <p:txBody>
-          <a:bodyPr rtlCol="0" anchor="ctr"/>
-          <a:lstStyle/>
-          <a:p>
-            <a:pPr algn="ctr"/>
-          </a:p>
-        </p:txBody>
-      </p:sp>
-      <p:sp>
-        <p:nvSpPr>
-          <p:cNvPr id="20" name="TextBox 19"/>
-          <p:cNvSpPr txBox="1"/>
-          <p:nvPr/>
-        </p:nvSpPr>
-        <p:spPr>
-          <a:xfrm>
-            <a:off x="6812280" y="5477256"/>
-            <a:ext cx="5120640" cy="640080"/>
-          </a:xfrm>
-          <a:prstGeom prst="rect">
-            <a:avLst/>
-          </a:prstGeom>
-          <a:noFill/>
-        </p:spPr>
-        <p:txBody>
-          <a:bodyPr wrap="square">
-            <a:spAutoFit/>
-          </a:bodyPr>
-          <a:lstStyle/>
-          <a:p>
-            <a:pPr>
-              <a:spcAft>
-                <a:spcPts val="0"/>
-              </a:spcAft>
-            </a:pPr>
-            <a:r>
-              <a:rPr sz="1450" b="1">
-                <a:solidFill>
-                  <a:srgbClr val="E8A13A"/>
-                </a:solidFill>
-                <a:latin typeface="Calibri"/>
-              </a:rPr>
-              <a:t>General Contractors  </a:t>
-            </a:r>
-            <a:r>
-              <a:rPr sz="1200">
-                <a:solidFill>
-                  <a:srgbClr val="9FB2C0"/>
-                </a:solidFill>
-                <a:latin typeface="Calibri"/>
-              </a:rPr>
-              <a:t>External — estimates &amp; invoices via portal</a:t>
+              <a:t>OBDMX-task-line: progress, cost and quality hang off the lowest measurable unit, so any report is generated, not rebuilt by hand.</a:t>
             </a:r>
           </a:p>
         </p:txBody>
@@ -6943,7 +8387,7 @@
                 </a:solidFill>
                 <a:latin typeface="Consolas"/>
               </a:rPr>
-              <a:t>THE 40 / 25 / 80 PROBLEM</a:t>
+              <a:t>THE DEPARTMENTS</a:t>
             </a:r>
           </a:p>
         </p:txBody>
@@ -6982,7 +8426,7 @@
                 </a:solidFill>
                 <a:latin typeface="Calibri Light"/>
               </a:rPr>
-              <a:t>Two truths, both labeled</a:t>
+              <a:t>Every department, one model</a:t>
             </a:r>
           </a:p>
         </p:txBody>
@@ -6996,7 +8440,7 @@
         <p:spPr>
           <a:xfrm>
             <a:off x="822960" y="1874519"/>
-            <a:ext cx="10515600" cy="822960"/>
+            <a:ext cx="10515600" cy="640080"/>
           </a:xfrm>
           <a:prstGeom prst="rect">
             <a:avLst/>
@@ -7021,7 +8465,7 @@
                 </a:solidFill>
                 <a:latin typeface="Calibri"/>
               </a:rPr>
-              <a:t>The GC reports 40%, site 25%, cost 80%. They don't lie — they measure different dimensions and no one labels them.</a:t>
+              <a:t>Each owns a data domain (its System of Record) and consumes the others in real time.</a:t>
             </a:r>
           </a:p>
         </p:txBody>
@@ -7034,8 +8478,8 @@
         </p:nvSpPr>
         <p:spPr>
           <a:xfrm>
-            <a:off x="822960" y="2926080"/>
-            <a:ext cx="5212080" cy="2011680"/>
+            <a:off x="822960" y="2651760"/>
+            <a:ext cx="5486400" cy="777240"/>
           </a:xfrm>
           <a:prstGeom prst="roundRect">
             <a:avLst/>
@@ -7080,8 +8524,8 @@
         </p:nvSpPr>
         <p:spPr>
           <a:xfrm>
-            <a:off x="1097280" y="3154680"/>
-            <a:ext cx="4663440" cy="1645920"/>
+            <a:off x="1005840" y="2734056"/>
+            <a:ext cx="5120640" cy="640080"/>
           </a:xfrm>
           <a:prstGeom prst="rect">
             <a:avLst/>
@@ -7094,35 +8538,28 @@
           </a:bodyPr>
           <a:lstStyle/>
           <a:p>
-            <a:pPr algn="l">
-              <a:spcAft>
-                <a:spcPts val="600"/>
-              </a:spcAft>
-            </a:pPr>
-            <a:r>
-              <a:rPr sz="1600" b="1">
-                <a:solidFill>
-                  <a:srgbClr val="4FBF8B"/>
-                </a:solidFill>
-                <a:latin typeface="Consolas"/>
-              </a:rPr>
-              <a:t>PHYSICAL</a:t>
-            </a:r>
-          </a:p>
-          <a:p>
-            <a:pPr algn="l">
-              <a:spcAft>
-                <a:spcPts val="600"/>
-              </a:spcAft>
-            </a:pPr>
-            <a:r>
-              <a:rPr sz="1400" b="0">
+            <a:pPr>
+              <a:spcAft>
+                <a:spcPts val="0"/>
+              </a:spcAft>
+            </a:pPr>
+            <a:r>
+              <a:rPr sz="1450" b="1">
+                <a:solidFill>
+                  <a:srgbClr val="E6EDF3"/>
+                </a:solidFill>
+                <a:latin typeface="Calibri"/>
+              </a:rPr>
+              <a:t>PMO  </a:t>
+            </a:r>
+            <a:r>
+              <a:rPr sz="1200">
                 <a:solidFill>
                   <a:srgbClr val="9FB2C0"/>
                 </a:solidFill>
                 <a:latin typeface="Calibri"/>
               </a:rPr>
-              <a:t>Work-in-place, verified. Credited by the field (MEP/CSA), and only when the package meets its AWP rule: installed, not estimated.</a:t>
+              <a:t>Project management &amp; client reporting</a:t>
             </a:r>
           </a:p>
         </p:txBody>
@@ -7135,8 +8572,8 @@
         </p:nvSpPr>
         <p:spPr>
           <a:xfrm>
-            <a:off x="6309360" y="2926080"/>
-            <a:ext cx="5029200" cy="2011680"/>
+            <a:off x="6629400" y="2651760"/>
+            <a:ext cx="5486400" cy="777240"/>
           </a:xfrm>
           <a:prstGeom prst="roundRect">
             <a:avLst/>
@@ -7181,8 +8618,8 @@
         </p:nvSpPr>
         <p:spPr>
           <a:xfrm>
-            <a:off x="6583680" y="3154680"/>
-            <a:ext cx="4480560" cy="1645920"/>
+            <a:off x="6812280" y="2734056"/>
+            <a:ext cx="5120640" cy="640080"/>
           </a:xfrm>
           <a:prstGeom prst="rect">
             <a:avLst/>
@@ -7195,49 +8632,88 @@
           </a:bodyPr>
           <a:lstStyle/>
           <a:p>
-            <a:pPr algn="l">
-              <a:spcAft>
-                <a:spcPts val="600"/>
-              </a:spcAft>
-            </a:pPr>
-            <a:r>
-              <a:rPr sz="1600" b="1">
-                <a:solidFill>
-                  <a:srgbClr val="E8A13A"/>
-                </a:solidFill>
-                <a:latin typeface="Consolas"/>
-              </a:rPr>
-              <a:t>FINANCIAL</a:t>
-            </a:r>
-          </a:p>
-          <a:p>
-            <a:pPr algn="l">
-              <a:spcAft>
-                <a:spcPts val="600"/>
-              </a:spcAft>
-            </a:pPr>
-            <a:r>
-              <a:rPr sz="1400" b="0">
+            <a:pPr>
+              <a:spcAft>
+                <a:spcPts val="0"/>
+              </a:spcAft>
+            </a:pPr>
+            <a:r>
+              <a:rPr sz="1450" b="1">
+                <a:solidFill>
+                  <a:srgbClr val="E6EDF3"/>
+                </a:solidFill>
+                <a:latin typeface="Calibri"/>
+              </a:rPr>
+              <a:t>Cost Management  </a:t>
+            </a:r>
+            <a:r>
+              <a:rPr sz="1200">
                 <a:solidFill>
                   <a:srgbClr val="9FB2C0"/>
                 </a:solidFill>
                 <a:latin typeface="Calibri"/>
               </a:rPr>
-              <a:t>Earned value / cost. Credited by Cost Management on its own basis, without pretending it is physical progress.</a:t>
-            </a:r>
-          </a:p>
-        </p:txBody>
-      </p:sp>
-      <p:sp>
-        <p:nvSpPr>
-          <p:cNvPr id="9" name="TextBox 8"/>
+              <a:t>Cost, earned value, valuations</a:t>
+            </a:r>
+          </a:p>
+        </p:txBody>
+      </p:sp>
+      <p:sp>
+        <p:nvSpPr>
+          <p:cNvPr id="9" name="Rounded Rectangle 8"/>
+          <p:cNvSpPr/>
+          <p:nvPr/>
+        </p:nvSpPr>
+        <p:spPr>
+          <a:xfrm>
+            <a:off x="822960" y="3566160"/>
+            <a:ext cx="5486400" cy="777240"/>
+          </a:xfrm>
+          <a:prstGeom prst="roundRect">
+            <a:avLst/>
+          </a:prstGeom>
+          <a:solidFill>
+            <a:srgbClr val="111A22"/>
+          </a:solidFill>
+          <a:ln w="9525">
+            <a:solidFill>
+              <a:srgbClr val="1F2C37"/>
+            </a:solidFill>
+          </a:ln>
+          <a:effectLst/>
+        </p:spPr>
+        <p:style>
+          <a:lnRef idx="1">
+            <a:schemeClr val="accent1"/>
+          </a:lnRef>
+          <a:fillRef idx="3">
+            <a:schemeClr val="accent1"/>
+          </a:fillRef>
+          <a:effectRef idx="2">
+            <a:schemeClr val="accent1"/>
+          </a:effectRef>
+          <a:fontRef idx="minor">
+            <a:schemeClr val="lt1"/>
+          </a:fontRef>
+        </p:style>
+        <p:txBody>
+          <a:bodyPr rtlCol="0" anchor="ctr"/>
+          <a:lstStyle/>
+          <a:p>
+            <a:pPr algn="ctr"/>
+          </a:p>
+        </p:txBody>
+      </p:sp>
+      <p:sp>
+        <p:nvSpPr>
+          <p:cNvPr id="10" name="TextBox 9"/>
           <p:cNvSpPr txBox="1"/>
           <p:nvPr/>
         </p:nvSpPr>
         <p:spPr>
           <a:xfrm>
-            <a:off x="822960" y="5212080"/>
-            <a:ext cx="10515600" cy="914400"/>
+            <a:off x="1005840" y="3648456"/>
+            <a:ext cx="5120640" cy="640080"/>
           </a:xfrm>
           <a:prstGeom prst="rect">
             <a:avLst/>
@@ -7250,19 +8726,498 @@
           </a:bodyPr>
           <a:lstStyle/>
           <a:p>
-            <a:pPr algn="l">
-              <a:spcAft>
-                <a:spcPts val="600"/>
-              </a:spcAft>
-            </a:pPr>
-            <a:r>
-              <a:rPr sz="1500" b="0">
+            <a:pPr>
+              <a:spcAft>
+                <a:spcPts val="0"/>
+              </a:spcAft>
+            </a:pPr>
+            <a:r>
+              <a:rPr sz="1450" b="1">
+                <a:solidFill>
+                  <a:srgbClr val="E6EDF3"/>
+                </a:solidFill>
+                <a:latin typeface="Calibri"/>
+              </a:rPr>
+              <a:t>Planning  </a:t>
+            </a:r>
+            <a:r>
+              <a:rPr sz="1200">
                 <a:solidFill>
                   <a:srgbClr val="9FB2C0"/>
                 </a:solidFill>
                 <a:latin typeface="Calibri"/>
               </a:rPr>
-              <a:t>Each number carries its label and its owner. When financial runs ahead of physical, the system flags the discrepancy — the missing validation of who is closest to reality.</a:t>
+              <a:t>Schedule &amp; AWP work packages</a:t>
+            </a:r>
+          </a:p>
+        </p:txBody>
+      </p:sp>
+      <p:sp>
+        <p:nvSpPr>
+          <p:cNvPr id="11" name="Rounded Rectangle 10"/>
+          <p:cNvSpPr/>
+          <p:nvPr/>
+        </p:nvSpPr>
+        <p:spPr>
+          <a:xfrm>
+            <a:off x="6629400" y="3566160"/>
+            <a:ext cx="5486400" cy="777240"/>
+          </a:xfrm>
+          <a:prstGeom prst="roundRect">
+            <a:avLst/>
+          </a:prstGeom>
+          <a:solidFill>
+            <a:srgbClr val="111A22"/>
+          </a:solidFill>
+          <a:ln w="9525">
+            <a:solidFill>
+              <a:srgbClr val="1F2C37"/>
+            </a:solidFill>
+          </a:ln>
+          <a:effectLst/>
+        </p:spPr>
+        <p:style>
+          <a:lnRef idx="1">
+            <a:schemeClr val="accent1"/>
+          </a:lnRef>
+          <a:fillRef idx="3">
+            <a:schemeClr val="accent1"/>
+          </a:fillRef>
+          <a:effectRef idx="2">
+            <a:schemeClr val="accent1"/>
+          </a:effectRef>
+          <a:fontRef idx="minor">
+            <a:schemeClr val="lt1"/>
+          </a:fontRef>
+        </p:style>
+        <p:txBody>
+          <a:bodyPr rtlCol="0" anchor="ctr"/>
+          <a:lstStyle/>
+          <a:p>
+            <a:pPr algn="ctr"/>
+          </a:p>
+        </p:txBody>
+      </p:sp>
+      <p:sp>
+        <p:nvSpPr>
+          <p:cNvPr id="12" name="TextBox 11"/>
+          <p:cNvSpPr txBox="1"/>
+          <p:nvPr/>
+        </p:nvSpPr>
+        <p:spPr>
+          <a:xfrm>
+            <a:off x="6812280" y="3648456"/>
+            <a:ext cx="5120640" cy="640080"/>
+          </a:xfrm>
+          <a:prstGeom prst="rect">
+            <a:avLst/>
+          </a:prstGeom>
+          <a:noFill/>
+        </p:spPr>
+        <p:txBody>
+          <a:bodyPr wrap="square">
+            <a:spAutoFit/>
+          </a:bodyPr>
+          <a:lstStyle/>
+          <a:p>
+            <a:pPr>
+              <a:spcAft>
+                <a:spcPts val="0"/>
+              </a:spcAft>
+            </a:pPr>
+            <a:r>
+              <a:rPr sz="1450" b="1">
+                <a:solidFill>
+                  <a:srgbClr val="E6EDF3"/>
+                </a:solidFill>
+                <a:latin typeface="Calibri"/>
+              </a:rPr>
+              <a:t>Quality  </a:t>
+            </a:r>
+            <a:r>
+              <a:rPr sz="1200">
+                <a:solidFill>
+                  <a:srgbClr val="9FB2C0"/>
+                </a:solidFill>
+                <a:latin typeface="Calibri"/>
+              </a:rPr>
+              <a:t>NCRs, inspections, checklists</a:t>
+            </a:r>
+          </a:p>
+        </p:txBody>
+      </p:sp>
+      <p:sp>
+        <p:nvSpPr>
+          <p:cNvPr id="13" name="Rounded Rectangle 12"/>
+          <p:cNvSpPr/>
+          <p:nvPr/>
+        </p:nvSpPr>
+        <p:spPr>
+          <a:xfrm>
+            <a:off x="822960" y="4480560"/>
+            <a:ext cx="5486400" cy="777240"/>
+          </a:xfrm>
+          <a:prstGeom prst="roundRect">
+            <a:avLst/>
+          </a:prstGeom>
+          <a:solidFill>
+            <a:srgbClr val="111A22"/>
+          </a:solidFill>
+          <a:ln w="9525">
+            <a:solidFill>
+              <a:srgbClr val="1F2C37"/>
+            </a:solidFill>
+          </a:ln>
+          <a:effectLst/>
+        </p:spPr>
+        <p:style>
+          <a:lnRef idx="1">
+            <a:schemeClr val="accent1"/>
+          </a:lnRef>
+          <a:fillRef idx="3">
+            <a:schemeClr val="accent1"/>
+          </a:fillRef>
+          <a:effectRef idx="2">
+            <a:schemeClr val="accent1"/>
+          </a:effectRef>
+          <a:fontRef idx="minor">
+            <a:schemeClr val="lt1"/>
+          </a:fontRef>
+        </p:style>
+        <p:txBody>
+          <a:bodyPr rtlCol="0" anchor="ctr"/>
+          <a:lstStyle/>
+          <a:p>
+            <a:pPr algn="ctr"/>
+          </a:p>
+        </p:txBody>
+      </p:sp>
+      <p:sp>
+        <p:nvSpPr>
+          <p:cNvPr id="14" name="TextBox 13"/>
+          <p:cNvSpPr txBox="1"/>
+          <p:nvPr/>
+        </p:nvSpPr>
+        <p:spPr>
+          <a:xfrm>
+            <a:off x="1005840" y="4562856"/>
+            <a:ext cx="5120640" cy="640080"/>
+          </a:xfrm>
+          <a:prstGeom prst="rect">
+            <a:avLst/>
+          </a:prstGeom>
+          <a:noFill/>
+        </p:spPr>
+        <p:txBody>
+          <a:bodyPr wrap="square">
+            <a:spAutoFit/>
+          </a:bodyPr>
+          <a:lstStyle/>
+          <a:p>
+            <a:pPr>
+              <a:spcAft>
+                <a:spcPts val="0"/>
+              </a:spcAft>
+            </a:pPr>
+            <a:r>
+              <a:rPr sz="1450" b="1">
+                <a:solidFill>
+                  <a:srgbClr val="E6EDF3"/>
+                </a:solidFill>
+                <a:latin typeface="Calibri"/>
+              </a:rPr>
+              <a:t>MEP  </a:t>
+            </a:r>
+            <a:r>
+              <a:rPr sz="1200">
+                <a:solidFill>
+                  <a:srgbClr val="9FB2C0"/>
+                </a:solidFill>
+                <a:latin typeface="Calibri"/>
+              </a:rPr>
+              <a:t>Physical progress of M/E/P systems</a:t>
+            </a:r>
+          </a:p>
+        </p:txBody>
+      </p:sp>
+      <p:sp>
+        <p:nvSpPr>
+          <p:cNvPr id="15" name="Rounded Rectangle 14"/>
+          <p:cNvSpPr/>
+          <p:nvPr/>
+        </p:nvSpPr>
+        <p:spPr>
+          <a:xfrm>
+            <a:off x="6629400" y="4480560"/>
+            <a:ext cx="5486400" cy="777240"/>
+          </a:xfrm>
+          <a:prstGeom prst="roundRect">
+            <a:avLst/>
+          </a:prstGeom>
+          <a:solidFill>
+            <a:srgbClr val="111A22"/>
+          </a:solidFill>
+          <a:ln w="9525">
+            <a:solidFill>
+              <a:srgbClr val="1F2C37"/>
+            </a:solidFill>
+          </a:ln>
+          <a:effectLst/>
+        </p:spPr>
+        <p:style>
+          <a:lnRef idx="1">
+            <a:schemeClr val="accent1"/>
+          </a:lnRef>
+          <a:fillRef idx="3">
+            <a:schemeClr val="accent1"/>
+          </a:fillRef>
+          <a:effectRef idx="2">
+            <a:schemeClr val="accent1"/>
+          </a:effectRef>
+          <a:fontRef idx="minor">
+            <a:schemeClr val="lt1"/>
+          </a:fontRef>
+        </p:style>
+        <p:txBody>
+          <a:bodyPr rtlCol="0" anchor="ctr"/>
+          <a:lstStyle/>
+          <a:p>
+            <a:pPr algn="ctr"/>
+          </a:p>
+        </p:txBody>
+      </p:sp>
+      <p:sp>
+        <p:nvSpPr>
+          <p:cNvPr id="16" name="TextBox 15"/>
+          <p:cNvSpPr txBox="1"/>
+          <p:nvPr/>
+        </p:nvSpPr>
+        <p:spPr>
+          <a:xfrm>
+            <a:off x="6812280" y="4562856"/>
+            <a:ext cx="5120640" cy="640080"/>
+          </a:xfrm>
+          <a:prstGeom prst="rect">
+            <a:avLst/>
+          </a:prstGeom>
+          <a:noFill/>
+        </p:spPr>
+        <p:txBody>
+          <a:bodyPr wrap="square">
+            <a:spAutoFit/>
+          </a:bodyPr>
+          <a:lstStyle/>
+          <a:p>
+            <a:pPr>
+              <a:spcAft>
+                <a:spcPts val="0"/>
+              </a:spcAft>
+            </a:pPr>
+            <a:r>
+              <a:rPr sz="1450" b="1">
+                <a:solidFill>
+                  <a:srgbClr val="E6EDF3"/>
+                </a:solidFill>
+                <a:latin typeface="Calibri"/>
+              </a:rPr>
+              <a:t>CSA  </a:t>
+            </a:r>
+            <a:r>
+              <a:rPr sz="1200">
+                <a:solidFill>
+                  <a:srgbClr val="9FB2C0"/>
+                </a:solidFill>
+                <a:latin typeface="Calibri"/>
+              </a:rPr>
+              <a:t>Civil, structural, architectural progress</a:t>
+            </a:r>
+          </a:p>
+        </p:txBody>
+      </p:sp>
+      <p:sp>
+        <p:nvSpPr>
+          <p:cNvPr id="17" name="Rounded Rectangle 16"/>
+          <p:cNvSpPr/>
+          <p:nvPr/>
+        </p:nvSpPr>
+        <p:spPr>
+          <a:xfrm>
+            <a:off x="822960" y="5394960"/>
+            <a:ext cx="5486400" cy="777240"/>
+          </a:xfrm>
+          <a:prstGeom prst="roundRect">
+            <a:avLst/>
+          </a:prstGeom>
+          <a:solidFill>
+            <a:srgbClr val="111A22"/>
+          </a:solidFill>
+          <a:ln w="9525">
+            <a:solidFill>
+              <a:srgbClr val="1F2C37"/>
+            </a:solidFill>
+          </a:ln>
+          <a:effectLst/>
+        </p:spPr>
+        <p:style>
+          <a:lnRef idx="1">
+            <a:schemeClr val="accent1"/>
+          </a:lnRef>
+          <a:fillRef idx="3">
+            <a:schemeClr val="accent1"/>
+          </a:fillRef>
+          <a:effectRef idx="2">
+            <a:schemeClr val="accent1"/>
+          </a:effectRef>
+          <a:fontRef idx="minor">
+            <a:schemeClr val="lt1"/>
+          </a:fontRef>
+        </p:style>
+        <p:txBody>
+          <a:bodyPr rtlCol="0" anchor="ctr"/>
+          <a:lstStyle/>
+          <a:p>
+            <a:pPr algn="ctr"/>
+          </a:p>
+        </p:txBody>
+      </p:sp>
+      <p:sp>
+        <p:nvSpPr>
+          <p:cNvPr id="18" name="TextBox 17"/>
+          <p:cNvSpPr txBox="1"/>
+          <p:nvPr/>
+        </p:nvSpPr>
+        <p:spPr>
+          <a:xfrm>
+            <a:off x="1005840" y="5477256"/>
+            <a:ext cx="5120640" cy="640080"/>
+          </a:xfrm>
+          <a:prstGeom prst="rect">
+            <a:avLst/>
+          </a:prstGeom>
+          <a:noFill/>
+        </p:spPr>
+        <p:txBody>
+          <a:bodyPr wrap="square">
+            <a:spAutoFit/>
+          </a:bodyPr>
+          <a:lstStyle/>
+          <a:p>
+            <a:pPr>
+              <a:spcAft>
+                <a:spcPts val="0"/>
+              </a:spcAft>
+            </a:pPr>
+            <a:r>
+              <a:rPr sz="1450" b="1">
+                <a:solidFill>
+                  <a:srgbClr val="E6EDF3"/>
+                </a:solidFill>
+                <a:latin typeface="Calibri"/>
+              </a:rPr>
+              <a:t>Document Control  </a:t>
+            </a:r>
+            <a:r>
+              <a:rPr sz="1200">
+                <a:solidFill>
+                  <a:srgbClr val="9FB2C0"/>
+                </a:solidFill>
+                <a:latin typeface="Calibri"/>
+              </a:rPr>
+              <a:t>Documents, versions, RFIs, lineage</a:t>
+            </a:r>
+          </a:p>
+        </p:txBody>
+      </p:sp>
+      <p:sp>
+        <p:nvSpPr>
+          <p:cNvPr id="19" name="Rounded Rectangle 18"/>
+          <p:cNvSpPr/>
+          <p:nvPr/>
+        </p:nvSpPr>
+        <p:spPr>
+          <a:xfrm>
+            <a:off x="6629400" y="5394960"/>
+            <a:ext cx="5486400" cy="777240"/>
+          </a:xfrm>
+          <a:prstGeom prst="roundRect">
+            <a:avLst/>
+          </a:prstGeom>
+          <a:solidFill>
+            <a:srgbClr val="111A22"/>
+          </a:solidFill>
+          <a:ln w="9525">
+            <a:solidFill>
+              <a:srgbClr val="E8A13A"/>
+            </a:solidFill>
+          </a:ln>
+          <a:effectLst/>
+        </p:spPr>
+        <p:style>
+          <a:lnRef idx="1">
+            <a:schemeClr val="accent1"/>
+          </a:lnRef>
+          <a:fillRef idx="3">
+            <a:schemeClr val="accent1"/>
+          </a:fillRef>
+          <a:effectRef idx="2">
+            <a:schemeClr val="accent1"/>
+          </a:effectRef>
+          <a:fontRef idx="minor">
+            <a:schemeClr val="lt1"/>
+          </a:fontRef>
+        </p:style>
+        <p:txBody>
+          <a:bodyPr rtlCol="0" anchor="ctr"/>
+          <a:lstStyle/>
+          <a:p>
+            <a:pPr algn="ctr"/>
+          </a:p>
+        </p:txBody>
+      </p:sp>
+      <p:sp>
+        <p:nvSpPr>
+          <p:cNvPr id="20" name="TextBox 19"/>
+          <p:cNvSpPr txBox="1"/>
+          <p:nvPr/>
+        </p:nvSpPr>
+        <p:spPr>
+          <a:xfrm>
+            <a:off x="6812280" y="5477256"/>
+            <a:ext cx="5120640" cy="640080"/>
+          </a:xfrm>
+          <a:prstGeom prst="rect">
+            <a:avLst/>
+          </a:prstGeom>
+          <a:noFill/>
+        </p:spPr>
+        <p:txBody>
+          <a:bodyPr wrap="square">
+            <a:spAutoFit/>
+          </a:bodyPr>
+          <a:lstStyle/>
+          <a:p>
+            <a:pPr>
+              <a:spcAft>
+                <a:spcPts val="0"/>
+              </a:spcAft>
+            </a:pPr>
+            <a:r>
+              <a:rPr sz="1450" b="1">
+                <a:solidFill>
+                  <a:srgbClr val="E8A13A"/>
+                </a:solidFill>
+                <a:latin typeface="Calibri"/>
+              </a:rPr>
+              <a:t>General Contractors  </a:t>
+            </a:r>
+            <a:r>
+              <a:rPr sz="1200">
+                <a:solidFill>
+                  <a:srgbClr val="9FB2C0"/>
+                </a:solidFill>
+                <a:latin typeface="Calibri"/>
+              </a:rPr>
+              <a:t>External — estimates &amp; invoices via portal</a:t>
             </a:r>
           </a:p>
         </p:txBody>
@@ -7327,7 +9282,7 @@
                 </a:solidFill>
                 <a:latin typeface="Consolas"/>
               </a:rPr>
-              <a:t>EXTERNAL PARTNERS</a:t>
+              <a:t>DATA READINESS</a:t>
             </a:r>
           </a:p>
         </p:txBody>
@@ -7366,7 +9321,7 @@
                 </a:solidFill>
                 <a:latin typeface="Calibri Light"/>
               </a:rPr>
-              <a:t>General Contractors, without the chaos</a:t>
+              <a:t>We ask each area what it can give</a:t>
             </a:r>
           </a:p>
         </p:txBody>
@@ -7405,7 +9360,7 @@
                 </a:solidFill>
                 <a:latin typeface="Calibri"/>
               </a:rPr>
-              <a:t>GCs stay outside the tenant, but their progress and money enter the same model — coded, traceable, and validated against reality.</a:t>
+              <a:t>Before building, one instrument per department - in plain construction language - to learn, field by field, what data each area can populate today.</a:t>
             </a:r>
           </a:p>
         </p:txBody>
@@ -7490,7 +9445,7 @@
                 </a:solidFill>
                 <a:latin typeface="Calibri"/>
               </a:rPr>
-              <a:t>Estimates portal.  </a:t>
+              <a:t>8 printable forms.  </a:t>
             </a:r>
             <a:r>
               <a:rPr sz="1350">
@@ -7499,7 +9454,7 @@
                 </a:solidFill>
                 <a:latin typeface="Calibri"/>
               </a:rPr>
-              <a:t>A Power Pages form where the GC submits progress by front/package — tagged by dimension and owner.</a:t>
+              <a:t>One per department (PMO, Cost, Planning, Quality, MEP, CSA, Doc Control, GCs). No jargon, no table names.</a:t>
             </a:r>
           </a:p>
         </p:txBody>
@@ -7584,7 +9539,7 @@
                 </a:solidFill>
                 <a:latin typeface="Calibri"/>
               </a:rPr>
-              <a:t>Invoice upload.  </a:t>
+              <a:t>Field by field.  </a:t>
             </a:r>
             <a:r>
               <a:rPr sz="1350">
@@ -7593,7 +9548,7 @@
                 </a:solidFill>
                 <a:latin typeface="Calibri"/>
               </a:rPr>
-              <a:t>The GC uploads its CFDI (PDF/XML); a flow reads it, links it to the estimate and package, and routes it to Cost approval.</a:t>
+              <a:t>Each data point with its format, marked: we have it / can get it / not possible / to review.</a:t>
             </a:r>
           </a:p>
         </p:txBody>
@@ -7678,7 +9633,7 @@
                 </a:solidFill>
                 <a:latin typeface="Calibri"/>
               </a:rPr>
-              <a:t>Reconciled, not trusted.  </a:t>
+              <a:t>Print, fill, scan, return.  </a:t>
             </a:r>
             <a:r>
               <a:rPr sz="1350">
@@ -7687,7 +9642,7 @@
                 </a:solidFill>
                 <a:latin typeface="Calibri"/>
               </a:rPr>
-              <a:t>Their 40% is reconciled against the field's physical progress instead of accepted blindly.</a:t>
+              <a:t>The result tells us what can start day one, what to build, and what is out of reach with today's information.</a:t>
             </a:r>
           </a:p>
         </p:txBody>
@@ -7752,7 +9707,7 @@
                 </a:solidFill>
                 <a:latin typeface="Consolas"/>
               </a:rPr>
-              <a:t>BUILT ON MICROSOFT</a:t>
+              <a:t>THE 40 / 25 / 80 PROBLEM</a:t>
             </a:r>
           </a:p>
         </p:txBody>
@@ -7791,7 +9746,7 @@
                 </a:solidFill>
                 <a:latin typeface="Calibri Light"/>
               </a:rPr>
-              <a:t>100% Power Platform, in the client tenant</a:t>
+              <a:t>Two truths, both labeled</a:t>
             </a:r>
           </a:p>
         </p:txBody>
@@ -7805,7 +9760,7 @@
         <p:spPr>
           <a:xfrm>
             <a:off x="822960" y="1874519"/>
-            <a:ext cx="10515600" cy="640080"/>
+            <a:ext cx="10515600" cy="822960"/>
           </a:xfrm>
           <a:prstGeom prst="rect">
             <a:avLst/>
@@ -7830,7 +9785,7 @@
                 </a:solidFill>
                 <a:latin typeface="Calibri"/>
               </a:rPr>
-              <a:t>One reversible solution. No new tools to learn outside the ecosystem they already use.</a:t>
+              <a:t>The GC reports 40%, site 25%, cost 80%. They don't lie — they measure different dimensions and no one labels them.</a:t>
             </a:r>
           </a:p>
         </p:txBody>
@@ -7843,8 +9798,8 @@
         </p:nvSpPr>
         <p:spPr>
           <a:xfrm>
-            <a:off x="822960" y="2834640"/>
-            <a:ext cx="2121408" cy="1737360"/>
+            <a:off x="822960" y="2926080"/>
+            <a:ext cx="5212080" cy="2011680"/>
           </a:xfrm>
           <a:prstGeom prst="roundRect">
             <a:avLst/>
@@ -7889,8 +9844,8 @@
         </p:nvSpPr>
         <p:spPr>
           <a:xfrm>
-            <a:off x="960120" y="3063240"/>
-            <a:ext cx="1847088" cy="1371600"/>
+            <a:off x="1097280" y="3154680"/>
+            <a:ext cx="4663440" cy="1645920"/>
           </a:xfrm>
           <a:prstGeom prst="rect">
             <a:avLst/>
@@ -7905,33 +9860,33 @@
           <a:p>
             <a:pPr algn="l">
               <a:spcAft>
-                <a:spcPts val="400"/>
-              </a:spcAft>
-            </a:pPr>
-            <a:r>
-              <a:rPr sz="1500" b="1">
-                <a:solidFill>
-                  <a:srgbClr val="35C2C9"/>
+                <a:spcPts val="600"/>
+              </a:spcAft>
+            </a:pPr>
+            <a:r>
+              <a:rPr sz="1600" b="1">
+                <a:solidFill>
+                  <a:srgbClr val="4FBF8B"/>
+                </a:solidFill>
+                <a:latin typeface="Consolas"/>
+              </a:rPr>
+              <a:t>PHYSICAL</a:t>
+            </a:r>
+          </a:p>
+          <a:p>
+            <a:pPr algn="l">
+              <a:spcAft>
+                <a:spcPts val="600"/>
+              </a:spcAft>
+            </a:pPr>
+            <a:r>
+              <a:rPr sz="1400" b="0">
+                <a:solidFill>
+                  <a:srgbClr val="9FB2C0"/>
                 </a:solidFill>
                 <a:latin typeface="Calibri"/>
               </a:rPr>
-              <a:t>Dataverse</a:t>
-            </a:r>
-          </a:p>
-          <a:p>
-            <a:pPr algn="l">
-              <a:spcAft>
-                <a:spcPts val="600"/>
-              </a:spcAft>
-            </a:pPr>
-            <a:r>
-              <a:rPr sz="1200" b="0">
-                <a:solidFill>
-                  <a:srgbClr val="9FB2C0"/>
-                </a:solidFill>
-                <a:latin typeface="Calibri"/>
-              </a:rPr>
-              <a:t>Single source of truth</a:t>
+              <a:t>Work-in-place, verified. Credited by the field (MEP/CSA), and only when the package meets its AWP rule: installed, not estimated.</a:t>
             </a:r>
           </a:p>
         </p:txBody>
@@ -7944,8 +9899,8 @@
         </p:nvSpPr>
         <p:spPr>
           <a:xfrm>
-            <a:off x="3108960" y="2834640"/>
-            <a:ext cx="2121408" cy="1737360"/>
+            <a:off x="6309360" y="2926080"/>
+            <a:ext cx="5029200" cy="2011680"/>
           </a:xfrm>
           <a:prstGeom prst="roundRect">
             <a:avLst/>
@@ -7990,8 +9945,8 @@
         </p:nvSpPr>
         <p:spPr>
           <a:xfrm>
-            <a:off x="3246120" y="3063240"/>
-            <a:ext cx="1847088" cy="1371600"/>
+            <a:off x="6583680" y="3154680"/>
+            <a:ext cx="4480560" cy="1645920"/>
           </a:xfrm>
           <a:prstGeom prst="rect">
             <a:avLst/>
@@ -8006,93 +9961,47 @@
           <a:p>
             <a:pPr algn="l">
               <a:spcAft>
-                <a:spcPts val="400"/>
-              </a:spcAft>
-            </a:pPr>
-            <a:r>
-              <a:rPr sz="1500" b="1">
-                <a:solidFill>
-                  <a:srgbClr val="35C2C9"/>
+                <a:spcPts val="600"/>
+              </a:spcAft>
+            </a:pPr>
+            <a:r>
+              <a:rPr sz="1600" b="1">
+                <a:solidFill>
+                  <a:srgbClr val="E8A13A"/>
+                </a:solidFill>
+                <a:latin typeface="Consolas"/>
+              </a:rPr>
+              <a:t>FINANCIAL</a:t>
+            </a:r>
+          </a:p>
+          <a:p>
+            <a:pPr algn="l">
+              <a:spcAft>
+                <a:spcPts val="600"/>
+              </a:spcAft>
+            </a:pPr>
+            <a:r>
+              <a:rPr sz="1400" b="0">
+                <a:solidFill>
+                  <a:srgbClr val="9FB2C0"/>
                 </a:solidFill>
                 <a:latin typeface="Calibri"/>
               </a:rPr>
-              <a:t>Power Apps</a:t>
-            </a:r>
-          </a:p>
-          <a:p>
-            <a:pPr algn="l">
-              <a:spcAft>
-                <a:spcPts val="600"/>
-              </a:spcAft>
-            </a:pPr>
-            <a:r>
-              <a:rPr sz="1200" b="0">
-                <a:solidFill>
-                  <a:srgbClr val="9FB2C0"/>
-                </a:solidFill>
-                <a:latin typeface="Calibri"/>
-              </a:rPr>
-              <a:t>Standard mobile capture</a:t>
-            </a:r>
-          </a:p>
-        </p:txBody>
-      </p:sp>
-      <p:sp>
-        <p:nvSpPr>
-          <p:cNvPr id="9" name="Rounded Rectangle 8"/>
-          <p:cNvSpPr/>
-          <p:nvPr/>
-        </p:nvSpPr>
-        <p:spPr>
-          <a:xfrm>
-            <a:off x="5394960" y="2834640"/>
-            <a:ext cx="2121408" cy="1737360"/>
-          </a:xfrm>
-          <a:prstGeom prst="roundRect">
-            <a:avLst/>
-          </a:prstGeom>
-          <a:solidFill>
-            <a:srgbClr val="111A22"/>
-          </a:solidFill>
-          <a:ln w="9525">
-            <a:solidFill>
-              <a:srgbClr val="1F2C37"/>
-            </a:solidFill>
-          </a:ln>
-          <a:effectLst/>
-        </p:spPr>
-        <p:style>
-          <a:lnRef idx="1">
-            <a:schemeClr val="accent1"/>
-          </a:lnRef>
-          <a:fillRef idx="3">
-            <a:schemeClr val="accent1"/>
-          </a:fillRef>
-          <a:effectRef idx="2">
-            <a:schemeClr val="accent1"/>
-          </a:effectRef>
-          <a:fontRef idx="minor">
-            <a:schemeClr val="lt1"/>
-          </a:fontRef>
-        </p:style>
-        <p:txBody>
-          <a:bodyPr rtlCol="0" anchor="ctr"/>
-          <a:lstStyle/>
-          <a:p>
-            <a:pPr algn="ctr"/>
-          </a:p>
-        </p:txBody>
-      </p:sp>
-      <p:sp>
-        <p:nvSpPr>
-          <p:cNvPr id="10" name="TextBox 9"/>
+              <a:t>Earned value / cost. Credited by Cost Management on its own basis, without pretending it is physical progress.</a:t>
+            </a:r>
+          </a:p>
+        </p:txBody>
+      </p:sp>
+      <p:sp>
+        <p:nvSpPr>
+          <p:cNvPr id="9" name="TextBox 8"/>
           <p:cNvSpPr txBox="1"/>
           <p:nvPr/>
         </p:nvSpPr>
         <p:spPr>
           <a:xfrm>
-            <a:off x="5532120" y="3063240"/>
-            <a:ext cx="1847088" cy="1371600"/>
+            <a:off x="822960" y="5212080"/>
+            <a:ext cx="10515600" cy="914400"/>
           </a:xfrm>
           <a:prstGeom prst="rect">
             <a:avLst/>
@@ -8107,336 +10016,17 @@
           <a:p>
             <a:pPr algn="l">
               <a:spcAft>
-                <a:spcPts val="400"/>
-              </a:spcAft>
-            </a:pPr>
-            <a:r>
-              <a:rPr sz="1500" b="1">
-                <a:solidFill>
-                  <a:srgbClr val="35C2C9"/>
+                <a:spcPts val="600"/>
+              </a:spcAft>
+            </a:pPr>
+            <a:r>
+              <a:rPr sz="1500" b="0">
+                <a:solidFill>
+                  <a:srgbClr val="9FB2C0"/>
                 </a:solidFill>
                 <a:latin typeface="Calibri"/>
               </a:rPr>
-              <a:t>Power Automate</a:t>
-            </a:r>
-          </a:p>
-          <a:p>
-            <a:pPr algn="l">
-              <a:spcAft>
-                <a:spcPts val="600"/>
-              </a:spcAft>
-            </a:pPr>
-            <a:r>
-              <a:rPr sz="1200" b="0">
-                <a:solidFill>
-                  <a:srgbClr val="9FB2C0"/>
-                </a:solidFill>
-                <a:latin typeface="Calibri"/>
-              </a:rPr>
-              <a:t>Ingest, approvals, Process Mining</a:t>
-            </a:r>
-          </a:p>
-        </p:txBody>
-      </p:sp>
-      <p:sp>
-        <p:nvSpPr>
-          <p:cNvPr id="11" name="Rounded Rectangle 10"/>
-          <p:cNvSpPr/>
-          <p:nvPr/>
-        </p:nvSpPr>
-        <p:spPr>
-          <a:xfrm>
-            <a:off x="7680960" y="2834640"/>
-            <a:ext cx="2121408" cy="1737360"/>
-          </a:xfrm>
-          <a:prstGeom prst="roundRect">
-            <a:avLst/>
-          </a:prstGeom>
-          <a:solidFill>
-            <a:srgbClr val="111A22"/>
-          </a:solidFill>
-          <a:ln w="9525">
-            <a:solidFill>
-              <a:srgbClr val="1F2C37"/>
-            </a:solidFill>
-          </a:ln>
-          <a:effectLst/>
-        </p:spPr>
-        <p:style>
-          <a:lnRef idx="1">
-            <a:schemeClr val="accent1"/>
-          </a:lnRef>
-          <a:fillRef idx="3">
-            <a:schemeClr val="accent1"/>
-          </a:fillRef>
-          <a:effectRef idx="2">
-            <a:schemeClr val="accent1"/>
-          </a:effectRef>
-          <a:fontRef idx="minor">
-            <a:schemeClr val="lt1"/>
-          </a:fontRef>
-        </p:style>
-        <p:txBody>
-          <a:bodyPr rtlCol="0" anchor="ctr"/>
-          <a:lstStyle/>
-          <a:p>
-            <a:pPr algn="ctr"/>
-          </a:p>
-        </p:txBody>
-      </p:sp>
-      <p:sp>
-        <p:nvSpPr>
-          <p:cNvPr id="12" name="TextBox 11"/>
-          <p:cNvSpPr txBox="1"/>
-          <p:nvPr/>
-        </p:nvSpPr>
-        <p:spPr>
-          <a:xfrm>
-            <a:off x="7818120" y="3063240"/>
-            <a:ext cx="1847088" cy="1371600"/>
-          </a:xfrm>
-          <a:prstGeom prst="rect">
-            <a:avLst/>
-          </a:prstGeom>
-          <a:noFill/>
-        </p:spPr>
-        <p:txBody>
-          <a:bodyPr wrap="square">
-            <a:spAutoFit/>
-          </a:bodyPr>
-          <a:lstStyle/>
-          <a:p>
-            <a:pPr algn="l">
-              <a:spcAft>
-                <a:spcPts val="400"/>
-              </a:spcAft>
-            </a:pPr>
-            <a:r>
-              <a:rPr sz="1500" b="1">
-                <a:solidFill>
-                  <a:srgbClr val="35C2C9"/>
-                </a:solidFill>
-                <a:latin typeface="Calibri"/>
-              </a:rPr>
-              <a:t>Power BI</a:t>
-            </a:r>
-          </a:p>
-          <a:p>
-            <a:pPr algn="l">
-              <a:spcAft>
-                <a:spcPts val="600"/>
-              </a:spcAft>
-            </a:pPr>
-            <a:r>
-              <a:rPr sz="1200" b="0">
-                <a:solidFill>
-                  <a:srgbClr val="9FB2C0"/>
-                </a:solidFill>
-                <a:latin typeface="Calibri"/>
-              </a:rPr>
-              <a:t>Live dashboards &amp; client reports</a:t>
-            </a:r>
-          </a:p>
-        </p:txBody>
-      </p:sp>
-      <p:sp>
-        <p:nvSpPr>
-          <p:cNvPr id="13" name="Rounded Rectangle 12"/>
-          <p:cNvSpPr/>
-          <p:nvPr/>
-        </p:nvSpPr>
-        <p:spPr>
-          <a:xfrm>
-            <a:off x="9966960" y="2834640"/>
-            <a:ext cx="2121408" cy="1737360"/>
-          </a:xfrm>
-          <a:prstGeom prst="roundRect">
-            <a:avLst/>
-          </a:prstGeom>
-          <a:solidFill>
-            <a:srgbClr val="111A22"/>
-          </a:solidFill>
-          <a:ln w="9525">
-            <a:solidFill>
-              <a:srgbClr val="1F2C37"/>
-            </a:solidFill>
-          </a:ln>
-          <a:effectLst/>
-        </p:spPr>
-        <p:style>
-          <a:lnRef idx="1">
-            <a:schemeClr val="accent1"/>
-          </a:lnRef>
-          <a:fillRef idx="3">
-            <a:schemeClr val="accent1"/>
-          </a:fillRef>
-          <a:effectRef idx="2">
-            <a:schemeClr val="accent1"/>
-          </a:effectRef>
-          <a:fontRef idx="minor">
-            <a:schemeClr val="lt1"/>
-          </a:fontRef>
-        </p:style>
-        <p:txBody>
-          <a:bodyPr rtlCol="0" anchor="ctr"/>
-          <a:lstStyle/>
-          <a:p>
-            <a:pPr algn="ctr"/>
-          </a:p>
-        </p:txBody>
-      </p:sp>
-      <p:sp>
-        <p:nvSpPr>
-          <p:cNvPr id="14" name="TextBox 13"/>
-          <p:cNvSpPr txBox="1"/>
-          <p:nvPr/>
-        </p:nvSpPr>
-        <p:spPr>
-          <a:xfrm>
-            <a:off x="10104120" y="3063240"/>
-            <a:ext cx="1847088" cy="1371600"/>
-          </a:xfrm>
-          <a:prstGeom prst="rect">
-            <a:avLst/>
-          </a:prstGeom>
-          <a:noFill/>
-        </p:spPr>
-        <p:txBody>
-          <a:bodyPr wrap="square">
-            <a:spAutoFit/>
-          </a:bodyPr>
-          <a:lstStyle/>
-          <a:p>
-            <a:pPr algn="l">
-              <a:spcAft>
-                <a:spcPts val="400"/>
-              </a:spcAft>
-            </a:pPr>
-            <a:r>
-              <a:rPr sz="1500" b="1">
-                <a:solidFill>
-                  <a:srgbClr val="35C2C9"/>
-                </a:solidFill>
-                <a:latin typeface="Calibri"/>
-              </a:rPr>
-              <a:t>Power Pages</a:t>
-            </a:r>
-          </a:p>
-          <a:p>
-            <a:pPr algn="l">
-              <a:spcAft>
-                <a:spcPts val="600"/>
-              </a:spcAft>
-            </a:pPr>
-            <a:r>
-              <a:rPr sz="1200" b="0">
-                <a:solidFill>
-                  <a:srgbClr val="9FB2C0"/>
-                </a:solidFill>
-                <a:latin typeface="Calibri"/>
-              </a:rPr>
-              <a:t>External GC portal</a:t>
-            </a:r>
-          </a:p>
-        </p:txBody>
-      </p:sp>
-      <p:sp>
-        <p:nvSpPr>
-          <p:cNvPr id="15" name="Rounded Rectangle 14"/>
-          <p:cNvSpPr/>
-          <p:nvPr/>
-        </p:nvSpPr>
-        <p:spPr>
-          <a:xfrm>
-            <a:off x="822960" y="4892040"/>
-            <a:ext cx="10515600" cy="1234440"/>
-          </a:xfrm>
-          <a:prstGeom prst="roundRect">
-            <a:avLst/>
-          </a:prstGeom>
-          <a:solidFill>
-            <a:srgbClr val="111A22"/>
-          </a:solidFill>
-          <a:ln w="9525">
-            <a:solidFill>
-              <a:srgbClr val="35C2C9"/>
-            </a:solidFill>
-          </a:ln>
-          <a:effectLst/>
-        </p:spPr>
-        <p:style>
-          <a:lnRef idx="1">
-            <a:schemeClr val="accent1"/>
-          </a:lnRef>
-          <a:fillRef idx="3">
-            <a:schemeClr val="accent1"/>
-          </a:fillRef>
-          <a:effectRef idx="2">
-            <a:schemeClr val="accent1"/>
-          </a:effectRef>
-          <a:fontRef idx="minor">
-            <a:schemeClr val="lt1"/>
-          </a:fontRef>
-        </p:style>
-        <p:txBody>
-          <a:bodyPr rtlCol="0" anchor="ctr"/>
-          <a:lstStyle/>
-          <a:p>
-            <a:pPr algn="ctr"/>
-          </a:p>
-        </p:txBody>
-      </p:sp>
-      <p:sp>
-        <p:nvSpPr>
-          <p:cNvPr id="16" name="TextBox 15"/>
-          <p:cNvSpPr txBox="1"/>
-          <p:nvPr/>
-        </p:nvSpPr>
-        <p:spPr>
-          <a:xfrm>
-            <a:off x="1097280" y="5074920"/>
-            <a:ext cx="10058400" cy="914400"/>
-          </a:xfrm>
-          <a:prstGeom prst="rect">
-            <a:avLst/>
-          </a:prstGeom>
-          <a:noFill/>
-        </p:spPr>
-        <p:txBody>
-          <a:bodyPr wrap="square">
-            <a:spAutoFit/>
-          </a:bodyPr>
-          <a:lstStyle/>
-          <a:p>
-            <a:pPr algn="l">
-              <a:spcAft>
-                <a:spcPts val="200"/>
-              </a:spcAft>
-            </a:pPr>
-            <a:r>
-              <a:rPr sz="1500" b="1">
-                <a:solidFill>
-                  <a:srgbClr val="35C2C9"/>
-                </a:solidFill>
-                <a:latin typeface="Calibri"/>
-              </a:rPr>
-              <a:t>The differentiator</a:t>
-            </a:r>
-          </a:p>
-          <a:p>
-            <a:pPr algn="l">
-              <a:spcAft>
-                <a:spcPts val="600"/>
-              </a:spcAft>
-            </a:pPr>
-            <a:r>
-              <a:rPr sz="1350" b="0">
-                <a:solidFill>
-                  <a:srgbClr val="9FB2C0"/>
-                </a:solidFill>
-                <a:latin typeface="Calibri"/>
-              </a:rPr>
-              <a:t>With the right granularity, any report format the client asks for is generated as a query over the data — not a document someone rebuilds by hand. We own the granular truth; reports are derivations.</a:t>
+              <a:t>Each number carries its label and its owner. When financial runs ahead of physical, the system flags the discrepancy — the missing validation of who is closest to reality.</a:t>
             </a:r>
           </a:p>
         </p:txBody>
@@ -8501,7 +10091,7 @@
                 </a:solidFill>
                 <a:latin typeface="Consolas"/>
               </a:rPr>
-              <a:t>ROLLOUT · UNDER 2 MONTHS</a:t>
+              <a:t>EXTERNAL PARTNERS</a:t>
             </a:r>
           </a:p>
         </p:txBody>
@@ -8540,67 +10130,21 @@
                 </a:solidFill>
                 <a:latin typeface="Calibri Light"/>
               </a:rPr>
-              <a:t>Live for the new construction phase</a:t>
-            </a:r>
-          </a:p>
-        </p:txBody>
-      </p:sp>
-      <p:sp>
-        <p:nvSpPr>
-          <p:cNvPr id="4" name="Rounded Rectangle 3"/>
-          <p:cNvSpPr/>
-          <p:nvPr/>
-        </p:nvSpPr>
-        <p:spPr>
-          <a:xfrm>
-            <a:off x="822960" y="2286000"/>
-            <a:ext cx="2103120" cy="566928"/>
-          </a:xfrm>
-          <a:prstGeom prst="roundRect">
-            <a:avLst/>
-          </a:prstGeom>
-          <a:solidFill>
-            <a:srgbClr val="111A22"/>
-          </a:solidFill>
-          <a:ln w="9525">
-            <a:solidFill>
-              <a:srgbClr val="35C2C9"/>
-            </a:solidFill>
-          </a:ln>
-          <a:effectLst/>
-        </p:spPr>
-        <p:style>
-          <a:lnRef idx="1">
-            <a:schemeClr val="accent1"/>
-          </a:lnRef>
-          <a:fillRef idx="3">
-            <a:schemeClr val="accent1"/>
-          </a:fillRef>
-          <a:effectRef idx="2">
-            <a:schemeClr val="accent1"/>
-          </a:effectRef>
-          <a:fontRef idx="minor">
-            <a:schemeClr val="lt1"/>
-          </a:fontRef>
-        </p:style>
-        <p:txBody>
-          <a:bodyPr rtlCol="0" anchor="ctr"/>
-          <a:lstStyle/>
-          <a:p>
-            <a:pPr algn="ctr"/>
-          </a:p>
-        </p:txBody>
-      </p:sp>
-      <p:sp>
-        <p:nvSpPr>
-          <p:cNvPr id="5" name="TextBox 4"/>
+              <a:t>General Contractors, without the chaos</a:t>
+            </a:r>
+          </a:p>
+        </p:txBody>
+      </p:sp>
+      <p:sp>
+        <p:nvSpPr>
+          <p:cNvPr id="4" name="TextBox 3"/>
           <p:cNvSpPr txBox="1"/>
           <p:nvPr/>
         </p:nvSpPr>
         <p:spPr>
           <a:xfrm>
-            <a:off x="960120" y="2414016"/>
-            <a:ext cx="1920240" cy="365760"/>
+            <a:off x="822960" y="1965960"/>
+            <a:ext cx="10515600" cy="822960"/>
           </a:xfrm>
           <a:prstGeom prst="rect">
             <a:avLst/>
@@ -8619,27 +10163,27 @@
               </a:spcAft>
             </a:pPr>
             <a:r>
-              <a:rPr sz="1300" b="1">
-                <a:solidFill>
-                  <a:srgbClr val="35C2C9"/>
-                </a:solidFill>
-                <a:latin typeface="Consolas"/>
-              </a:rPr>
-              <a:t>Weeks 1-2</a:t>
-            </a:r>
-          </a:p>
-        </p:txBody>
-      </p:sp>
-      <p:sp>
-        <p:nvSpPr>
-          <p:cNvPr id="6" name="Rounded Rectangle 5"/>
+              <a:rPr sz="1700" b="0">
+                <a:solidFill>
+                  <a:srgbClr val="9FB2C0"/>
+                </a:solidFill>
+                <a:latin typeface="Calibri"/>
+              </a:rPr>
+              <a:t>GCs stay outside the tenant, but their progress and money enter the same model — coded, traceable, and validated against reality.</a:t>
+            </a:r>
+          </a:p>
+        </p:txBody>
+      </p:sp>
+      <p:sp>
+        <p:nvSpPr>
+          <p:cNvPr id="5" name="Rounded Rectangle 4"/>
           <p:cNvSpPr/>
           <p:nvPr/>
         </p:nvSpPr>
         <p:spPr>
           <a:xfrm>
-            <a:off x="3108960" y="2286000"/>
-            <a:ext cx="8229600" cy="566928"/>
+            <a:off x="822960" y="2880360"/>
+            <a:ext cx="10515600" cy="658368"/>
           </a:xfrm>
           <a:prstGeom prst="roundRect">
             <a:avLst/>
@@ -8678,14 +10222,14 @@
       </p:sp>
       <p:sp>
         <p:nvSpPr>
-          <p:cNvPr id="7" name="TextBox 6"/>
+          <p:cNvPr id="6" name="TextBox 5"/>
           <p:cNvSpPr txBox="1"/>
           <p:nvPr/>
         </p:nvSpPr>
         <p:spPr>
           <a:xfrm>
-            <a:off x="3291840" y="2404872"/>
-            <a:ext cx="7955279" cy="411480"/>
+            <a:off x="1051560" y="2953512"/>
+            <a:ext cx="10058400" cy="548640"/>
           </a:xfrm>
           <a:prstGeom prst="rect">
             <a:avLst/>
@@ -8698,118 +10242,42 @@
           </a:bodyPr>
           <a:lstStyle/>
           <a:p>
-            <a:pPr algn="l">
-              <a:spcAft>
-                <a:spcPts val="600"/>
-              </a:spcAft>
-            </a:pPr>
-            <a:r>
-              <a:rPr sz="1350" b="0">
+            <a:pPr>
+              <a:spcAft>
+                <a:spcPts val="0"/>
+              </a:spcAft>
+            </a:pPr>
+            <a:r>
+              <a:rPr sz="1500" b="1">
+                <a:solidFill>
+                  <a:srgbClr val="E6EDF3"/>
+                </a:solidFill>
+                <a:latin typeface="Calibri"/>
+              </a:rPr>
+              <a:t>Estimates portal.  </a:t>
+            </a:r>
+            <a:r>
+              <a:rPr sz="1350">
                 <a:solidFill>
                   <a:srgbClr val="9FB2C0"/>
                 </a:solidFill>
                 <a:latin typeface="Calibri"/>
               </a:rPr>
-              <a:t>Foundation &amp; pilot — data model, capture app, 2 pilot departments</a:t>
-            </a:r>
-          </a:p>
-        </p:txBody>
-      </p:sp>
-      <p:sp>
-        <p:nvSpPr>
-          <p:cNvPr id="8" name="Rounded Rectangle 7"/>
+              <a:t>A Power Pages form where the GC submits progress by front/package — tagged by dimension and owner.</a:t>
+            </a:r>
+          </a:p>
+        </p:txBody>
+      </p:sp>
+      <p:sp>
+        <p:nvSpPr>
+          <p:cNvPr id="7" name="Rounded Rectangle 6"/>
           <p:cNvSpPr/>
           <p:nvPr/>
         </p:nvSpPr>
         <p:spPr>
           <a:xfrm>
-            <a:off x="822960" y="2944368"/>
-            <a:ext cx="2103120" cy="566928"/>
-          </a:xfrm>
-          <a:prstGeom prst="roundRect">
-            <a:avLst/>
-          </a:prstGeom>
-          <a:solidFill>
-            <a:srgbClr val="111A22"/>
-          </a:solidFill>
-          <a:ln w="9525">
-            <a:solidFill>
-              <a:srgbClr val="35C2C9"/>
-            </a:solidFill>
-          </a:ln>
-          <a:effectLst/>
-        </p:spPr>
-        <p:style>
-          <a:lnRef idx="1">
-            <a:schemeClr val="accent1"/>
-          </a:lnRef>
-          <a:fillRef idx="3">
-            <a:schemeClr val="accent1"/>
-          </a:fillRef>
-          <a:effectRef idx="2">
-            <a:schemeClr val="accent1"/>
-          </a:effectRef>
-          <a:fontRef idx="minor">
-            <a:schemeClr val="lt1"/>
-          </a:fontRef>
-        </p:style>
-        <p:txBody>
-          <a:bodyPr rtlCol="0" anchor="ctr"/>
-          <a:lstStyle/>
-          <a:p>
-            <a:pPr algn="ctr"/>
-          </a:p>
-        </p:txBody>
-      </p:sp>
-      <p:sp>
-        <p:nvSpPr>
-          <p:cNvPr id="9" name="TextBox 8"/>
-          <p:cNvSpPr txBox="1"/>
-          <p:nvPr/>
-        </p:nvSpPr>
-        <p:spPr>
-          <a:xfrm>
-            <a:off x="960120" y="3072384"/>
-            <a:ext cx="1920240" cy="365760"/>
-          </a:xfrm>
-          <a:prstGeom prst="rect">
-            <a:avLst/>
-          </a:prstGeom>
-          <a:noFill/>
-        </p:spPr>
-        <p:txBody>
-          <a:bodyPr wrap="square">
-            <a:spAutoFit/>
-          </a:bodyPr>
-          <a:lstStyle/>
-          <a:p>
-            <a:pPr algn="l">
-              <a:spcAft>
-                <a:spcPts val="600"/>
-              </a:spcAft>
-            </a:pPr>
-            <a:r>
-              <a:rPr sz="1300" b="1">
-                <a:solidFill>
-                  <a:srgbClr val="35C2C9"/>
-                </a:solidFill>
-                <a:latin typeface="Consolas"/>
-              </a:rPr>
-              <a:t>Weeks 3-4</a:t>
-            </a:r>
-          </a:p>
-        </p:txBody>
-      </p:sp>
-      <p:sp>
-        <p:nvSpPr>
-          <p:cNvPr id="10" name="Rounded Rectangle 9"/>
-          <p:cNvSpPr/>
-          <p:nvPr/>
-        </p:nvSpPr>
-        <p:spPr>
-          <a:xfrm>
-            <a:off x="3108960" y="2944368"/>
-            <a:ext cx="8229600" cy="566928"/>
+            <a:off x="822960" y="3657600"/>
+            <a:ext cx="10515600" cy="658368"/>
           </a:xfrm>
           <a:prstGeom prst="roundRect">
             <a:avLst/>
@@ -8848,14 +10316,14 @@
       </p:sp>
       <p:sp>
         <p:nvSpPr>
-          <p:cNvPr id="11" name="TextBox 10"/>
+          <p:cNvPr id="8" name="TextBox 7"/>
           <p:cNvSpPr txBox="1"/>
           <p:nvPr/>
         </p:nvSpPr>
         <p:spPr>
           <a:xfrm>
-            <a:off x="3291840" y="3063239"/>
-            <a:ext cx="7955279" cy="411480"/>
+            <a:off x="1051560" y="3730752"/>
+            <a:ext cx="10058400" cy="548640"/>
           </a:xfrm>
           <a:prstGeom prst="rect">
             <a:avLst/>
@@ -8868,118 +10336,42 @@
           </a:bodyPr>
           <a:lstStyle/>
           <a:p>
-            <a:pPr algn="l">
-              <a:spcAft>
-                <a:spcPts val="600"/>
-              </a:spcAft>
-            </a:pPr>
-            <a:r>
-              <a:rPr sz="1350" b="0">
+            <a:pPr>
+              <a:spcAft>
+                <a:spcPts val="0"/>
+              </a:spcAft>
+            </a:pPr>
+            <a:r>
+              <a:rPr sz="1500" b="1">
+                <a:solidFill>
+                  <a:srgbClr val="E6EDF3"/>
+                </a:solidFill>
+                <a:latin typeface="Calibri"/>
+              </a:rPr>
+              <a:t>Invoice upload.  </a:t>
+            </a:r>
+            <a:r>
+              <a:rPr sz="1350">
                 <a:solidFill>
                   <a:srgbClr val="9FB2C0"/>
                 </a:solidFill>
                 <a:latin typeface="Calibri"/>
               </a:rPr>
-              <a:t>Department rollout — PMO, Planning, Quality, MEP, CSA, Doc Control</a:t>
-            </a:r>
-          </a:p>
-        </p:txBody>
-      </p:sp>
-      <p:sp>
-        <p:nvSpPr>
-          <p:cNvPr id="12" name="Rounded Rectangle 11"/>
+              <a:t>The GC uploads its CFDI (PDF/XML); a flow reads it, links it to the estimate and package, and routes it to Cost approval.</a:t>
+            </a:r>
+          </a:p>
+        </p:txBody>
+      </p:sp>
+      <p:sp>
+        <p:nvSpPr>
+          <p:cNvPr id="9" name="Rounded Rectangle 8"/>
           <p:cNvSpPr/>
           <p:nvPr/>
         </p:nvSpPr>
         <p:spPr>
           <a:xfrm>
-            <a:off x="822960" y="3602735"/>
-            <a:ext cx="2103120" cy="566928"/>
-          </a:xfrm>
-          <a:prstGeom prst="roundRect">
-            <a:avLst/>
-          </a:prstGeom>
-          <a:solidFill>
-            <a:srgbClr val="111A22"/>
-          </a:solidFill>
-          <a:ln w="9525">
-            <a:solidFill>
-              <a:srgbClr val="35C2C9"/>
-            </a:solidFill>
-          </a:ln>
-          <a:effectLst/>
-        </p:spPr>
-        <p:style>
-          <a:lnRef idx="1">
-            <a:schemeClr val="accent1"/>
-          </a:lnRef>
-          <a:fillRef idx="3">
-            <a:schemeClr val="accent1"/>
-          </a:fillRef>
-          <a:effectRef idx="2">
-            <a:schemeClr val="accent1"/>
-          </a:effectRef>
-          <a:fontRef idx="minor">
-            <a:schemeClr val="lt1"/>
-          </a:fontRef>
-        </p:style>
-        <p:txBody>
-          <a:bodyPr rtlCol="0" anchor="ctr"/>
-          <a:lstStyle/>
-          <a:p>
-            <a:pPr algn="ctr"/>
-          </a:p>
-        </p:txBody>
-      </p:sp>
-      <p:sp>
-        <p:nvSpPr>
-          <p:cNvPr id="13" name="TextBox 12"/>
-          <p:cNvSpPr txBox="1"/>
-          <p:nvPr/>
-        </p:nvSpPr>
-        <p:spPr>
-          <a:xfrm>
-            <a:off x="960120" y="3730751"/>
-            <a:ext cx="1920240" cy="365760"/>
-          </a:xfrm>
-          <a:prstGeom prst="rect">
-            <a:avLst/>
-          </a:prstGeom>
-          <a:noFill/>
-        </p:spPr>
-        <p:txBody>
-          <a:bodyPr wrap="square">
-            <a:spAutoFit/>
-          </a:bodyPr>
-          <a:lstStyle/>
-          <a:p>
-            <a:pPr algn="l">
-              <a:spcAft>
-                <a:spcPts val="600"/>
-              </a:spcAft>
-            </a:pPr>
-            <a:r>
-              <a:rPr sz="1300" b="1">
-                <a:solidFill>
-                  <a:srgbClr val="35C2C9"/>
-                </a:solidFill>
-                <a:latin typeface="Consolas"/>
-              </a:rPr>
-              <a:t>Week 5</a:t>
-            </a:r>
-          </a:p>
-        </p:txBody>
-      </p:sp>
-      <p:sp>
-        <p:nvSpPr>
-          <p:cNvPr id="14" name="Rounded Rectangle 13"/>
-          <p:cNvSpPr/>
-          <p:nvPr/>
-        </p:nvSpPr>
-        <p:spPr>
-          <a:xfrm>
-            <a:off x="3108960" y="3602735"/>
-            <a:ext cx="8229600" cy="566928"/>
+            <a:off x="822960" y="4434840"/>
+            <a:ext cx="10515600" cy="658368"/>
           </a:xfrm>
           <a:prstGeom prst="roundRect">
             <a:avLst/>
@@ -9018,14 +10410,14 @@
       </p:sp>
       <p:sp>
         <p:nvSpPr>
-          <p:cNvPr id="15" name="TextBox 14"/>
+          <p:cNvPr id="10" name="TextBox 9"/>
           <p:cNvSpPr txBox="1"/>
           <p:nvPr/>
         </p:nvSpPr>
         <p:spPr>
           <a:xfrm>
-            <a:off x="3291840" y="3721607"/>
-            <a:ext cx="7955279" cy="411480"/>
+            <a:off x="1051560" y="4507992"/>
+            <a:ext cx="10058400" cy="548640"/>
           </a:xfrm>
           <a:prstGeom prst="rect">
             <a:avLst/>
@@ -9038,529 +10430,28 @@
           </a:bodyPr>
           <a:lstStyle/>
           <a:p>
-            <a:pPr algn="l">
-              <a:spcAft>
-                <a:spcPts val="600"/>
-              </a:spcAft>
-            </a:pPr>
-            <a:r>
-              <a:rPr sz="1350" b="0">
+            <a:pPr>
+              <a:spcAft>
+                <a:spcPts val="0"/>
+              </a:spcAft>
+            </a:pPr>
+            <a:r>
+              <a:rPr sz="1500" b="1">
+                <a:solidFill>
+                  <a:srgbClr val="E6EDF3"/>
+                </a:solidFill>
+                <a:latin typeface="Calibri"/>
+              </a:rPr>
+              <a:t>Reconciled, not trusted.  </a:t>
+            </a:r>
+            <a:r>
+              <a:rPr sz="1350">
                 <a:solidFill>
                   <a:srgbClr val="9FB2C0"/>
                 </a:solidFill>
                 <a:latin typeface="Calibri"/>
               </a:rPr>
-              <a:t>GC portal — estimates + CFDI invoice upload</a:t>
-            </a:r>
-          </a:p>
-        </p:txBody>
-      </p:sp>
-      <p:sp>
-        <p:nvSpPr>
-          <p:cNvPr id="16" name="Rounded Rectangle 15"/>
-          <p:cNvSpPr/>
-          <p:nvPr/>
-        </p:nvSpPr>
-        <p:spPr>
-          <a:xfrm>
-            <a:off x="822960" y="4261103"/>
-            <a:ext cx="2103120" cy="566928"/>
-          </a:xfrm>
-          <a:prstGeom prst="roundRect">
-            <a:avLst/>
-          </a:prstGeom>
-          <a:solidFill>
-            <a:srgbClr val="111A22"/>
-          </a:solidFill>
-          <a:ln w="9525">
-            <a:solidFill>
-              <a:srgbClr val="35C2C9"/>
-            </a:solidFill>
-          </a:ln>
-          <a:effectLst/>
-        </p:spPr>
-        <p:style>
-          <a:lnRef idx="1">
-            <a:schemeClr val="accent1"/>
-          </a:lnRef>
-          <a:fillRef idx="3">
-            <a:schemeClr val="accent1"/>
-          </a:fillRef>
-          <a:effectRef idx="2">
-            <a:schemeClr val="accent1"/>
-          </a:effectRef>
-          <a:fontRef idx="minor">
-            <a:schemeClr val="lt1"/>
-          </a:fontRef>
-        </p:style>
-        <p:txBody>
-          <a:bodyPr rtlCol="0" anchor="ctr"/>
-          <a:lstStyle/>
-          <a:p>
-            <a:pPr algn="ctr"/>
-          </a:p>
-        </p:txBody>
-      </p:sp>
-      <p:sp>
-        <p:nvSpPr>
-          <p:cNvPr id="17" name="TextBox 16"/>
-          <p:cNvSpPr txBox="1"/>
-          <p:nvPr/>
-        </p:nvSpPr>
-        <p:spPr>
-          <a:xfrm>
-            <a:off x="960120" y="4389119"/>
-            <a:ext cx="1920240" cy="365760"/>
-          </a:xfrm>
-          <a:prstGeom prst="rect">
-            <a:avLst/>
-          </a:prstGeom>
-          <a:noFill/>
-        </p:spPr>
-        <p:txBody>
-          <a:bodyPr wrap="square">
-            <a:spAutoFit/>
-          </a:bodyPr>
-          <a:lstStyle/>
-          <a:p>
-            <a:pPr algn="l">
-              <a:spcAft>
-                <a:spcPts val="600"/>
-              </a:spcAft>
-            </a:pPr>
-            <a:r>
-              <a:rPr sz="1300" b="1">
-                <a:solidFill>
-                  <a:srgbClr val="35C2C9"/>
-                </a:solidFill>
-                <a:latin typeface="Consolas"/>
-              </a:rPr>
-              <a:t>Week 6</a:t>
-            </a:r>
-          </a:p>
-        </p:txBody>
-      </p:sp>
-      <p:sp>
-        <p:nvSpPr>
-          <p:cNvPr id="18" name="Rounded Rectangle 17"/>
-          <p:cNvSpPr/>
-          <p:nvPr/>
-        </p:nvSpPr>
-        <p:spPr>
-          <a:xfrm>
-            <a:off x="3108960" y="4261103"/>
-            <a:ext cx="8229600" cy="566928"/>
-          </a:xfrm>
-          <a:prstGeom prst="roundRect">
-            <a:avLst/>
-          </a:prstGeom>
-          <a:solidFill>
-            <a:srgbClr val="111A22"/>
-          </a:solidFill>
-          <a:ln w="9525">
-            <a:solidFill>
-              <a:srgbClr val="1F2C37"/>
-            </a:solidFill>
-          </a:ln>
-          <a:effectLst/>
-        </p:spPr>
-        <p:style>
-          <a:lnRef idx="1">
-            <a:schemeClr val="accent1"/>
-          </a:lnRef>
-          <a:fillRef idx="3">
-            <a:schemeClr val="accent1"/>
-          </a:fillRef>
-          <a:effectRef idx="2">
-            <a:schemeClr val="accent1"/>
-          </a:effectRef>
-          <a:fontRef idx="minor">
-            <a:schemeClr val="lt1"/>
-          </a:fontRef>
-        </p:style>
-        <p:txBody>
-          <a:bodyPr rtlCol="0" anchor="ctr"/>
-          <a:lstStyle/>
-          <a:p>
-            <a:pPr algn="ctr"/>
-          </a:p>
-        </p:txBody>
-      </p:sp>
-      <p:sp>
-        <p:nvSpPr>
-          <p:cNvPr id="19" name="TextBox 18"/>
-          <p:cNvSpPr txBox="1"/>
-          <p:nvPr/>
-        </p:nvSpPr>
-        <p:spPr>
-          <a:xfrm>
-            <a:off x="3291840" y="4379975"/>
-            <a:ext cx="7955279" cy="411480"/>
-          </a:xfrm>
-          <a:prstGeom prst="rect">
-            <a:avLst/>
-          </a:prstGeom>
-          <a:noFill/>
-        </p:spPr>
-        <p:txBody>
-          <a:bodyPr wrap="square">
-            <a:spAutoFit/>
-          </a:bodyPr>
-          <a:lstStyle/>
-          <a:p>
-            <a:pPr algn="l">
-              <a:spcAft>
-                <a:spcPts val="600"/>
-              </a:spcAft>
-            </a:pPr>
-            <a:r>
-              <a:rPr sz="1350" b="0">
-                <a:solidFill>
-                  <a:srgbClr val="9FB2C0"/>
-                </a:solidFill>
-                <a:latin typeface="Calibri"/>
-              </a:rPr>
-              <a:t>Reporting — Power BI dashboards, DAX by dimension</a:t>
-            </a:r>
-          </a:p>
-        </p:txBody>
-      </p:sp>
-      <p:sp>
-        <p:nvSpPr>
-          <p:cNvPr id="20" name="Rounded Rectangle 19"/>
-          <p:cNvSpPr/>
-          <p:nvPr/>
-        </p:nvSpPr>
-        <p:spPr>
-          <a:xfrm>
-            <a:off x="822960" y="4919471"/>
-            <a:ext cx="2103120" cy="566928"/>
-          </a:xfrm>
-          <a:prstGeom prst="roundRect">
-            <a:avLst/>
-          </a:prstGeom>
-          <a:solidFill>
-            <a:srgbClr val="111A22"/>
-          </a:solidFill>
-          <a:ln w="9525">
-            <a:solidFill>
-              <a:srgbClr val="35C2C9"/>
-            </a:solidFill>
-          </a:ln>
-          <a:effectLst/>
-        </p:spPr>
-        <p:style>
-          <a:lnRef idx="1">
-            <a:schemeClr val="accent1"/>
-          </a:lnRef>
-          <a:fillRef idx="3">
-            <a:schemeClr val="accent1"/>
-          </a:fillRef>
-          <a:effectRef idx="2">
-            <a:schemeClr val="accent1"/>
-          </a:effectRef>
-          <a:fontRef idx="minor">
-            <a:schemeClr val="lt1"/>
-          </a:fontRef>
-        </p:style>
-        <p:txBody>
-          <a:bodyPr rtlCol="0" anchor="ctr"/>
-          <a:lstStyle/>
-          <a:p>
-            <a:pPr algn="ctr"/>
-          </a:p>
-        </p:txBody>
-      </p:sp>
-      <p:sp>
-        <p:nvSpPr>
-          <p:cNvPr id="21" name="TextBox 20"/>
-          <p:cNvSpPr txBox="1"/>
-          <p:nvPr/>
-        </p:nvSpPr>
-        <p:spPr>
-          <a:xfrm>
-            <a:off x="960120" y="5047487"/>
-            <a:ext cx="1920240" cy="365760"/>
-          </a:xfrm>
-          <a:prstGeom prst="rect">
-            <a:avLst/>
-          </a:prstGeom>
-          <a:noFill/>
-        </p:spPr>
-        <p:txBody>
-          <a:bodyPr wrap="square">
-            <a:spAutoFit/>
-          </a:bodyPr>
-          <a:lstStyle/>
-          <a:p>
-            <a:pPr algn="l">
-              <a:spcAft>
-                <a:spcPts val="600"/>
-              </a:spcAft>
-            </a:pPr>
-            <a:r>
-              <a:rPr sz="1300" b="1">
-                <a:solidFill>
-                  <a:srgbClr val="35C2C9"/>
-                </a:solidFill>
-                <a:latin typeface="Consolas"/>
-              </a:rPr>
-              <a:t>Week 7</a:t>
-            </a:r>
-          </a:p>
-        </p:txBody>
-      </p:sp>
-      <p:sp>
-        <p:nvSpPr>
-          <p:cNvPr id="22" name="Rounded Rectangle 21"/>
-          <p:cNvSpPr/>
-          <p:nvPr/>
-        </p:nvSpPr>
-        <p:spPr>
-          <a:xfrm>
-            <a:off x="3108960" y="4919471"/>
-            <a:ext cx="8229600" cy="566928"/>
-          </a:xfrm>
-          <a:prstGeom prst="roundRect">
-            <a:avLst/>
-          </a:prstGeom>
-          <a:solidFill>
-            <a:srgbClr val="111A22"/>
-          </a:solidFill>
-          <a:ln w="9525">
-            <a:solidFill>
-              <a:srgbClr val="1F2C37"/>
-            </a:solidFill>
-          </a:ln>
-          <a:effectLst/>
-        </p:spPr>
-        <p:style>
-          <a:lnRef idx="1">
-            <a:schemeClr val="accent1"/>
-          </a:lnRef>
-          <a:fillRef idx="3">
-            <a:schemeClr val="accent1"/>
-          </a:fillRef>
-          <a:effectRef idx="2">
-            <a:schemeClr val="accent1"/>
-          </a:effectRef>
-          <a:fontRef idx="minor">
-            <a:schemeClr val="lt1"/>
-          </a:fontRef>
-        </p:style>
-        <p:txBody>
-          <a:bodyPr rtlCol="0" anchor="ctr"/>
-          <a:lstStyle/>
-          <a:p>
-            <a:pPr algn="ctr"/>
-          </a:p>
-        </p:txBody>
-      </p:sp>
-      <p:sp>
-        <p:nvSpPr>
-          <p:cNvPr id="23" name="TextBox 22"/>
-          <p:cNvSpPr txBox="1"/>
-          <p:nvPr/>
-        </p:nvSpPr>
-        <p:spPr>
-          <a:xfrm>
-            <a:off x="3291840" y="5038343"/>
-            <a:ext cx="7955279" cy="411480"/>
-          </a:xfrm>
-          <a:prstGeom prst="rect">
-            <a:avLst/>
-          </a:prstGeom>
-          <a:noFill/>
-        </p:spPr>
-        <p:txBody>
-          <a:bodyPr wrap="square">
-            <a:spAutoFit/>
-          </a:bodyPr>
-          <a:lstStyle/>
-          <a:p>
-            <a:pPr algn="l">
-              <a:spcAft>
-                <a:spcPts val="600"/>
-              </a:spcAft>
-            </a:pPr>
-            <a:r>
-              <a:rPr sz="1350" b="0">
-                <a:solidFill>
-                  <a:srgbClr val="9FB2C0"/>
-                </a:solidFill>
-                <a:latin typeface="Calibri"/>
-              </a:rPr>
-              <a:t>Process &amp; hardening — Process Mining, testing</a:t>
-            </a:r>
-          </a:p>
-        </p:txBody>
-      </p:sp>
-      <p:sp>
-        <p:nvSpPr>
-          <p:cNvPr id="24" name="Rounded Rectangle 23"/>
-          <p:cNvSpPr/>
-          <p:nvPr/>
-        </p:nvSpPr>
-        <p:spPr>
-          <a:xfrm>
-            <a:off x="822960" y="5577839"/>
-            <a:ext cx="2103120" cy="566928"/>
-          </a:xfrm>
-          <a:prstGeom prst="roundRect">
-            <a:avLst/>
-          </a:prstGeom>
-          <a:solidFill>
-            <a:srgbClr val="111A22"/>
-          </a:solidFill>
-          <a:ln w="9525">
-            <a:solidFill>
-              <a:srgbClr val="35C2C9"/>
-            </a:solidFill>
-          </a:ln>
-          <a:effectLst/>
-        </p:spPr>
-        <p:style>
-          <a:lnRef idx="1">
-            <a:schemeClr val="accent1"/>
-          </a:lnRef>
-          <a:fillRef idx="3">
-            <a:schemeClr val="accent1"/>
-          </a:fillRef>
-          <a:effectRef idx="2">
-            <a:schemeClr val="accent1"/>
-          </a:effectRef>
-          <a:fontRef idx="minor">
-            <a:schemeClr val="lt1"/>
-          </a:fontRef>
-        </p:style>
-        <p:txBody>
-          <a:bodyPr rtlCol="0" anchor="ctr"/>
-          <a:lstStyle/>
-          <a:p>
-            <a:pPr algn="ctr"/>
-          </a:p>
-        </p:txBody>
-      </p:sp>
-      <p:sp>
-        <p:nvSpPr>
-          <p:cNvPr id="25" name="TextBox 24"/>
-          <p:cNvSpPr txBox="1"/>
-          <p:nvPr/>
-        </p:nvSpPr>
-        <p:spPr>
-          <a:xfrm>
-            <a:off x="960120" y="5705855"/>
-            <a:ext cx="1920240" cy="365760"/>
-          </a:xfrm>
-          <a:prstGeom prst="rect">
-            <a:avLst/>
-          </a:prstGeom>
-          <a:noFill/>
-        </p:spPr>
-        <p:txBody>
-          <a:bodyPr wrap="square">
-            <a:spAutoFit/>
-          </a:bodyPr>
-          <a:lstStyle/>
-          <a:p>
-            <a:pPr algn="l">
-              <a:spcAft>
-                <a:spcPts val="600"/>
-              </a:spcAft>
-            </a:pPr>
-            <a:r>
-              <a:rPr sz="1300" b="1">
-                <a:solidFill>
-                  <a:srgbClr val="35C2C9"/>
-                </a:solidFill>
-                <a:latin typeface="Consolas"/>
-              </a:rPr>
-              <a:t>Week 8</a:t>
-            </a:r>
-          </a:p>
-        </p:txBody>
-      </p:sp>
-      <p:sp>
-        <p:nvSpPr>
-          <p:cNvPr id="26" name="Rounded Rectangle 25"/>
-          <p:cNvSpPr/>
-          <p:nvPr/>
-        </p:nvSpPr>
-        <p:spPr>
-          <a:xfrm>
-            <a:off x="3108960" y="5577839"/>
-            <a:ext cx="8229600" cy="566928"/>
-          </a:xfrm>
-          <a:prstGeom prst="roundRect">
-            <a:avLst/>
-          </a:prstGeom>
-          <a:solidFill>
-            <a:srgbClr val="111A22"/>
-          </a:solidFill>
-          <a:ln w="9525">
-            <a:solidFill>
-              <a:srgbClr val="1F2C37"/>
-            </a:solidFill>
-          </a:ln>
-          <a:effectLst/>
-        </p:spPr>
-        <p:style>
-          <a:lnRef idx="1">
-            <a:schemeClr val="accent1"/>
-          </a:lnRef>
-          <a:fillRef idx="3">
-            <a:schemeClr val="accent1"/>
-          </a:fillRef>
-          <a:effectRef idx="2">
-            <a:schemeClr val="accent1"/>
-          </a:effectRef>
-          <a:fontRef idx="minor">
-            <a:schemeClr val="lt1"/>
-          </a:fontRef>
-        </p:style>
-        <p:txBody>
-          <a:bodyPr rtlCol="0" anchor="ctr"/>
-          <a:lstStyle/>
-          <a:p>
-            <a:pPr algn="ctr"/>
-          </a:p>
-        </p:txBody>
-      </p:sp>
-      <p:sp>
-        <p:nvSpPr>
-          <p:cNvPr id="27" name="TextBox 26"/>
-          <p:cNvSpPr txBox="1"/>
-          <p:nvPr/>
-        </p:nvSpPr>
-        <p:spPr>
-          <a:xfrm>
-            <a:off x="3291840" y="5696711"/>
-            <a:ext cx="7955279" cy="411480"/>
-          </a:xfrm>
-          <a:prstGeom prst="rect">
-            <a:avLst/>
-          </a:prstGeom>
-          <a:noFill/>
-        </p:spPr>
-        <p:txBody>
-          <a:bodyPr wrap="square">
-            <a:spAutoFit/>
-          </a:bodyPr>
-          <a:lstStyle/>
-          <a:p>
-            <a:pPr algn="l">
-              <a:spcAft>
-                <a:spcPts val="600"/>
-              </a:spcAft>
-            </a:pPr>
-            <a:r>
-              <a:rPr sz="1350" b="0">
-                <a:solidFill>
-                  <a:srgbClr val="9FB2C0"/>
-                </a:solidFill>
-                <a:latin typeface="Calibri"/>
-              </a:rPr>
-              <a:t>Training &amp; handover — per-department training, operation manuals</a:t>
+              <a:t>Their 40% is reconciled against the field's physical progress instead of accepted blindly.</a:t>
             </a:r>
           </a:p>
         </p:txBody>

--- a/odata/ODATA_QR03_Single_Source_of_Truth.pptx
+++ b/odata/ODATA_QR03_Single_Source_of_Truth.pptx
@@ -3332,7 +3332,7 @@
                 </a:solidFill>
                 <a:latin typeface="Arial"/>
               </a:rPr>
-              <a:t>turner &amp; townsend    ·    ODATA QR03    ·    Confidential</a:t>
+              <a:t>Turner &amp; Townsend    ·    ODATA QR03    ·    Confidential</a:t>
             </a:r>
           </a:p>
         </p:txBody>
@@ -3868,7 +3868,7 @@
                 </a:solidFill>
                 <a:latin typeface="Arial"/>
               </a:rPr>
-              <a:t>turner &amp; townsend    ·    ODATA QR03    ·    Confidential</a:t>
+              <a:t>Turner &amp; Townsend    ·    ODATA QR03    ·    Confidential</a:t>
             </a:r>
           </a:p>
         </p:txBody>
@@ -4510,7 +4510,7 @@
                 </a:solidFill>
                 <a:latin typeface="Arial"/>
               </a:rPr>
-              <a:t>turner &amp; townsend    ·    ODATA QR03    ·    Confidential</a:t>
+              <a:t>Turner &amp; Townsend    ·    ODATA QR03    ·    Confidential</a:t>
             </a:r>
           </a:p>
         </p:txBody>
@@ -4912,7 +4912,7 @@
                 </a:solidFill>
                 <a:latin typeface="Arial"/>
               </a:rPr>
-              <a:t>turner &amp; townsend    ·    ODATA QR03    ·    Confidential</a:t>
+              <a:t>Turner &amp; Townsend    ·    ODATA QR03    ·    Confidential</a:t>
             </a:r>
           </a:p>
         </p:txBody>
@@ -5458,7 +5458,7 @@
                 </a:solidFill>
                 <a:latin typeface="Arial"/>
               </a:rPr>
-              <a:t>turner &amp; townsend    ·    ODATA QR03    ·    Confidential</a:t>
+              <a:t>Turner &amp; Townsend    ·    ODATA QR03    ·    Confidential</a:t>
             </a:r>
           </a:p>
         </p:txBody>
@@ -6189,7 +6189,7 @@
                 </a:solidFill>
                 <a:latin typeface="Arial"/>
               </a:rPr>
-              <a:t>turner &amp; townsend    ·    ODATA QR03    ·    Confidential</a:t>
+              <a:t>Turner &amp; Townsend    ·    ODATA QR03    ·    Confidential</a:t>
             </a:r>
           </a:p>
         </p:txBody>
@@ -6634,7 +6634,7 @@
                 </a:solidFill>
                 <a:latin typeface="Arial"/>
               </a:rPr>
-              <a:t>turner &amp; townsend    ·    ODATA QR03    ·    Confidential</a:t>
+              <a:t>Turner &amp; Townsend    ·    ODATA QR03    ·    Confidential</a:t>
             </a:r>
           </a:p>
         </p:txBody>
@@ -7176,7 +7176,7 @@
                 </a:solidFill>
                 <a:latin typeface="Arial"/>
               </a:rPr>
-              <a:t>turner &amp; townsend    ·    ODATA QR03    ·    Confidential</a:t>
+              <a:t>Turner &amp; Townsend    ·    ODATA QR03    ·    Confidential</a:t>
             </a:r>
           </a:p>
         </p:txBody>
@@ -7408,7 +7408,7 @@
                 </a:solidFill>
                 <a:latin typeface="Arial"/>
               </a:rPr>
-              <a:t>turner &amp; townsend</a:t>
+              <a:t>Turner &amp; Townsend</a:t>
             </a:r>
             <a:r>
               <a:rPr sz="1200">
